--- a/thesis/Defense_Slides.pptx
+++ b/thesis/Defense_Slides.pptx
@@ -35687,7 +35687,7 @@
           </p:nvPr>
         </p:nvGraphicFramePr>
         <p:xfrm>
-          <a:off x="548640" y="1600200"/>
+          <a:off x="548640" y="1572768"/>
           <a:ext cx="6766560" cy="914400"/>
         </p:xfrm>
         <a:graphic>
@@ -35699,7 +35699,7 @@
                 <a:gridCol w="1737360"/>
                 <a:gridCol w="1737360"/>
               </a:tblGrid>
-              <a:tr h="283464">
+              <a:tr h="246888">
                 <a:tc>
                   <a:txBody>
                     <a:bodyPr/>
@@ -35709,7 +35709,7 @@
                         <a:buNone/>
                       </a:pPr>
                       <a:r>
-                        <a:rPr lang="en-US" sz="1200" b="1" dirty="0">
+                        <a:rPr lang="en-US" sz="1150" b="1" dirty="0">
                           <a:solidFill>
                             <a:srgbClr val="FFFFFF"/>
                           </a:solidFill>
@@ -35719,7 +35719,7 @@
                         </a:rPr>
                         <a:t>کلاس</a:t>
                       </a:r>
-                      <a:endParaRPr lang="en-US" sz="1200" dirty="0">
+                      <a:endParaRPr lang="en-US" sz="1150" dirty="0">
                         <a:latin typeface="Arial" charset="0"/>
                         <a:ea typeface="Arial" charset="0"/>
                         <a:cs typeface="Arial" charset="0"/>
@@ -35777,7 +35777,7 @@
                         <a:buNone/>
                       </a:pPr>
                       <a:r>
-                        <a:rPr lang="en-US" sz="1200" b="1" dirty="0">
+                        <a:rPr lang="en-US" sz="1150" b="1" dirty="0">
                           <a:solidFill>
                             <a:srgbClr val="FFFFFF"/>
                           </a:solidFill>
@@ -35785,9 +35785,9 @@
                           <a:ea typeface="Arial" pitchFamily="34" charset="-122"/>
                           <a:cs typeface="Arial" pitchFamily="34" charset="-120"/>
                         </a:rPr>
-                        <a:t>تقسیم مسیر اول</a:t>
+                        <a:t>تقسیم استاندارد</a:t>
                       </a:r>
-                      <a:endParaRPr lang="en-US" sz="1200" dirty="0">
+                      <a:endParaRPr lang="en-US" sz="1150" dirty="0">
                         <a:latin typeface="Arial" charset="0"/>
                         <a:ea typeface="Arial" charset="0"/>
                         <a:cs typeface="Arial" charset="0"/>
@@ -35845,7 +35845,7 @@
                         <a:buNone/>
                       </a:pPr>
                       <a:r>
-                        <a:rPr lang="en-US" sz="1200" b="1" dirty="0">
+                        <a:rPr lang="en-US" sz="1150" b="1" dirty="0">
                           <a:solidFill>
                             <a:srgbClr val="FFFFFF"/>
                           </a:solidFill>
@@ -35853,9 +35853,9 @@
                           <a:ea typeface="Arial" pitchFamily="34" charset="-122"/>
                           <a:cs typeface="Arial" pitchFamily="34" charset="-120"/>
                         </a:rPr>
-                        <a:t>تقسیم استاندارد</a:t>
+                        <a:t>تقسیم مسیر اول</a:t>
                       </a:r>
-                      <a:endParaRPr lang="en-US" sz="1200" dirty="0">
+                      <a:endParaRPr lang="en-US" sz="1150" dirty="0">
                         <a:latin typeface="Arial" charset="0"/>
                         <a:ea typeface="Arial" charset="0"/>
                         <a:cs typeface="Arial" charset="0"/>
@@ -35905,7 +35905,7 @@
                   </a:tcPr>
                 </a:tc>
               </a:tr>
-              <a:tr h="283464">
+              <a:tr h="246888">
                 <a:tc>
                   <a:txBody>
                     <a:bodyPr/>
@@ -35915,7 +35915,7 @@
                         <a:buNone/>
                       </a:pPr>
                       <a:r>
-                        <a:rPr lang="en-US" sz="1150" dirty="0">
+                        <a:rPr lang="en-US" sz="1100" dirty="0">
                           <a:solidFill>
                             <a:srgbClr val="1B2236"/>
                           </a:solidFill>
@@ -35925,7 +35925,7 @@
                         </a:rPr>
                         <a:t>Normal — عادی</a:t>
                       </a:r>
-                      <a:endParaRPr lang="en-US" sz="1150" dirty="0">
+                      <a:endParaRPr lang="en-US" sz="1100" dirty="0">
                         <a:latin typeface="Arial" charset="0"/>
                         <a:ea typeface="Arial" charset="0"/>
                         <a:cs typeface="Arial" charset="0"/>
@@ -35983,7 +35983,7 @@
                         <a:buNone/>
                       </a:pPr>
                       <a:r>
-                        <a:rPr lang="en-US" sz="1150" dirty="0">
+                        <a:rPr lang="en-US" sz="1100" dirty="0">
                           <a:solidFill>
                             <a:srgbClr val="1B2236"/>
                           </a:solidFill>
@@ -35991,9 +35991,9 @@
                           <a:ea typeface="Arial" pitchFamily="34" charset="-122"/>
                           <a:cs typeface="Arial" pitchFamily="34" charset="-120"/>
                         </a:rPr>
-                        <a:t>148</a:t>
+                        <a:t>150</a:t>
                       </a:r>
-                      <a:endParaRPr lang="en-US" sz="1150" dirty="0">
+                      <a:endParaRPr lang="en-US" sz="1100" dirty="0">
                         <a:latin typeface="Arial" charset="0"/>
                         <a:ea typeface="Arial" charset="0"/>
                         <a:cs typeface="Arial" charset="0"/>
@@ -36051,7 +36051,7 @@
                         <a:buNone/>
                       </a:pPr>
                       <a:r>
-                        <a:rPr lang="en-US" sz="1150" dirty="0">
+                        <a:rPr lang="en-US" sz="1100" dirty="0">
                           <a:solidFill>
                             <a:srgbClr val="1B2236"/>
                           </a:solidFill>
@@ -36059,9 +36059,9 @@
                           <a:ea typeface="Arial" pitchFamily="34" charset="-122"/>
                           <a:cs typeface="Arial" pitchFamily="34" charset="-120"/>
                         </a:rPr>
-                        <a:t>150</a:t>
+                        <a:t>148</a:t>
                       </a:r>
-                      <a:endParaRPr lang="en-US" sz="1150" dirty="0">
+                      <a:endParaRPr lang="en-US" sz="1100" dirty="0">
                         <a:latin typeface="Arial" charset="0"/>
                         <a:ea typeface="Arial" charset="0"/>
                         <a:cs typeface="Arial" charset="0"/>
@@ -36111,7 +36111,7 @@
                   </a:tcPr>
                 </a:tc>
               </a:tr>
-              <a:tr h="283464">
+              <a:tr h="246888">
                 <a:tc>
                   <a:txBody>
                     <a:bodyPr/>
@@ -36121,7 +36121,7 @@
                         <a:buNone/>
                       </a:pPr>
                       <a:r>
-                        <a:rPr lang="en-US" sz="1150" dirty="0">
+                        <a:rPr lang="en-US" sz="1100" dirty="0">
                           <a:solidFill>
                             <a:srgbClr val="1B2236"/>
                           </a:solidFill>
@@ -36129,9 +36129,9 @@
                           <a:ea typeface="Arial" pitchFamily="34" charset="-122"/>
                           <a:cs typeface="Arial" pitchFamily="34" charset="-120"/>
                         </a:rPr>
-                        <a:t>Robbery — سرقت</a:t>
+                        <a:t>RoadAccidents — تصادف رانندگی</a:t>
                       </a:r>
-                      <a:endParaRPr lang="en-US" sz="1150" dirty="0">
+                      <a:endParaRPr lang="en-US" sz="1100" dirty="0">
                         <a:latin typeface="Arial" charset="0"/>
                         <a:ea typeface="Arial" charset="0"/>
                         <a:cs typeface="Arial" charset="0"/>
@@ -36189,7 +36189,7 @@
                         <a:buNone/>
                       </a:pPr>
                       <a:r>
-                        <a:rPr lang="en-US" sz="1150" dirty="0">
+                        <a:rPr lang="en-US" sz="1100" dirty="0">
                           <a:solidFill>
                             <a:srgbClr val="1B2236"/>
                           </a:solidFill>
@@ -36199,7 +36199,7 @@
                         </a:rPr>
                         <a:t>23</a:t>
                       </a:r>
-                      <a:endParaRPr lang="en-US" sz="1150" dirty="0">
+                      <a:endParaRPr lang="en-US" sz="1100" dirty="0">
                         <a:latin typeface="Arial" charset="0"/>
                         <a:ea typeface="Arial" charset="0"/>
                         <a:cs typeface="Arial" charset="0"/>
@@ -36257,7 +36257,7 @@
                         <a:buNone/>
                       </a:pPr>
                       <a:r>
-                        <a:rPr lang="en-US" sz="1150" dirty="0">
+                        <a:rPr lang="en-US" sz="1100" dirty="0">
                           <a:solidFill>
                             <a:srgbClr val="1B2236"/>
                           </a:solidFill>
@@ -36265,9 +36265,9 @@
                           <a:ea typeface="Arial" pitchFamily="34" charset="-122"/>
                           <a:cs typeface="Arial" pitchFamily="34" charset="-120"/>
                         </a:rPr>
-                        <a:t>≈ 5</a:t>
+                        <a:t>23</a:t>
                       </a:r>
-                      <a:endParaRPr lang="en-US" sz="1150" dirty="0">
+                      <a:endParaRPr lang="en-US" sz="1100" dirty="0">
                         <a:latin typeface="Arial" charset="0"/>
                         <a:ea typeface="Arial" charset="0"/>
                         <a:cs typeface="Arial" charset="0"/>
@@ -36317,7 +36317,7 @@
                   </a:tcPr>
                 </a:tc>
               </a:tr>
-              <a:tr h="283464">
+              <a:tr h="246888">
                 <a:tc>
                   <a:txBody>
                     <a:bodyPr/>
@@ -36327,7 +36327,7 @@
                         <a:buNone/>
                       </a:pPr>
                       <a:r>
-                        <a:rPr lang="en-US" sz="1150" dirty="0">
+                        <a:rPr lang="en-US" sz="1100" dirty="0">
                           <a:solidFill>
                             <a:srgbClr val="1B2236"/>
                           </a:solidFill>
@@ -36335,9 +36335,9 @@
                           <a:ea typeface="Arial" pitchFamily="34" charset="-122"/>
                           <a:cs typeface="Arial" pitchFamily="34" charset="-120"/>
                         </a:rPr>
-                        <a:t>RoadAccidents — تصادف</a:t>
+                        <a:t>Shooting — تیراندازی</a:t>
                       </a:r>
-                      <a:endParaRPr lang="en-US" sz="1150" dirty="0">
+                      <a:endParaRPr lang="en-US" sz="1100" dirty="0">
                         <a:latin typeface="Arial" charset="0"/>
                         <a:ea typeface="Arial" charset="0"/>
                         <a:cs typeface="Arial" charset="0"/>
@@ -36395,7 +36395,7 @@
                         <a:buNone/>
                       </a:pPr>
                       <a:r>
-                        <a:rPr lang="en-US" sz="1150" dirty="0">
+                        <a:rPr lang="en-US" sz="1100" dirty="0">
                           <a:solidFill>
                             <a:srgbClr val="1B2236"/>
                           </a:solidFill>
@@ -36405,7 +36405,7 @@
                         </a:rPr>
                         <a:t>23</a:t>
                       </a:r>
-                      <a:endParaRPr lang="en-US" sz="1150" dirty="0">
+                      <a:endParaRPr lang="en-US" sz="1100" dirty="0">
                         <a:latin typeface="Arial" charset="0"/>
                         <a:ea typeface="Arial" charset="0"/>
                         <a:cs typeface="Arial" charset="0"/>
@@ -36463,7 +36463,7 @@
                         <a:buNone/>
                       </a:pPr>
                       <a:r>
-                        <a:rPr lang="en-US" sz="1150" dirty="0">
+                        <a:rPr lang="en-US" sz="1100" dirty="0">
                           <a:solidFill>
                             <a:srgbClr val="1B2236"/>
                           </a:solidFill>
@@ -36471,9 +36471,9 @@
                           <a:ea typeface="Arial" pitchFamily="34" charset="-122"/>
                           <a:cs typeface="Arial" pitchFamily="34" charset="-120"/>
                         </a:rPr>
-                        <a:t>≈ 23</a:t>
+                        <a:t>8</a:t>
                       </a:r>
-                      <a:endParaRPr lang="en-US" sz="1150" dirty="0">
+                      <a:endParaRPr lang="en-US" sz="1100" dirty="0">
                         <a:latin typeface="Arial" charset="0"/>
                         <a:ea typeface="Arial" charset="0"/>
                         <a:cs typeface="Arial" charset="0"/>
@@ -36523,7 +36523,7 @@
                   </a:tcPr>
                 </a:tc>
               </a:tr>
-              <a:tr h="283464">
+              <a:tr h="246888">
                 <a:tc>
                   <a:txBody>
                     <a:bodyPr/>
@@ -36533,7 +36533,7 @@
                         <a:buNone/>
                       </a:pPr>
                       <a:r>
-                        <a:rPr lang="en-US" sz="1150" dirty="0">
+                        <a:rPr lang="en-US" sz="1100" dirty="0">
                           <a:solidFill>
                             <a:srgbClr val="1B2236"/>
                           </a:solidFill>
@@ -36541,9 +36541,9 @@
                           <a:ea typeface="Arial" pitchFamily="34" charset="-122"/>
                           <a:cs typeface="Arial" pitchFamily="34" charset="-120"/>
                         </a:rPr>
-                        <a:t>Stealing — دزدی</a:t>
+                        <a:t>Explosion — انفجار</a:t>
                       </a:r>
-                      <a:endParaRPr lang="en-US" sz="1150" dirty="0">
+                      <a:endParaRPr lang="en-US" sz="1100" dirty="0">
                         <a:latin typeface="Arial" charset="0"/>
                         <a:ea typeface="Arial" charset="0"/>
                         <a:cs typeface="Arial" charset="0"/>
@@ -36601,7 +36601,7 @@
                         <a:buNone/>
                       </a:pPr>
                       <a:r>
-                        <a:rPr lang="en-US" sz="1150" dirty="0">
+                        <a:rPr lang="en-US" sz="1100" dirty="0">
                           <a:solidFill>
                             <a:srgbClr val="1B2236"/>
                           </a:solidFill>
@@ -36609,9 +36609,9 @@
                           <a:ea typeface="Arial" pitchFamily="34" charset="-122"/>
                           <a:cs typeface="Arial" pitchFamily="34" charset="-120"/>
                         </a:rPr>
-                        <a:t>15</a:t>
+                        <a:t>21</a:t>
                       </a:r>
-                      <a:endParaRPr lang="en-US" sz="1150" dirty="0">
+                      <a:endParaRPr lang="en-US" sz="1100" dirty="0">
                         <a:latin typeface="Arial" charset="0"/>
                         <a:ea typeface="Arial" charset="0"/>
                         <a:cs typeface="Arial" charset="0"/>
@@ -36669,7 +36669,7 @@
                         <a:buNone/>
                       </a:pPr>
                       <a:r>
-                        <a:rPr lang="en-US" sz="1150" dirty="0">
+                        <a:rPr lang="en-US" sz="1100" dirty="0">
                           <a:solidFill>
                             <a:srgbClr val="1B2236"/>
                           </a:solidFill>
@@ -36677,9 +36677,9 @@
                           <a:ea typeface="Arial" pitchFamily="34" charset="-122"/>
                           <a:cs typeface="Arial" pitchFamily="34" charset="-120"/>
                         </a:rPr>
-                        <a:t>≈ 5</a:t>
+                        <a:t>8</a:t>
                       </a:r>
-                      <a:endParaRPr lang="en-US" sz="1150" dirty="0">
+                      <a:endParaRPr lang="en-US" sz="1100" dirty="0">
                         <a:latin typeface="Arial" charset="0"/>
                         <a:ea typeface="Arial" charset="0"/>
                         <a:cs typeface="Arial" charset="0"/>
@@ -36729,7 +36729,7 @@
                   </a:tcPr>
                 </a:tc>
               </a:tr>
-              <a:tr h="283464">
+              <a:tr h="246888">
                 <a:tc>
                   <a:txBody>
                     <a:bodyPr/>
@@ -36739,7 +36739,7 @@
                         <a:buNone/>
                       </a:pPr>
                       <a:r>
-                        <a:rPr lang="en-US" sz="1150" dirty="0">
+                        <a:rPr lang="en-US" sz="1100" dirty="0">
                           <a:solidFill>
                             <a:srgbClr val="1B2236"/>
                           </a:solidFill>
@@ -36747,9 +36747,9 @@
                           <a:ea typeface="Arial" pitchFamily="34" charset="-122"/>
                           <a:cs typeface="Arial" pitchFamily="34" charset="-120"/>
                         </a:rPr>
-                        <a:t>Burglary — سرقت از منزل</a:t>
+                        <a:t>Shoplifting — دزدی از مغازه</a:t>
                       </a:r>
-                      <a:endParaRPr lang="en-US" sz="1150" dirty="0">
+                      <a:endParaRPr lang="en-US" sz="1100" dirty="0">
                         <a:latin typeface="Arial" charset="0"/>
                         <a:ea typeface="Arial" charset="0"/>
                         <a:cs typeface="Arial" charset="0"/>
@@ -36807,7 +36807,7 @@
                         <a:buNone/>
                       </a:pPr>
                       <a:r>
-                        <a:rPr lang="en-US" sz="1150" dirty="0">
+                        <a:rPr lang="en-US" sz="1100" dirty="0">
                           <a:solidFill>
                             <a:srgbClr val="1B2236"/>
                           </a:solidFill>
@@ -36815,9 +36815,9 @@
                           <a:ea typeface="Arial" pitchFamily="34" charset="-122"/>
                           <a:cs typeface="Arial" pitchFamily="34" charset="-120"/>
                         </a:rPr>
-                        <a:t>15</a:t>
+                        <a:t>21</a:t>
                       </a:r>
-                      <a:endParaRPr lang="en-US" sz="1150" dirty="0">
+                      <a:endParaRPr lang="en-US" sz="1100" dirty="0">
                         <a:latin typeface="Arial" charset="0"/>
                         <a:ea typeface="Arial" charset="0"/>
                         <a:cs typeface="Arial" charset="0"/>
@@ -36875,7 +36875,7 @@
                         <a:buNone/>
                       </a:pPr>
                       <a:r>
-                        <a:rPr lang="en-US" sz="1150" dirty="0">
+                        <a:rPr lang="en-US" sz="1100" dirty="0">
                           <a:solidFill>
                             <a:srgbClr val="1B2236"/>
                           </a:solidFill>
@@ -36883,9 +36883,9 @@
                           <a:ea typeface="Arial" pitchFamily="34" charset="-122"/>
                           <a:cs typeface="Arial" pitchFamily="34" charset="-120"/>
                         </a:rPr>
-                        <a:t>≈ 5</a:t>
+                        <a:t>8</a:t>
                       </a:r>
-                      <a:endParaRPr lang="en-US" sz="1150" dirty="0">
+                      <a:endParaRPr lang="en-US" sz="1100" dirty="0">
                         <a:latin typeface="Arial" charset="0"/>
                         <a:ea typeface="Arial" charset="0"/>
                         <a:cs typeface="Arial" charset="0"/>
@@ -36935,7 +36935,7 @@
                   </a:tcPr>
                 </a:tc>
               </a:tr>
-              <a:tr h="283464">
+              <a:tr h="246888">
                 <a:tc>
                   <a:txBody>
                     <a:bodyPr/>
@@ -36945,7 +36945,7 @@
                         <a:buNone/>
                       </a:pPr>
                       <a:r>
-                        <a:rPr lang="en-US" sz="1150" dirty="0">
+                        <a:rPr lang="en-US" sz="1100" dirty="0">
                           <a:solidFill>
                             <a:srgbClr val="1B2236"/>
                           </a:solidFill>
@@ -36953,9 +36953,9 @@
                           <a:ea typeface="Arial" pitchFamily="34" charset="-122"/>
                           <a:cs typeface="Arial" pitchFamily="34" charset="-120"/>
                         </a:rPr>
-                        <a:t>Shoplifting — دزدی از مغازه</a:t>
+                        <a:t>Burglary — سرقت از منزل</a:t>
                       </a:r>
-                      <a:endParaRPr lang="en-US" sz="1150" dirty="0">
+                      <a:endParaRPr lang="en-US" sz="1100" dirty="0">
                         <a:latin typeface="Arial" charset="0"/>
                         <a:ea typeface="Arial" charset="0"/>
                         <a:cs typeface="Arial" charset="0"/>
@@ -37013,7 +37013,7 @@
                         <a:buNone/>
                       </a:pPr>
                       <a:r>
-                        <a:rPr lang="en-US" sz="1150" dirty="0">
+                        <a:rPr lang="en-US" sz="1100" dirty="0">
                           <a:solidFill>
                             <a:srgbClr val="1B2236"/>
                           </a:solidFill>
@@ -37021,9 +37021,9 @@
                           <a:ea typeface="Arial" pitchFamily="34" charset="-122"/>
                           <a:cs typeface="Arial" pitchFamily="34" charset="-120"/>
                         </a:rPr>
-                        <a:t>8</a:t>
+                        <a:t>13</a:t>
                       </a:r>
-                      <a:endParaRPr lang="en-US" sz="1150" dirty="0">
+                      <a:endParaRPr lang="en-US" sz="1100" dirty="0">
                         <a:latin typeface="Arial" charset="0"/>
                         <a:ea typeface="Arial" charset="0"/>
                         <a:cs typeface="Arial" charset="0"/>
@@ -37081,7 +37081,7 @@
                         <a:buNone/>
                       </a:pPr>
                       <a:r>
-                        <a:rPr lang="en-US" sz="1150" dirty="0">
+                        <a:rPr lang="en-US" sz="1100" dirty="0">
                           <a:solidFill>
                             <a:srgbClr val="1B2236"/>
                           </a:solidFill>
@@ -37089,9 +37089,9 @@
                           <a:ea typeface="Arial" pitchFamily="34" charset="-122"/>
                           <a:cs typeface="Arial" pitchFamily="34" charset="-120"/>
                         </a:rPr>
-                        <a:t>≈ 5</a:t>
+                        <a:t>15</a:t>
                       </a:r>
-                      <a:endParaRPr lang="en-US" sz="1150" dirty="0">
+                      <a:endParaRPr lang="en-US" sz="1100" dirty="0">
                         <a:latin typeface="Arial" charset="0"/>
                         <a:ea typeface="Arial" charset="0"/>
                         <a:cs typeface="Arial" charset="0"/>
@@ -37141,7 +37141,7 @@
                   </a:tcPr>
                 </a:tc>
               </a:tr>
-              <a:tr h="283464">
+              <a:tr h="246888">
                 <a:tc>
                   <a:txBody>
                     <a:bodyPr/>
@@ -37151,7 +37151,7 @@
                         <a:buNone/>
                       </a:pPr>
                       <a:r>
-                        <a:rPr lang="en-US" sz="1150" dirty="0">
+                        <a:rPr lang="en-US" sz="1100" dirty="0">
                           <a:solidFill>
                             <a:srgbClr val="1B2236"/>
                           </a:solidFill>
@@ -37159,9 +37159,9 @@
                           <a:ea typeface="Arial" pitchFamily="34" charset="-122"/>
                           <a:cs typeface="Arial" pitchFamily="34" charset="-120"/>
                         </a:rPr>
-                        <a:t>Fighting — درگیری</a:t>
+                        <a:t>Arson — آتش‌افروزی</a:t>
                       </a:r>
-                      <a:endParaRPr lang="en-US" sz="1150" dirty="0">
+                      <a:endParaRPr lang="en-US" sz="1100" dirty="0">
                         <a:latin typeface="Arial" charset="0"/>
                         <a:ea typeface="Arial" charset="0"/>
                         <a:cs typeface="Arial" charset="0"/>
@@ -37219,7 +37219,7 @@
                         <a:buNone/>
                       </a:pPr>
                       <a:r>
-                        <a:rPr lang="en-US" sz="1150" dirty="0">
+                        <a:rPr lang="en-US" sz="1100" dirty="0">
                           <a:solidFill>
                             <a:srgbClr val="1B2236"/>
                           </a:solidFill>
@@ -37227,9 +37227,9 @@
                           <a:ea typeface="Arial" pitchFamily="34" charset="-122"/>
                           <a:cs typeface="Arial" pitchFamily="34" charset="-120"/>
                         </a:rPr>
-                        <a:t>8</a:t>
+                        <a:t>9</a:t>
                       </a:r>
-                      <a:endParaRPr lang="en-US" sz="1150" dirty="0">
+                      <a:endParaRPr lang="en-US" sz="1100" dirty="0">
                         <a:latin typeface="Arial" charset="0"/>
                         <a:ea typeface="Arial" charset="0"/>
                         <a:cs typeface="Arial" charset="0"/>
@@ -37287,7 +37287,7 @@
                         <a:buNone/>
                       </a:pPr>
                       <a:r>
-                        <a:rPr lang="en-US" sz="1150" dirty="0">
+                        <a:rPr lang="en-US" sz="1100" dirty="0">
                           <a:solidFill>
                             <a:srgbClr val="1B2236"/>
                           </a:solidFill>
@@ -37295,9 +37295,9 @@
                           <a:ea typeface="Arial" pitchFamily="34" charset="-122"/>
                           <a:cs typeface="Arial" pitchFamily="34" charset="-120"/>
                         </a:rPr>
-                        <a:t>≈ 5</a:t>
+                        <a:t>8</a:t>
                       </a:r>
-                      <a:endParaRPr lang="en-US" sz="1150" dirty="0">
+                      <a:endParaRPr lang="en-US" sz="1100" dirty="0">
                         <a:latin typeface="Arial" charset="0"/>
                         <a:ea typeface="Arial" charset="0"/>
                         <a:cs typeface="Arial" charset="0"/>
@@ -37347,7 +37347,7 @@
                   </a:tcPr>
                 </a:tc>
               </a:tr>
-              <a:tr h="283464">
+              <a:tr h="246888">
                 <a:tc>
                   <a:txBody>
                     <a:bodyPr/>
@@ -37357,17 +37357,17 @@
                         <a:buNone/>
                       </a:pPr>
                       <a:r>
-                        <a:rPr lang="en-US" sz="1150" dirty="0">
+                        <a:rPr lang="en-US" sz="1100" b="1" dirty="0">
                           <a:solidFill>
-                            <a:srgbClr val="1B2236"/>
+                            <a:srgbClr val="16264F"/>
                           </a:solidFill>
                           <a:latin typeface="Arial" pitchFamily="34" charset="0"/>
                           <a:ea typeface="Arial" pitchFamily="34" charset="-122"/>
                           <a:cs typeface="Arial" pitchFamily="34" charset="-120"/>
                         </a:rPr>
-                        <a:t>Assault — تعرض</a:t>
+                        <a:t>Arrest — بازداشت</a:t>
                       </a:r>
-                      <a:endParaRPr lang="en-US" sz="1150" dirty="0">
+                      <a:endParaRPr lang="en-US" sz="1100" dirty="0">
                         <a:latin typeface="Arial" charset="0"/>
                         <a:ea typeface="Arial" charset="0"/>
                         <a:cs typeface="Arial" charset="0"/>
@@ -37412,7 +37412,7 @@
                       <a:tailEnd type="none" w="med" len="med"/>
                     </a:lnB>
                     <a:solidFill>
-                      <a:srgbClr val="FFFFFF"/>
+                      <a:srgbClr val="FFF2DC"/>
                     </a:solidFill>
                   </a:tcPr>
                 </a:tc>
@@ -37425,17 +37425,17 @@
                         <a:buNone/>
                       </a:pPr>
                       <a:r>
-                        <a:rPr lang="en-US" sz="1150" dirty="0">
+                        <a:rPr lang="en-US" sz="1100" b="1" dirty="0">
                           <a:solidFill>
-                            <a:srgbClr val="1B2236"/>
+                            <a:srgbClr val="16264F"/>
                           </a:solidFill>
                           <a:latin typeface="Arial" pitchFamily="34" charset="0"/>
                           <a:ea typeface="Arial" pitchFamily="34" charset="-122"/>
                           <a:cs typeface="Arial" pitchFamily="34" charset="-120"/>
                         </a:rPr>
-                        <a:t>8</a:t>
+                        <a:t>5</a:t>
                       </a:r>
-                      <a:endParaRPr lang="en-US" sz="1150" dirty="0">
+                      <a:endParaRPr lang="en-US" sz="1100" dirty="0">
                         <a:latin typeface="Arial" charset="0"/>
                         <a:ea typeface="Arial" charset="0"/>
                         <a:cs typeface="Arial" charset="0"/>
@@ -37480,7 +37480,7 @@
                       <a:tailEnd type="none" w="med" len="med"/>
                     </a:lnB>
                     <a:solidFill>
-                      <a:srgbClr val="FFFFFF"/>
+                      <a:srgbClr val="FFF2DC"/>
                     </a:solidFill>
                   </a:tcPr>
                 </a:tc>
@@ -37493,17 +37493,17 @@
                         <a:buNone/>
                       </a:pPr>
                       <a:r>
-                        <a:rPr lang="en-US" sz="1150" dirty="0">
+                        <a:rPr lang="en-US" sz="1100" b="1" dirty="0">
                           <a:solidFill>
-                            <a:srgbClr val="1B2236"/>
+                            <a:srgbClr val="16264F"/>
                           </a:solidFill>
                           <a:latin typeface="Arial" pitchFamily="34" charset="0"/>
                           <a:ea typeface="Arial" pitchFamily="34" charset="-122"/>
                           <a:cs typeface="Arial" pitchFamily="34" charset="-120"/>
                         </a:rPr>
-                        <a:t>≈ 5</a:t>
+                        <a:t>8</a:t>
                       </a:r>
-                      <a:endParaRPr lang="en-US" sz="1150" dirty="0">
+                      <a:endParaRPr lang="en-US" sz="1100" dirty="0">
                         <a:latin typeface="Arial" charset="0"/>
                         <a:ea typeface="Arial" charset="0"/>
                         <a:cs typeface="Arial" charset="0"/>
@@ -37548,12 +37548,12 @@
                       <a:tailEnd type="none" w="med" len="med"/>
                     </a:lnB>
                     <a:solidFill>
-                      <a:srgbClr val="FFFFFF"/>
+                      <a:srgbClr val="FFF2DC"/>
                     </a:solidFill>
                   </a:tcPr>
                 </a:tc>
               </a:tr>
-              <a:tr h="283464">
+              <a:tr h="246888">
                 <a:tc>
                   <a:txBody>
                     <a:bodyPr/>
@@ -37563,17 +37563,17 @@
                         <a:buNone/>
                       </a:pPr>
                       <a:r>
-                        <a:rPr lang="en-US" sz="1150" dirty="0">
+                        <a:rPr lang="en-US" sz="1100" b="1" dirty="0">
                           <a:solidFill>
-                            <a:srgbClr val="1B2236"/>
+                            <a:srgbClr val="16264F"/>
                           </a:solidFill>
                           <a:latin typeface="Arial" pitchFamily="34" charset="0"/>
                           <a:ea typeface="Arial" pitchFamily="34" charset="-122"/>
                           <a:cs typeface="Arial" pitchFamily="34" charset="-120"/>
                         </a:rPr>
-                        <a:t>Vandalism — تخریب</a:t>
+                        <a:t>Fighting — درگیری</a:t>
                       </a:r>
-                      <a:endParaRPr lang="en-US" sz="1150" dirty="0">
+                      <a:endParaRPr lang="en-US" sz="1100" dirty="0">
                         <a:latin typeface="Arial" charset="0"/>
                         <a:ea typeface="Arial" charset="0"/>
                         <a:cs typeface="Arial" charset="0"/>
@@ -37618,7 +37618,7 @@
                       <a:tailEnd type="none" w="med" len="med"/>
                     </a:lnB>
                     <a:solidFill>
-                      <a:srgbClr val="EDF1F8"/>
+                      <a:srgbClr val="FFF2DC"/>
                     </a:solidFill>
                   </a:tcPr>
                 </a:tc>
@@ -37631,17 +37631,17 @@
                         <a:buNone/>
                       </a:pPr>
                       <a:r>
-                        <a:rPr lang="en-US" sz="1150" dirty="0">
+                        <a:rPr lang="en-US" sz="1100" b="1" dirty="0">
                           <a:solidFill>
-                            <a:srgbClr val="1B2236"/>
+                            <a:srgbClr val="16264F"/>
                           </a:solidFill>
                           <a:latin typeface="Arial" pitchFamily="34" charset="0"/>
                           <a:ea typeface="Arial" pitchFamily="34" charset="-122"/>
                           <a:cs typeface="Arial" pitchFamily="34" charset="-120"/>
                         </a:rPr>
-                        <a:t>8</a:t>
+                        <a:t>5</a:t>
                       </a:r>
-                      <a:endParaRPr lang="en-US" sz="1150" dirty="0">
+                      <a:endParaRPr lang="en-US" sz="1100" dirty="0">
                         <a:latin typeface="Arial" charset="0"/>
                         <a:ea typeface="Arial" charset="0"/>
                         <a:cs typeface="Arial" charset="0"/>
@@ -37686,7 +37686,7 @@
                       <a:tailEnd type="none" w="med" len="med"/>
                     </a:lnB>
                     <a:solidFill>
-                      <a:srgbClr val="EDF1F8"/>
+                      <a:srgbClr val="FFF2DC"/>
                     </a:solidFill>
                   </a:tcPr>
                 </a:tc>
@@ -37699,17 +37699,17 @@
                         <a:buNone/>
                       </a:pPr>
                       <a:r>
-                        <a:rPr lang="en-US" sz="1150" dirty="0">
+                        <a:rPr lang="en-US" sz="1100" b="1" dirty="0">
                           <a:solidFill>
-                            <a:srgbClr val="1B2236"/>
+                            <a:srgbClr val="16264F"/>
                           </a:solidFill>
                           <a:latin typeface="Arial" pitchFamily="34" charset="0"/>
                           <a:ea typeface="Arial" pitchFamily="34" charset="-122"/>
                           <a:cs typeface="Arial" pitchFamily="34" charset="-120"/>
                         </a:rPr>
-                        <a:t>≈ 5</a:t>
+                        <a:t>8</a:t>
                       </a:r>
-                      <a:endParaRPr lang="en-US" sz="1150" dirty="0">
+                      <a:endParaRPr lang="en-US" sz="1100" dirty="0">
                         <a:latin typeface="Arial" charset="0"/>
                         <a:ea typeface="Arial" charset="0"/>
                         <a:cs typeface="Arial" charset="0"/>
@@ -37754,12 +37754,12 @@
                       <a:tailEnd type="none" w="med" len="med"/>
                     </a:lnB>
                     <a:solidFill>
-                      <a:srgbClr val="EDF1F8"/>
+                      <a:srgbClr val="FFF2DC"/>
                     </a:solidFill>
                   </a:tcPr>
                 </a:tc>
               </a:tr>
-              <a:tr h="283464">
+              <a:tr h="246888">
                 <a:tc>
                   <a:txBody>
                     <a:bodyPr/>
@@ -37769,17 +37769,17 @@
                         <a:buNone/>
                       </a:pPr>
                       <a:r>
-                        <a:rPr lang="en-US" sz="1150" dirty="0">
+                        <a:rPr lang="en-US" sz="1100" b="1" dirty="0">
                           <a:solidFill>
-                            <a:srgbClr val="1B2236"/>
+                            <a:srgbClr val="16264F"/>
                           </a:solidFill>
                           <a:latin typeface="Arial" pitchFamily="34" charset="0"/>
                           <a:ea typeface="Arial" pitchFamily="34" charset="-122"/>
                           <a:cs typeface="Arial" pitchFamily="34" charset="-120"/>
                         </a:rPr>
-                        <a:t>Abuse — سوءاستفاده</a:t>
+                        <a:t>Robbery — سرقت</a:t>
                       </a:r>
-                      <a:endParaRPr lang="en-US" sz="1150" dirty="0">
+                      <a:endParaRPr lang="en-US" sz="1100" dirty="0">
                         <a:latin typeface="Arial" charset="0"/>
                         <a:ea typeface="Arial" charset="0"/>
                         <a:cs typeface="Arial" charset="0"/>
@@ -37824,7 +37824,7 @@
                       <a:tailEnd type="none" w="med" len="med"/>
                     </a:lnB>
                     <a:solidFill>
-                      <a:srgbClr val="FFFFFF"/>
+                      <a:srgbClr val="FFF2DC"/>
                     </a:solidFill>
                   </a:tcPr>
                 </a:tc>
@@ -37837,17 +37837,17 @@
                         <a:buNone/>
                       </a:pPr>
                       <a:r>
-                        <a:rPr lang="en-US" sz="1150" dirty="0">
+                        <a:rPr lang="en-US" sz="1100" b="1" dirty="0">
                           <a:solidFill>
-                            <a:srgbClr val="1B2236"/>
+                            <a:srgbClr val="16264F"/>
                           </a:solidFill>
                           <a:latin typeface="Arial" pitchFamily="34" charset="0"/>
                           <a:ea typeface="Arial" pitchFamily="34" charset="-122"/>
                           <a:cs typeface="Arial" pitchFamily="34" charset="-120"/>
                         </a:rPr>
-                        <a:t>8</a:t>
+                        <a:t>5</a:t>
                       </a:r>
-                      <a:endParaRPr lang="en-US" sz="1150" dirty="0">
+                      <a:endParaRPr lang="en-US" sz="1100" dirty="0">
                         <a:latin typeface="Arial" charset="0"/>
                         <a:ea typeface="Arial" charset="0"/>
                         <a:cs typeface="Arial" charset="0"/>
@@ -37892,7 +37892,7 @@
                       <a:tailEnd type="none" w="med" len="med"/>
                     </a:lnB>
                     <a:solidFill>
-                      <a:srgbClr val="FFFFFF"/>
+                      <a:srgbClr val="FFF2DC"/>
                     </a:solidFill>
                   </a:tcPr>
                 </a:tc>
@@ -37905,17 +37905,17 @@
                         <a:buNone/>
                       </a:pPr>
                       <a:r>
-                        <a:rPr lang="en-US" sz="1150" dirty="0">
+                        <a:rPr lang="en-US" sz="1100" b="1" dirty="0">
                           <a:solidFill>
-                            <a:srgbClr val="1B2236"/>
+                            <a:srgbClr val="16264F"/>
                           </a:solidFill>
                           <a:latin typeface="Arial" pitchFamily="34" charset="0"/>
                           <a:ea typeface="Arial" pitchFamily="34" charset="-122"/>
                           <a:cs typeface="Arial" pitchFamily="34" charset="-120"/>
                         </a:rPr>
-                        <a:t>2</a:t>
+                        <a:t>23</a:t>
                       </a:r>
-                      <a:endParaRPr lang="en-US" sz="1150" dirty="0">
+                      <a:endParaRPr lang="en-US" sz="1100" dirty="0">
                         <a:latin typeface="Arial" charset="0"/>
                         <a:ea typeface="Arial" charset="0"/>
                         <a:cs typeface="Arial" charset="0"/>
@@ -37960,12 +37960,12 @@
                       <a:tailEnd type="none" w="med" len="med"/>
                     </a:lnB>
                     <a:solidFill>
-                      <a:srgbClr val="FFFFFF"/>
+                      <a:srgbClr val="FFF2DC"/>
                     </a:solidFill>
                   </a:tcPr>
                 </a:tc>
               </a:tr>
-              <a:tr h="283464">
+              <a:tr h="246888">
                 <a:tc>
                   <a:txBody>
                     <a:bodyPr/>
@@ -37975,17 +37975,17 @@
                         <a:buNone/>
                       </a:pPr>
                       <a:r>
-                        <a:rPr lang="en-US" sz="1150" dirty="0">
+                        <a:rPr lang="en-US" sz="1100" b="1" dirty="0">
                           <a:solidFill>
-                            <a:srgbClr val="1B2236"/>
+                            <a:srgbClr val="16264F"/>
                           </a:solidFill>
                           <a:latin typeface="Arial" pitchFamily="34" charset="0"/>
                           <a:ea typeface="Arial" pitchFamily="34" charset="-122"/>
                           <a:cs typeface="Arial" pitchFamily="34" charset="-120"/>
                         </a:rPr>
-                        <a:t>سایر کلاس‌ها</a:t>
+                        <a:t>Stealing — دزدی</a:t>
                       </a:r>
-                      <a:endParaRPr lang="en-US" sz="1150" dirty="0">
+                      <a:endParaRPr lang="en-US" sz="1100" dirty="0">
                         <a:latin typeface="Arial" charset="0"/>
                         <a:ea typeface="Arial" charset="0"/>
                         <a:cs typeface="Arial" charset="0"/>
@@ -38030,7 +38030,7 @@
                       <a:tailEnd type="none" w="med" len="med"/>
                     </a:lnB>
                     <a:solidFill>
-                      <a:srgbClr val="EDF1F8"/>
+                      <a:srgbClr val="FFF2DC"/>
                     </a:solidFill>
                   </a:tcPr>
                 </a:tc>
@@ -38043,17 +38043,17 @@
                         <a:buNone/>
                       </a:pPr>
                       <a:r>
-                        <a:rPr lang="en-US" sz="1150" dirty="0">
+                        <a:rPr lang="en-US" sz="1100" b="1" dirty="0">
                           <a:solidFill>
-                            <a:srgbClr val="1B2236"/>
+                            <a:srgbClr val="16264F"/>
                           </a:solidFill>
                           <a:latin typeface="Arial" pitchFamily="34" charset="0"/>
                           <a:ea typeface="Arial" pitchFamily="34" charset="-122"/>
                           <a:cs typeface="Arial" pitchFamily="34" charset="-120"/>
                         </a:rPr>
-                        <a:t>8 هرکدام</a:t>
+                        <a:t>5</a:t>
                       </a:r>
-                      <a:endParaRPr lang="en-US" sz="1150" dirty="0">
+                      <a:endParaRPr lang="en-US" sz="1100" dirty="0">
                         <a:latin typeface="Arial" charset="0"/>
                         <a:ea typeface="Arial" charset="0"/>
                         <a:cs typeface="Arial" charset="0"/>
@@ -38098,7 +38098,7 @@
                       <a:tailEnd type="none" w="med" len="med"/>
                     </a:lnB>
                     <a:solidFill>
-                      <a:srgbClr val="EDF1F8"/>
+                      <a:srgbClr val="FFF2DC"/>
                     </a:solidFill>
                   </a:tcPr>
                 </a:tc>
@@ -38111,17 +38111,17 @@
                         <a:buNone/>
                       </a:pPr>
                       <a:r>
-                        <a:rPr lang="en-US" sz="1150" dirty="0">
+                        <a:rPr lang="en-US" sz="1100" b="1" dirty="0">
                           <a:solidFill>
-                            <a:srgbClr val="1B2236"/>
+                            <a:srgbClr val="16264F"/>
                           </a:solidFill>
                           <a:latin typeface="Arial" pitchFamily="34" charset="0"/>
                           <a:ea typeface="Arial" pitchFamily="34" charset="-122"/>
                           <a:cs typeface="Arial" pitchFamily="34" charset="-120"/>
                         </a:rPr>
-                        <a:t>≈ 5</a:t>
+                        <a:t>15</a:t>
                       </a:r>
-                      <a:endParaRPr lang="en-US" sz="1150" dirty="0">
+                      <a:endParaRPr lang="en-US" sz="1100" dirty="0">
                         <a:latin typeface="Arial" charset="0"/>
                         <a:ea typeface="Arial" charset="0"/>
                         <a:cs typeface="Arial" charset="0"/>
@@ -38166,7 +38166,625 @@
                       <a:tailEnd type="none" w="med" len="med"/>
                     </a:lnB>
                     <a:solidFill>
-                      <a:srgbClr val="EDF1F8"/>
+                      <a:srgbClr val="FFF2DC"/>
+                    </a:solidFill>
+                  </a:tcPr>
+                </a:tc>
+              </a:tr>
+              <a:tr h="246888">
+                <a:tc>
+                  <a:txBody>
+                    <a:bodyPr/>
+                    <a:lstStyle/>
+                    <a:p>
+                      <a:pPr algn="r" indent="0" marL="0">
+                        <a:buNone/>
+                      </a:pPr>
+                      <a:r>
+                        <a:rPr lang="en-US" sz="1100" b="1" dirty="0">
+                          <a:solidFill>
+                            <a:srgbClr val="16264F"/>
+                          </a:solidFill>
+                          <a:latin typeface="Arial" pitchFamily="34" charset="0"/>
+                          <a:ea typeface="Arial" pitchFamily="34" charset="-122"/>
+                          <a:cs typeface="Arial" pitchFamily="34" charset="-120"/>
+                        </a:rPr>
+                        <a:t>Vandalism — تخریب اموال</a:t>
+                      </a:r>
+                      <a:endParaRPr lang="en-US" sz="1100" dirty="0">
+                        <a:latin typeface="Arial" charset="0"/>
+                        <a:ea typeface="Arial" charset="0"/>
+                        <a:cs typeface="Arial" charset="0"/>
+                      </a:endParaRPr>
+                    </a:p>
+                  </a:txBody>
+                  <a:tcPr marL="38100" marR="38100" marT="38100" marB="38100" anchor="ctr">
+                    <a:lnL w="6350" cap="flat" cmpd="sng" algn="ctr">
+                      <a:solidFill>
+                        <a:srgbClr val="D9E0EC"/>
+                      </a:solidFill>
+                      <a:prstDash val="solid"/>
+                      <a:round/>
+                      <a:headEnd type="none" w="med" len="med"/>
+                      <a:tailEnd type="none" w="med" len="med"/>
+                    </a:lnL>
+                    <a:lnR w="6350" cap="flat" cmpd="sng" algn="ctr">
+                      <a:solidFill>
+                        <a:srgbClr val="D9E0EC"/>
+                      </a:solidFill>
+                      <a:prstDash val="solid"/>
+                      <a:round/>
+                      <a:headEnd type="none" w="med" len="med"/>
+                      <a:tailEnd type="none" w="med" len="med"/>
+                    </a:lnR>
+                    <a:lnT w="6350" cap="flat" cmpd="sng" algn="ctr">
+                      <a:solidFill>
+                        <a:srgbClr val="D9E0EC"/>
+                      </a:solidFill>
+                      <a:prstDash val="solid"/>
+                      <a:round/>
+                      <a:headEnd type="none" w="med" len="med"/>
+                      <a:tailEnd type="none" w="med" len="med"/>
+                    </a:lnT>
+                    <a:lnB w="6350" cap="flat" cmpd="sng" algn="ctr">
+                      <a:solidFill>
+                        <a:srgbClr val="D9E0EC"/>
+                      </a:solidFill>
+                      <a:prstDash val="solid"/>
+                      <a:round/>
+                      <a:headEnd type="none" w="med" len="med"/>
+                      <a:tailEnd type="none" w="med" len="med"/>
+                    </a:lnB>
+                    <a:solidFill>
+                      <a:srgbClr val="FFF2DC"/>
+                    </a:solidFill>
+                  </a:tcPr>
+                </a:tc>
+                <a:tc>
+                  <a:txBody>
+                    <a:bodyPr/>
+                    <a:lstStyle/>
+                    <a:p>
+                      <a:pPr algn="ctr" indent="0" marL="0">
+                        <a:buNone/>
+                      </a:pPr>
+                      <a:r>
+                        <a:rPr lang="en-US" sz="1100" b="1" dirty="0">
+                          <a:solidFill>
+                            <a:srgbClr val="16264F"/>
+                          </a:solidFill>
+                          <a:latin typeface="Arial" pitchFamily="34" charset="0"/>
+                          <a:ea typeface="Arial" pitchFamily="34" charset="-122"/>
+                          <a:cs typeface="Arial" pitchFamily="34" charset="-120"/>
+                        </a:rPr>
+                        <a:t>4</a:t>
+                      </a:r>
+                      <a:endParaRPr lang="en-US" sz="1100" dirty="0">
+                        <a:latin typeface="Arial" charset="0"/>
+                        <a:ea typeface="Arial" charset="0"/>
+                        <a:cs typeface="Arial" charset="0"/>
+                      </a:endParaRPr>
+                    </a:p>
+                  </a:txBody>
+                  <a:tcPr marL="38100" marR="38100" marT="38100" marB="38100" anchor="ctr">
+                    <a:lnL w="6350" cap="flat" cmpd="sng" algn="ctr">
+                      <a:solidFill>
+                        <a:srgbClr val="D9E0EC"/>
+                      </a:solidFill>
+                      <a:prstDash val="solid"/>
+                      <a:round/>
+                      <a:headEnd type="none" w="med" len="med"/>
+                      <a:tailEnd type="none" w="med" len="med"/>
+                    </a:lnL>
+                    <a:lnR w="6350" cap="flat" cmpd="sng" algn="ctr">
+                      <a:solidFill>
+                        <a:srgbClr val="D9E0EC"/>
+                      </a:solidFill>
+                      <a:prstDash val="solid"/>
+                      <a:round/>
+                      <a:headEnd type="none" w="med" len="med"/>
+                      <a:tailEnd type="none" w="med" len="med"/>
+                    </a:lnR>
+                    <a:lnT w="6350" cap="flat" cmpd="sng" algn="ctr">
+                      <a:solidFill>
+                        <a:srgbClr val="D9E0EC"/>
+                      </a:solidFill>
+                      <a:prstDash val="solid"/>
+                      <a:round/>
+                      <a:headEnd type="none" w="med" len="med"/>
+                      <a:tailEnd type="none" w="med" len="med"/>
+                    </a:lnT>
+                    <a:lnB w="6350" cap="flat" cmpd="sng" algn="ctr">
+                      <a:solidFill>
+                        <a:srgbClr val="D9E0EC"/>
+                      </a:solidFill>
+                      <a:prstDash val="solid"/>
+                      <a:round/>
+                      <a:headEnd type="none" w="med" len="med"/>
+                      <a:tailEnd type="none" w="med" len="med"/>
+                    </a:lnB>
+                    <a:solidFill>
+                      <a:srgbClr val="FFF2DC"/>
+                    </a:solidFill>
+                  </a:tcPr>
+                </a:tc>
+                <a:tc>
+                  <a:txBody>
+                    <a:bodyPr/>
+                    <a:lstStyle/>
+                    <a:p>
+                      <a:pPr algn="ctr" indent="0" marL="0">
+                        <a:buNone/>
+                      </a:pPr>
+                      <a:r>
+                        <a:rPr lang="en-US" sz="1100" b="1" dirty="0">
+                          <a:solidFill>
+                            <a:srgbClr val="16264F"/>
+                          </a:solidFill>
+                          <a:latin typeface="Arial" pitchFamily="34" charset="0"/>
+                          <a:ea typeface="Arial" pitchFamily="34" charset="-122"/>
+                          <a:cs typeface="Arial" pitchFamily="34" charset="-120"/>
+                        </a:rPr>
+                        <a:t>8</a:t>
+                      </a:r>
+                      <a:endParaRPr lang="en-US" sz="1100" dirty="0">
+                        <a:latin typeface="Arial" charset="0"/>
+                        <a:ea typeface="Arial" charset="0"/>
+                        <a:cs typeface="Arial" charset="0"/>
+                      </a:endParaRPr>
+                    </a:p>
+                  </a:txBody>
+                  <a:tcPr marL="38100" marR="38100" marT="38100" marB="38100" anchor="ctr">
+                    <a:lnL w="6350" cap="flat" cmpd="sng" algn="ctr">
+                      <a:solidFill>
+                        <a:srgbClr val="D9E0EC"/>
+                      </a:solidFill>
+                      <a:prstDash val="solid"/>
+                      <a:round/>
+                      <a:headEnd type="none" w="med" len="med"/>
+                      <a:tailEnd type="none" w="med" len="med"/>
+                    </a:lnL>
+                    <a:lnR w="6350" cap="flat" cmpd="sng" algn="ctr">
+                      <a:solidFill>
+                        <a:srgbClr val="D9E0EC"/>
+                      </a:solidFill>
+                      <a:prstDash val="solid"/>
+                      <a:round/>
+                      <a:headEnd type="none" w="med" len="med"/>
+                      <a:tailEnd type="none" w="med" len="med"/>
+                    </a:lnR>
+                    <a:lnT w="6350" cap="flat" cmpd="sng" algn="ctr">
+                      <a:solidFill>
+                        <a:srgbClr val="D9E0EC"/>
+                      </a:solidFill>
+                      <a:prstDash val="solid"/>
+                      <a:round/>
+                      <a:headEnd type="none" w="med" len="med"/>
+                      <a:tailEnd type="none" w="med" len="med"/>
+                    </a:lnT>
+                    <a:lnB w="6350" cap="flat" cmpd="sng" algn="ctr">
+                      <a:solidFill>
+                        <a:srgbClr val="D9E0EC"/>
+                      </a:solidFill>
+                      <a:prstDash val="solid"/>
+                      <a:round/>
+                      <a:headEnd type="none" w="med" len="med"/>
+                      <a:tailEnd type="none" w="med" len="med"/>
+                    </a:lnB>
+                    <a:solidFill>
+                      <a:srgbClr val="FFF2DC"/>
+                    </a:solidFill>
+                  </a:tcPr>
+                </a:tc>
+              </a:tr>
+              <a:tr h="246888">
+                <a:tc>
+                  <a:txBody>
+                    <a:bodyPr/>
+                    <a:lstStyle/>
+                    <a:p>
+                      <a:pPr algn="r" indent="0" marL="0">
+                        <a:buNone/>
+                      </a:pPr>
+                      <a:r>
+                        <a:rPr lang="en-US" sz="1100" b="1" dirty="0">
+                          <a:solidFill>
+                            <a:srgbClr val="16264F"/>
+                          </a:solidFill>
+                          <a:latin typeface="Arial" pitchFamily="34" charset="0"/>
+                          <a:ea typeface="Arial" pitchFamily="34" charset="-122"/>
+                          <a:cs typeface="Arial" pitchFamily="34" charset="-120"/>
+                        </a:rPr>
+                        <a:t>Abuse — سوءاستفاده</a:t>
+                      </a:r>
+                      <a:endParaRPr lang="en-US" sz="1100" dirty="0">
+                        <a:latin typeface="Arial" charset="0"/>
+                        <a:ea typeface="Arial" charset="0"/>
+                        <a:cs typeface="Arial" charset="0"/>
+                      </a:endParaRPr>
+                    </a:p>
+                  </a:txBody>
+                  <a:tcPr marL="38100" marR="38100" marT="38100" marB="38100" anchor="ctr">
+                    <a:lnL w="6350" cap="flat" cmpd="sng" algn="ctr">
+                      <a:solidFill>
+                        <a:srgbClr val="D9E0EC"/>
+                      </a:solidFill>
+                      <a:prstDash val="solid"/>
+                      <a:round/>
+                      <a:headEnd type="none" w="med" len="med"/>
+                      <a:tailEnd type="none" w="med" len="med"/>
+                    </a:lnL>
+                    <a:lnR w="6350" cap="flat" cmpd="sng" algn="ctr">
+                      <a:solidFill>
+                        <a:srgbClr val="D9E0EC"/>
+                      </a:solidFill>
+                      <a:prstDash val="solid"/>
+                      <a:round/>
+                      <a:headEnd type="none" w="med" len="med"/>
+                      <a:tailEnd type="none" w="med" len="med"/>
+                    </a:lnR>
+                    <a:lnT w="6350" cap="flat" cmpd="sng" algn="ctr">
+                      <a:solidFill>
+                        <a:srgbClr val="D9E0EC"/>
+                      </a:solidFill>
+                      <a:prstDash val="solid"/>
+                      <a:round/>
+                      <a:headEnd type="none" w="med" len="med"/>
+                      <a:tailEnd type="none" w="med" len="med"/>
+                    </a:lnT>
+                    <a:lnB w="6350" cap="flat" cmpd="sng" algn="ctr">
+                      <a:solidFill>
+                        <a:srgbClr val="D9E0EC"/>
+                      </a:solidFill>
+                      <a:prstDash val="solid"/>
+                      <a:round/>
+                      <a:headEnd type="none" w="med" len="med"/>
+                      <a:tailEnd type="none" w="med" len="med"/>
+                    </a:lnB>
+                    <a:solidFill>
+                      <a:srgbClr val="FFF2DC"/>
+                    </a:solidFill>
+                  </a:tcPr>
+                </a:tc>
+                <a:tc>
+                  <a:txBody>
+                    <a:bodyPr/>
+                    <a:lstStyle/>
+                    <a:p>
+                      <a:pPr algn="ctr" indent="0" marL="0">
+                        <a:buNone/>
+                      </a:pPr>
+                      <a:r>
+                        <a:rPr lang="en-US" sz="1100" b="1" dirty="0">
+                          <a:solidFill>
+                            <a:srgbClr val="16264F"/>
+                          </a:solidFill>
+                          <a:latin typeface="Arial" pitchFamily="34" charset="0"/>
+                          <a:ea typeface="Arial" pitchFamily="34" charset="-122"/>
+                          <a:cs typeface="Arial" pitchFamily="34" charset="-120"/>
+                        </a:rPr>
+                        <a:t>3</a:t>
+                      </a:r>
+                      <a:endParaRPr lang="en-US" sz="1100" dirty="0">
+                        <a:latin typeface="Arial" charset="0"/>
+                        <a:ea typeface="Arial" charset="0"/>
+                        <a:cs typeface="Arial" charset="0"/>
+                      </a:endParaRPr>
+                    </a:p>
+                  </a:txBody>
+                  <a:tcPr marL="38100" marR="38100" marT="38100" marB="38100" anchor="ctr">
+                    <a:lnL w="6350" cap="flat" cmpd="sng" algn="ctr">
+                      <a:solidFill>
+                        <a:srgbClr val="D9E0EC"/>
+                      </a:solidFill>
+                      <a:prstDash val="solid"/>
+                      <a:round/>
+                      <a:headEnd type="none" w="med" len="med"/>
+                      <a:tailEnd type="none" w="med" len="med"/>
+                    </a:lnL>
+                    <a:lnR w="6350" cap="flat" cmpd="sng" algn="ctr">
+                      <a:solidFill>
+                        <a:srgbClr val="D9E0EC"/>
+                      </a:solidFill>
+                      <a:prstDash val="solid"/>
+                      <a:round/>
+                      <a:headEnd type="none" w="med" len="med"/>
+                      <a:tailEnd type="none" w="med" len="med"/>
+                    </a:lnR>
+                    <a:lnT w="6350" cap="flat" cmpd="sng" algn="ctr">
+                      <a:solidFill>
+                        <a:srgbClr val="D9E0EC"/>
+                      </a:solidFill>
+                      <a:prstDash val="solid"/>
+                      <a:round/>
+                      <a:headEnd type="none" w="med" len="med"/>
+                      <a:tailEnd type="none" w="med" len="med"/>
+                    </a:lnT>
+                    <a:lnB w="6350" cap="flat" cmpd="sng" algn="ctr">
+                      <a:solidFill>
+                        <a:srgbClr val="D9E0EC"/>
+                      </a:solidFill>
+                      <a:prstDash val="solid"/>
+                      <a:round/>
+                      <a:headEnd type="none" w="med" len="med"/>
+                      <a:tailEnd type="none" w="med" len="med"/>
+                    </a:lnB>
+                    <a:solidFill>
+                      <a:srgbClr val="FFF2DC"/>
+                    </a:solidFill>
+                  </a:tcPr>
+                </a:tc>
+                <a:tc>
+                  <a:txBody>
+                    <a:bodyPr/>
+                    <a:lstStyle/>
+                    <a:p>
+                      <a:pPr algn="ctr" indent="0" marL="0">
+                        <a:buNone/>
+                      </a:pPr>
+                      <a:r>
+                        <a:rPr lang="en-US" sz="1100" b="1" dirty="0">
+                          <a:solidFill>
+                            <a:srgbClr val="16264F"/>
+                          </a:solidFill>
+                          <a:latin typeface="Arial" pitchFamily="34" charset="0"/>
+                          <a:ea typeface="Arial" pitchFamily="34" charset="-122"/>
+                          <a:cs typeface="Arial" pitchFamily="34" charset="-120"/>
+                        </a:rPr>
+                        <a:t>8</a:t>
+                      </a:r>
+                      <a:endParaRPr lang="en-US" sz="1100" dirty="0">
+                        <a:latin typeface="Arial" charset="0"/>
+                        <a:ea typeface="Arial" charset="0"/>
+                        <a:cs typeface="Arial" charset="0"/>
+                      </a:endParaRPr>
+                    </a:p>
+                  </a:txBody>
+                  <a:tcPr marL="38100" marR="38100" marT="38100" marB="38100" anchor="ctr">
+                    <a:lnL w="6350" cap="flat" cmpd="sng" algn="ctr">
+                      <a:solidFill>
+                        <a:srgbClr val="D9E0EC"/>
+                      </a:solidFill>
+                      <a:prstDash val="solid"/>
+                      <a:round/>
+                      <a:headEnd type="none" w="med" len="med"/>
+                      <a:tailEnd type="none" w="med" len="med"/>
+                    </a:lnL>
+                    <a:lnR w="6350" cap="flat" cmpd="sng" algn="ctr">
+                      <a:solidFill>
+                        <a:srgbClr val="D9E0EC"/>
+                      </a:solidFill>
+                      <a:prstDash val="solid"/>
+                      <a:round/>
+                      <a:headEnd type="none" w="med" len="med"/>
+                      <a:tailEnd type="none" w="med" len="med"/>
+                    </a:lnR>
+                    <a:lnT w="6350" cap="flat" cmpd="sng" algn="ctr">
+                      <a:solidFill>
+                        <a:srgbClr val="D9E0EC"/>
+                      </a:solidFill>
+                      <a:prstDash val="solid"/>
+                      <a:round/>
+                      <a:headEnd type="none" w="med" len="med"/>
+                      <a:tailEnd type="none" w="med" len="med"/>
+                    </a:lnT>
+                    <a:lnB w="6350" cap="flat" cmpd="sng" algn="ctr">
+                      <a:solidFill>
+                        <a:srgbClr val="D9E0EC"/>
+                      </a:solidFill>
+                      <a:prstDash val="solid"/>
+                      <a:round/>
+                      <a:headEnd type="none" w="med" len="med"/>
+                      <a:tailEnd type="none" w="med" len="med"/>
+                    </a:lnB>
+                    <a:solidFill>
+                      <a:srgbClr val="FFF2DC"/>
+                    </a:solidFill>
+                  </a:tcPr>
+                </a:tc>
+              </a:tr>
+              <a:tr h="246888">
+                <a:tc>
+                  <a:txBody>
+                    <a:bodyPr/>
+                    <a:lstStyle/>
+                    <a:p>
+                      <a:pPr algn="r" indent="0" marL="0">
+                        <a:buNone/>
+                      </a:pPr>
+                      <a:r>
+                        <a:rPr lang="en-US" sz="1100" b="1" dirty="0">
+                          <a:solidFill>
+                            <a:srgbClr val="16264F"/>
+                          </a:solidFill>
+                          <a:latin typeface="Arial" pitchFamily="34" charset="0"/>
+                          <a:ea typeface="Arial" pitchFamily="34" charset="-122"/>
+                          <a:cs typeface="Arial" pitchFamily="34" charset="-120"/>
+                        </a:rPr>
+                        <a:t>Assault — تعرض</a:t>
+                      </a:r>
+                      <a:endParaRPr lang="en-US" sz="1100" dirty="0">
+                        <a:latin typeface="Arial" charset="0"/>
+                        <a:ea typeface="Arial" charset="0"/>
+                        <a:cs typeface="Arial" charset="0"/>
+                      </a:endParaRPr>
+                    </a:p>
+                  </a:txBody>
+                  <a:tcPr marL="38100" marR="38100" marT="38100" marB="38100" anchor="ctr">
+                    <a:lnL w="6350" cap="flat" cmpd="sng" algn="ctr">
+                      <a:solidFill>
+                        <a:srgbClr val="D9E0EC"/>
+                      </a:solidFill>
+                      <a:prstDash val="solid"/>
+                      <a:round/>
+                      <a:headEnd type="none" w="med" len="med"/>
+                      <a:tailEnd type="none" w="med" len="med"/>
+                    </a:lnL>
+                    <a:lnR w="6350" cap="flat" cmpd="sng" algn="ctr">
+                      <a:solidFill>
+                        <a:srgbClr val="D9E0EC"/>
+                      </a:solidFill>
+                      <a:prstDash val="solid"/>
+                      <a:round/>
+                      <a:headEnd type="none" w="med" len="med"/>
+                      <a:tailEnd type="none" w="med" len="med"/>
+                    </a:lnR>
+                    <a:lnT w="6350" cap="flat" cmpd="sng" algn="ctr">
+                      <a:solidFill>
+                        <a:srgbClr val="D9E0EC"/>
+                      </a:solidFill>
+                      <a:prstDash val="solid"/>
+                      <a:round/>
+                      <a:headEnd type="none" w="med" len="med"/>
+                      <a:tailEnd type="none" w="med" len="med"/>
+                    </a:lnT>
+                    <a:lnB w="6350" cap="flat" cmpd="sng" algn="ctr">
+                      <a:solidFill>
+                        <a:srgbClr val="D9E0EC"/>
+                      </a:solidFill>
+                      <a:prstDash val="solid"/>
+                      <a:round/>
+                      <a:headEnd type="none" w="med" len="med"/>
+                      <a:tailEnd type="none" w="med" len="med"/>
+                    </a:lnB>
+                    <a:solidFill>
+                      <a:srgbClr val="FFF2DC"/>
+                    </a:solidFill>
+                  </a:tcPr>
+                </a:tc>
+                <a:tc>
+                  <a:txBody>
+                    <a:bodyPr/>
+                    <a:lstStyle/>
+                    <a:p>
+                      <a:pPr algn="ctr" indent="0" marL="0">
+                        <a:buNone/>
+                      </a:pPr>
+                      <a:r>
+                        <a:rPr lang="en-US" sz="1100" b="1" dirty="0">
+                          <a:solidFill>
+                            <a:srgbClr val="16264F"/>
+                          </a:solidFill>
+                          <a:latin typeface="Arial" pitchFamily="34" charset="0"/>
+                          <a:ea typeface="Arial" pitchFamily="34" charset="-122"/>
+                          <a:cs typeface="Arial" pitchFamily="34" charset="-120"/>
+                        </a:rPr>
+                        <a:t>3</a:t>
+                      </a:r>
+                      <a:endParaRPr lang="en-US" sz="1100" dirty="0">
+                        <a:latin typeface="Arial" charset="0"/>
+                        <a:ea typeface="Arial" charset="0"/>
+                        <a:cs typeface="Arial" charset="0"/>
+                      </a:endParaRPr>
+                    </a:p>
+                  </a:txBody>
+                  <a:tcPr marL="38100" marR="38100" marT="38100" marB="38100" anchor="ctr">
+                    <a:lnL w="6350" cap="flat" cmpd="sng" algn="ctr">
+                      <a:solidFill>
+                        <a:srgbClr val="D9E0EC"/>
+                      </a:solidFill>
+                      <a:prstDash val="solid"/>
+                      <a:round/>
+                      <a:headEnd type="none" w="med" len="med"/>
+                      <a:tailEnd type="none" w="med" len="med"/>
+                    </a:lnL>
+                    <a:lnR w="6350" cap="flat" cmpd="sng" algn="ctr">
+                      <a:solidFill>
+                        <a:srgbClr val="D9E0EC"/>
+                      </a:solidFill>
+                      <a:prstDash val="solid"/>
+                      <a:round/>
+                      <a:headEnd type="none" w="med" len="med"/>
+                      <a:tailEnd type="none" w="med" len="med"/>
+                    </a:lnR>
+                    <a:lnT w="6350" cap="flat" cmpd="sng" algn="ctr">
+                      <a:solidFill>
+                        <a:srgbClr val="D9E0EC"/>
+                      </a:solidFill>
+                      <a:prstDash val="solid"/>
+                      <a:round/>
+                      <a:headEnd type="none" w="med" len="med"/>
+                      <a:tailEnd type="none" w="med" len="med"/>
+                    </a:lnT>
+                    <a:lnB w="6350" cap="flat" cmpd="sng" algn="ctr">
+                      <a:solidFill>
+                        <a:srgbClr val="D9E0EC"/>
+                      </a:solidFill>
+                      <a:prstDash val="solid"/>
+                      <a:round/>
+                      <a:headEnd type="none" w="med" len="med"/>
+                      <a:tailEnd type="none" w="med" len="med"/>
+                    </a:lnB>
+                    <a:solidFill>
+                      <a:srgbClr val="FFF2DC"/>
+                    </a:solidFill>
+                  </a:tcPr>
+                </a:tc>
+                <a:tc>
+                  <a:txBody>
+                    <a:bodyPr/>
+                    <a:lstStyle/>
+                    <a:p>
+                      <a:pPr algn="ctr" indent="0" marL="0">
+                        <a:buNone/>
+                      </a:pPr>
+                      <a:r>
+                        <a:rPr lang="en-US" sz="1100" b="1" dirty="0">
+                          <a:solidFill>
+                            <a:srgbClr val="16264F"/>
+                          </a:solidFill>
+                          <a:latin typeface="Arial" pitchFamily="34" charset="0"/>
+                          <a:ea typeface="Arial" pitchFamily="34" charset="-122"/>
+                          <a:cs typeface="Arial" pitchFamily="34" charset="-120"/>
+                        </a:rPr>
+                        <a:t>8</a:t>
+                      </a:r>
+                      <a:endParaRPr lang="en-US" sz="1100" dirty="0">
+                        <a:latin typeface="Arial" charset="0"/>
+                        <a:ea typeface="Arial" charset="0"/>
+                        <a:cs typeface="Arial" charset="0"/>
+                      </a:endParaRPr>
+                    </a:p>
+                  </a:txBody>
+                  <a:tcPr marL="38100" marR="38100" marT="38100" marB="38100" anchor="ctr">
+                    <a:lnL w="6350" cap="flat" cmpd="sng" algn="ctr">
+                      <a:solidFill>
+                        <a:srgbClr val="D9E0EC"/>
+                      </a:solidFill>
+                      <a:prstDash val="solid"/>
+                      <a:round/>
+                      <a:headEnd type="none" w="med" len="med"/>
+                      <a:tailEnd type="none" w="med" len="med"/>
+                    </a:lnL>
+                    <a:lnR w="6350" cap="flat" cmpd="sng" algn="ctr">
+                      <a:solidFill>
+                        <a:srgbClr val="D9E0EC"/>
+                      </a:solidFill>
+                      <a:prstDash val="solid"/>
+                      <a:round/>
+                      <a:headEnd type="none" w="med" len="med"/>
+                      <a:tailEnd type="none" w="med" len="med"/>
+                    </a:lnR>
+                    <a:lnT w="6350" cap="flat" cmpd="sng" algn="ctr">
+                      <a:solidFill>
+                        <a:srgbClr val="D9E0EC"/>
+                      </a:solidFill>
+                      <a:prstDash val="solid"/>
+                      <a:round/>
+                      <a:headEnd type="none" w="med" len="med"/>
+                      <a:tailEnd type="none" w="med" len="med"/>
+                    </a:lnT>
+                    <a:lnB w="6350" cap="flat" cmpd="sng" algn="ctr">
+                      <a:solidFill>
+                        <a:srgbClr val="D9E0EC"/>
+                      </a:solidFill>
+                      <a:prstDash val="solid"/>
+                      <a:round/>
+                      <a:headEnd type="none" w="med" len="med"/>
+                      <a:tailEnd type="none" w="med" len="med"/>
+                    </a:lnB>
+                    <a:solidFill>
+                      <a:srgbClr val="FFF2DC"/>
                     </a:solidFill>
                   </a:tcPr>
                 </a:tc>
@@ -38177,18 +38795,60 @@
       </p:graphicFrame>
       <p:sp>
         <p:nvSpPr>
-          <p:cNvPr id="5" name="Shape 2"/>
+          <p:cNvPr id="5" name="Text 2"/>
+          <p:cNvSpPr txBox="1"/>
+          <p:nvPr/>
+        </p:nvSpPr>
+        <p:spPr>
+          <a:xfrm>
+            <a:off x="548640" y="5358384"/>
+            <a:ext cx="6766560" cy="365760"/>
+          </a:xfrm>
+          <a:prstGeom prst="rect">
+            <a:avLst/>
+          </a:prstGeom>
+          <a:noFill/>
+          <a:ln/>
+        </p:spPr>
+        <p:txBody>
+          <a:bodyPr wrap="square" lIns="0" tIns="0" rIns="0" bIns="0" rtlCol="0" anchor="t"/>
+          <a:lstStyle/>
+          <a:p>
+            <a:pPr rtl="1" algn="r" indent="0" marL="0">
+              <a:lnSpc>
+                <a:spcPts val="1600"/>
+              </a:lnSpc>
+              <a:buNone/>
+            </a:pPr>
+            <a:r>
+              <a:rPr lang="en-US" sz="1100" dirty="0">
+                <a:solidFill>
+                  <a:srgbClr val="6A748C"/>
+                </a:solidFill>
+                <a:latin typeface="Arial" pitchFamily="34" charset="0"/>
+                <a:ea typeface="Arial" pitchFamily="34" charset="-122"/>
+                <a:cs typeface="Arial" pitchFamily="34" charset="-120"/>
+              </a:rPr>
+              <a:t>جمع ستون دوم ۲۹۰ و جمع ستون سوم ۲۹۶ است. ردیف‌های پررنگ، هفت کلاسی هستند که پنج ویدیوی آزمون یا کمتر دارند.</a:t>
+            </a:r>
+            <a:endParaRPr lang="en-US" sz="1100" dirty="0"/>
+          </a:p>
+        </p:txBody>
+      </p:sp>
+      <p:sp>
+        <p:nvSpPr>
+          <p:cNvPr id="6" name="Shape 3"/>
           <p:cNvSpPr/>
           <p:nvPr/>
         </p:nvSpPr>
         <p:spPr>
           <a:xfrm>
-            <a:off x="7589520" y="1600200"/>
-            <a:ext cx="4023360" cy="2194560"/>
+            <a:off x="7589520" y="1572768"/>
+            <a:ext cx="4023360" cy="1783080"/>
           </a:xfrm>
           <a:prstGeom prst="roundRect">
             <a:avLst>
-              <a:gd name="adj" fmla="val 4167"/>
+              <a:gd name="adj" fmla="val 5128"/>
             </a:avLst>
           </a:prstGeom>
           <a:solidFill>
@@ -38211,13 +38871,13 @@
       </p:sp>
       <p:sp>
         <p:nvSpPr>
-          <p:cNvPr id="6" name="Text 3"/>
+          <p:cNvPr id="7" name="Text 4"/>
           <p:cNvSpPr txBox="1"/>
           <p:nvPr/>
         </p:nvSpPr>
         <p:spPr>
           <a:xfrm>
-            <a:off x="7863840" y="1783080"/>
+            <a:off x="7863840" y="1737360"/>
             <a:ext cx="3474720" cy="320040"/>
           </a:xfrm>
           <a:prstGeom prst="rect">
@@ -38234,7 +38894,7 @@
               <a:buNone/>
             </a:pPr>
             <a:r>
-              <a:rPr lang="en-US" sz="1600" b="1" dirty="0">
+              <a:rPr lang="en-US" sz="1500" b="1" dirty="0">
                 <a:solidFill>
                   <a:srgbClr val="E8A33D"/>
                 </a:solidFill>
@@ -38244,20 +38904,20 @@
               </a:rPr>
               <a:t>دو تقسیم متفاوت</a:t>
             </a:r>
-            <a:endParaRPr lang="en-US" sz="1600" dirty="0"/>
+            <a:endParaRPr lang="en-US" sz="1500" dirty="0"/>
           </a:p>
         </p:txBody>
       </p:sp>
       <p:sp>
         <p:nvSpPr>
-          <p:cNvPr id="7" name="Text 4"/>
+          <p:cNvPr id="8" name="Text 5"/>
           <p:cNvSpPr txBox="1"/>
           <p:nvPr/>
         </p:nvSpPr>
         <p:spPr>
           <a:xfrm>
-            <a:off x="7863840" y="2194560"/>
-            <a:ext cx="3474720" cy="1463040"/>
+            <a:off x="7863840" y="2103120"/>
+            <a:ext cx="3474720" cy="1143000"/>
           </a:xfrm>
           <a:prstGeom prst="rect">
             <a:avLst/>
@@ -38271,12 +38931,12 @@
           <a:p>
             <a:pPr rtl="1" algn="r" indent="0" marL="0">
               <a:lnSpc>
-                <a:spcPts val="1900"/>
+                <a:spcPts val="1800"/>
               </a:lnSpc>
               <a:buNone/>
             </a:pPr>
             <a:r>
-              <a:rPr lang="en-US" sz="1200" dirty="0">
+              <a:rPr lang="en-US" sz="1150" dirty="0">
                 <a:solidFill>
                   <a:srgbClr val="1B2236"/>
                 </a:solidFill>
@@ -38284,26 +38944,26 @@
                 <a:ea typeface="Arial" pitchFamily="34" charset="-122"/>
                 <a:cs typeface="Arial" pitchFamily="34" charset="-120"/>
               </a:rPr>
-              <a:t>مسیر X-CLIP روی تقسیمی با ۲۹۶ ویدیوی آزمون اجرا شد و مسیر VideoMAE روی تقسیم استاندارد با ۲۹۰ ویدیو. به همین دلیل اعداد دو مسیر مستقیماً قابل جمع نیستند.</a:t>
+              <a:t>مسیر X-CLIP روی تقسیمی با ۲۹۶ ویدیوی آزمون اجرا شد و مسیر VideoMAE روی تقسیم استاندارد با ۲۹۰ ویدیو. اعداد دو مسیر با این قید خوانده شوند.</a:t>
             </a:r>
-            <a:endParaRPr lang="en-US" sz="1200" dirty="0"/>
+            <a:endParaRPr lang="en-US" sz="1150" dirty="0"/>
           </a:p>
         </p:txBody>
       </p:sp>
       <p:sp>
         <p:nvSpPr>
-          <p:cNvPr id="8" name="Shape 5"/>
+          <p:cNvPr id="9" name="Shape 6"/>
           <p:cNvSpPr/>
           <p:nvPr/>
         </p:nvSpPr>
         <p:spPr>
           <a:xfrm>
-            <a:off x="7589520" y="3977640"/>
-            <a:ext cx="4023360" cy="2103120"/>
+            <a:off x="7589520" y="3520440"/>
+            <a:ext cx="4023360" cy="1691640"/>
           </a:xfrm>
           <a:prstGeom prst="roundRect">
             <a:avLst>
-              <a:gd name="adj" fmla="val 4348"/>
+              <a:gd name="adj" fmla="val 5405"/>
             </a:avLst>
           </a:prstGeom>
           <a:solidFill>
@@ -38326,13 +38986,13 @@
       </p:sp>
       <p:sp>
         <p:nvSpPr>
-          <p:cNvPr id="9" name="Text 6"/>
+          <p:cNvPr id="10" name="Text 7"/>
           <p:cNvSpPr txBox="1"/>
           <p:nvPr/>
         </p:nvSpPr>
         <p:spPr>
           <a:xfrm>
-            <a:off x="7863840" y="4160520"/>
+            <a:off x="7863840" y="3685032"/>
             <a:ext cx="3474720" cy="320040"/>
           </a:xfrm>
           <a:prstGeom prst="rect">
@@ -38349,7 +39009,7 @@
               <a:buNone/>
             </a:pPr>
             <a:r>
-              <a:rPr lang="en-US" sz="1600" b="1" dirty="0">
+              <a:rPr lang="en-US" sz="1500" b="1" dirty="0">
                 <a:solidFill>
                   <a:srgbClr val="16264F"/>
                 </a:solidFill>
@@ -38359,20 +39019,20 @@
               </a:rPr>
               <a:t>چرا ارزیابی نوفه‌آلود است</a:t>
             </a:r>
-            <a:endParaRPr lang="en-US" sz="1600" dirty="0"/>
+            <a:endParaRPr lang="en-US" sz="1500" dirty="0"/>
           </a:p>
         </p:txBody>
       </p:sp>
       <p:sp>
         <p:nvSpPr>
-          <p:cNvPr id="10" name="Text 7"/>
+          <p:cNvPr id="11" name="Text 8"/>
           <p:cNvSpPr txBox="1"/>
           <p:nvPr/>
         </p:nvSpPr>
         <p:spPr>
           <a:xfrm>
-            <a:off x="7863840" y="4572000"/>
-            <a:ext cx="3474720" cy="1371600"/>
+            <a:off x="7863840" y="4050792"/>
+            <a:ext cx="3474720" cy="1097280"/>
           </a:xfrm>
           <a:prstGeom prst="rect">
             <a:avLst/>
@@ -38386,12 +39046,12 @@
           <a:p>
             <a:pPr rtl="1" algn="r" indent="0" marL="0">
               <a:lnSpc>
-                <a:spcPts val="1900"/>
+                <a:spcPts val="1800"/>
               </a:lnSpc>
               <a:buNone/>
             </a:pPr>
             <a:r>
-              <a:rPr lang="en-US" sz="1200" dirty="0">
+              <a:rPr lang="en-US" sz="1150" dirty="0">
                 <a:solidFill>
                   <a:srgbClr val="1B2236"/>
                 </a:solidFill>
@@ -38399,7 +39059,161 @@
                 <a:ea typeface="Arial" pitchFamily="34" charset="-122"/>
                 <a:cs typeface="Arial" pitchFamily="34" charset="-120"/>
               </a:rPr>
-              <a:t>با هشت ویدیو در یک کلاس، تغییر برچسب یک ویدیو ۱۲٫۵ درصد یادآوری آن کلاس را جابه‌جا می‌کند. ماکرو F1 به هر ۱۴ کلاس وزن یکسان می‌دهد.</a:t>
+              <a:t>کلاس Assault تنها سه ویدیوی آزمون دارد. یک ویدیو یعنی یک‌سوم یادآوری آن کلاس، و ماکرو F1 به هر ۱۴ کلاس وزن یکسان می‌دهد.</a:t>
+            </a:r>
+            <a:endParaRPr lang="en-US" sz="1150" dirty="0"/>
+          </a:p>
+        </p:txBody>
+      </p:sp>
+      <p:sp>
+        <p:nvSpPr>
+          <p:cNvPr id="12" name="Shape 9"/>
+          <p:cNvSpPr/>
+          <p:nvPr/>
+        </p:nvSpPr>
+        <p:spPr>
+          <a:xfrm>
+            <a:off x="7589520" y="5394960"/>
+            <a:ext cx="4023360" cy="960120"/>
+          </a:xfrm>
+          <a:prstGeom prst="roundRect">
+            <a:avLst>
+              <a:gd name="adj" fmla="val 9524"/>
+            </a:avLst>
+          </a:prstGeom>
+          <a:solidFill>
+            <a:srgbClr val="FDEEEC"/>
+          </a:solidFill>
+          <a:ln w="12700">
+            <a:solidFill>
+              <a:srgbClr val="E2E7F0"/>
+            </a:solidFill>
+            <a:prstDash val="solid"/>
+          </a:ln>
+          <a:effectLst>
+            <a:outerShdw sx="100000" sy="100000" kx="0" ky="0" algn="bl" rotWithShape="0" blurRad="101600" dist="25400" dir="5400000">
+              <a:srgbClr val="8A94AC">
+                <a:alpha val="16000"/>
+              </a:srgbClr>
+            </a:outerShdw>
+          </a:effectLst>
+        </p:spPr>
+      </p:sp>
+      <p:sp>
+        <p:nvSpPr>
+          <p:cNvPr id="13" name="Text 10"/>
+          <p:cNvSpPr txBox="1"/>
+          <p:nvPr/>
+        </p:nvSpPr>
+        <p:spPr>
+          <a:xfrm>
+            <a:off x="7863840" y="5559552"/>
+            <a:ext cx="3474720" cy="685800"/>
+          </a:xfrm>
+          <a:prstGeom prst="rect">
+            <a:avLst/>
+          </a:prstGeom>
+          <a:noFill/>
+          <a:ln/>
+        </p:spPr>
+        <p:txBody>
+          <a:bodyPr wrap="square" lIns="0" tIns="0" rIns="0" bIns="0" rtlCol="0" anchor="t"/>
+          <a:lstStyle/>
+          <a:p>
+            <a:pPr rtl="1" algn="r" indent="0" marL="0">
+              <a:lnSpc>
+                <a:spcPts val="1700"/>
+              </a:lnSpc>
+              <a:buNone/>
+            </a:pPr>
+            <a:r>
+              <a:rPr lang="en-US" sz="1100" dirty="0">
+                <a:solidFill>
+                  <a:srgbClr val="C9483B"/>
+                </a:solidFill>
+                <a:latin typeface="Arial" pitchFamily="34" charset="0"/>
+                <a:ea typeface="Arial" pitchFamily="34" charset="-122"/>
+                <a:cs typeface="Arial" pitchFamily="34" charset="-120"/>
+              </a:rPr>
+              <a:t>پیش از ارائه، این اعداد را با فایل تقسیم خودتان بسنجید؛ فرمان در سربرگ build_slides.js است.</a:t>
+            </a:r>
+            <a:endParaRPr lang="en-US" sz="1100" dirty="0"/>
+          </a:p>
+        </p:txBody>
+      </p:sp>
+      <p:sp>
+        <p:nvSpPr>
+          <p:cNvPr id="14" name="Text 11"/>
+          <p:cNvSpPr txBox="1"/>
+          <p:nvPr/>
+        </p:nvSpPr>
+        <p:spPr>
+          <a:xfrm>
+            <a:off x="548640" y="5669280"/>
+            <a:ext cx="2194560" cy="777240"/>
+          </a:xfrm>
+          <a:prstGeom prst="rect">
+            <a:avLst/>
+          </a:prstGeom>
+          <a:noFill/>
+          <a:ln/>
+        </p:spPr>
+        <p:txBody>
+          <a:bodyPr wrap="square" lIns="0" tIns="0" rIns="0" bIns="0" rtlCol="0" anchor="ctr"/>
+          <a:lstStyle/>
+          <a:p>
+            <a:pPr algn="ctr" indent="0" marL="0">
+              <a:buNone/>
+            </a:pPr>
+            <a:r>
+              <a:rPr lang="en-US" sz="4000" b="1" dirty="0">
+                <a:solidFill>
+                  <a:srgbClr val="16264F"/>
+                </a:solidFill>
+                <a:latin typeface="Arial" pitchFamily="34" charset="0"/>
+                <a:ea typeface="Arial" pitchFamily="34" charset="-122"/>
+                <a:cs typeface="Arial" pitchFamily="34" charset="-120"/>
+              </a:rPr>
+              <a:t>290</a:t>
+            </a:r>
+            <a:endParaRPr lang="en-US" sz="4000" dirty="0"/>
+          </a:p>
+        </p:txBody>
+      </p:sp>
+      <p:sp>
+        <p:nvSpPr>
+          <p:cNvPr id="15" name="Text 12"/>
+          <p:cNvSpPr txBox="1"/>
+          <p:nvPr/>
+        </p:nvSpPr>
+        <p:spPr>
+          <a:xfrm>
+            <a:off x="548640" y="6419088"/>
+            <a:ext cx="2194560" cy="457200"/>
+          </a:xfrm>
+          <a:prstGeom prst="rect">
+            <a:avLst/>
+          </a:prstGeom>
+          <a:noFill/>
+          <a:ln/>
+        </p:spPr>
+        <p:txBody>
+          <a:bodyPr wrap="square" lIns="0" tIns="0" rIns="0" bIns="0" rtlCol="0" anchor="t"/>
+          <a:lstStyle/>
+          <a:p>
+            <a:pPr rtl="1" algn="ctr" indent="0" marL="0">
+              <a:buNone/>
+            </a:pPr>
+            <a:r>
+              <a:rPr lang="en-US" sz="1200" dirty="0">
+                <a:solidFill>
+                  <a:srgbClr val="6A748C"/>
+                </a:solidFill>
+                <a:latin typeface="Arial" pitchFamily="34" charset="0"/>
+                <a:ea typeface="Arial" pitchFamily="34" charset="-122"/>
+                <a:cs typeface="Arial" pitchFamily="34" charset="-120"/>
+              </a:rPr>
+              <a:t>کل مجموعه آزمون</a:t>
             </a:r>
             <a:endParaRPr lang="en-US" sz="1200" dirty="0"/>
           </a:p>
@@ -38407,13 +39221,13 @@
       </p:sp>
       <p:sp>
         <p:nvSpPr>
-          <p:cNvPr id="11" name="Text 8"/>
+          <p:cNvPr id="16" name="Text 13"/>
           <p:cNvSpPr txBox="1"/>
           <p:nvPr/>
         </p:nvSpPr>
         <p:spPr>
           <a:xfrm>
-            <a:off x="548640" y="5029200"/>
+            <a:off x="2834640" y="5669280"/>
             <a:ext cx="2194560" cy="777240"/>
           </a:xfrm>
           <a:prstGeom prst="rect">
@@ -38446,13 +39260,13 @@
       </p:sp>
       <p:sp>
         <p:nvSpPr>
-          <p:cNvPr id="12" name="Text 9"/>
+          <p:cNvPr id="17" name="Text 14"/>
           <p:cNvSpPr txBox="1"/>
           <p:nvPr/>
         </p:nvSpPr>
         <p:spPr>
           <a:xfrm>
-            <a:off x="548640" y="5779008"/>
+            <a:off x="2834640" y="6419088"/>
             <a:ext cx="2194560" cy="457200"/>
           </a:xfrm>
           <a:prstGeom prst="rect">
@@ -38477,7 +39291,7 @@
                 <a:ea typeface="Arial" pitchFamily="34" charset="-122"/>
                 <a:cs typeface="Arial" pitchFamily="34" charset="-120"/>
               </a:rPr>
-              <a:t>ویدیوی آموزش</a:t>
+              <a:t>کل مجموعه آموزش</a:t>
             </a:r>
             <a:endParaRPr lang="en-US" sz="1200" dirty="0"/>
           </a:p>
@@ -38485,91 +39299,13 @@
       </p:sp>
       <p:sp>
         <p:nvSpPr>
-          <p:cNvPr id="13" name="Text 10"/>
+          <p:cNvPr id="18" name="Text 15"/>
           <p:cNvSpPr txBox="1"/>
           <p:nvPr/>
         </p:nvSpPr>
         <p:spPr>
           <a:xfrm>
-            <a:off x="2834640" y="5029200"/>
-            <a:ext cx="2194560" cy="777240"/>
-          </a:xfrm>
-          <a:prstGeom prst="rect">
-            <a:avLst/>
-          </a:prstGeom>
-          <a:noFill/>
-          <a:ln/>
-        </p:spPr>
-        <p:txBody>
-          <a:bodyPr wrap="square" lIns="0" tIns="0" rIns="0" bIns="0" rtlCol="0" anchor="ctr"/>
-          <a:lstStyle/>
-          <a:p>
-            <a:pPr algn="ctr" indent="0" marL="0">
-              <a:buNone/>
-            </a:pPr>
-            <a:r>
-              <a:rPr lang="en-US" sz="4000" b="1" dirty="0">
-                <a:solidFill>
-                  <a:srgbClr val="16264F"/>
-                </a:solidFill>
-                <a:latin typeface="Arial" pitchFamily="34" charset="0"/>
-                <a:ea typeface="Arial" pitchFamily="34" charset="-122"/>
-                <a:cs typeface="Arial" pitchFamily="34" charset="-120"/>
-              </a:rPr>
-              <a:t>290</a:t>
-            </a:r>
-            <a:endParaRPr lang="en-US" sz="4000" dirty="0"/>
-          </a:p>
-        </p:txBody>
-      </p:sp>
-      <p:sp>
-        <p:nvSpPr>
-          <p:cNvPr id="14" name="Text 11"/>
-          <p:cNvSpPr txBox="1"/>
-          <p:nvPr/>
-        </p:nvSpPr>
-        <p:spPr>
-          <a:xfrm>
-            <a:off x="2834640" y="5779008"/>
-            <a:ext cx="2194560" cy="457200"/>
-          </a:xfrm>
-          <a:prstGeom prst="rect">
-            <a:avLst/>
-          </a:prstGeom>
-          <a:noFill/>
-          <a:ln/>
-        </p:spPr>
-        <p:txBody>
-          <a:bodyPr wrap="square" lIns="0" tIns="0" rIns="0" bIns="0" rtlCol="0" anchor="t"/>
-          <a:lstStyle/>
-          <a:p>
-            <a:pPr rtl="1" algn="ctr" indent="0" marL="0">
-              <a:buNone/>
-            </a:pPr>
-            <a:r>
-              <a:rPr lang="en-US" sz="1200" dirty="0">
-                <a:solidFill>
-                  <a:srgbClr val="6A748C"/>
-                </a:solidFill>
-                <a:latin typeface="Arial" pitchFamily="34" charset="0"/>
-                <a:ea typeface="Arial" pitchFamily="34" charset="-122"/>
-                <a:cs typeface="Arial" pitchFamily="34" charset="-120"/>
-              </a:rPr>
-              <a:t>ویدیوی آزمون</a:t>
-            </a:r>
-            <a:endParaRPr lang="en-US" sz="1200" dirty="0"/>
-          </a:p>
-        </p:txBody>
-      </p:sp>
-      <p:sp>
-        <p:nvSpPr>
-          <p:cNvPr id="15" name="Text 12"/>
-          <p:cNvSpPr txBox="1"/>
-          <p:nvPr/>
-        </p:nvSpPr>
-        <p:spPr>
-          <a:xfrm>
-            <a:off x="5120640" y="5029200"/>
+            <a:off x="5120640" y="5669280"/>
             <a:ext cx="2194560" cy="777240"/>
           </a:xfrm>
           <a:prstGeom prst="rect">
@@ -38602,13 +39338,13 @@
       </p:sp>
       <p:sp>
         <p:nvSpPr>
-          <p:cNvPr id="16" name="Text 13"/>
+          <p:cNvPr id="19" name="Text 16"/>
           <p:cNvSpPr txBox="1"/>
           <p:nvPr/>
         </p:nvSpPr>
         <p:spPr>
           <a:xfrm>
-            <a:off x="5120640" y="5779008"/>
+            <a:off x="5120640" y="6419088"/>
             <a:ext cx="2194560" cy="457200"/>
           </a:xfrm>
           <a:prstGeom prst="rect">
@@ -38636,48 +39372,6 @@
               <a:t>همپوشانی دو مجموعه</a:t>
             </a:r>
             <a:endParaRPr lang="en-US" sz="1200" dirty="0"/>
-          </a:p>
-        </p:txBody>
-      </p:sp>
-      <p:sp>
-        <p:nvSpPr>
-          <p:cNvPr id="17" name="Text 14"/>
-          <p:cNvSpPr txBox="1"/>
-          <p:nvPr/>
-        </p:nvSpPr>
-        <p:spPr>
-          <a:xfrm>
-            <a:off x="548640" y="6080760"/>
-            <a:ext cx="6766560" cy="457200"/>
-          </a:xfrm>
-          <a:prstGeom prst="rect">
-            <a:avLst/>
-          </a:prstGeom>
-          <a:noFill/>
-          <a:ln/>
-        </p:spPr>
-        <p:txBody>
-          <a:bodyPr wrap="square" lIns="0" tIns="0" rIns="0" bIns="0" rtlCol="0" anchor="t"/>
-          <a:lstStyle/>
-          <a:p>
-            <a:pPr rtl="1" algn="r" indent="0" marL="0">
-              <a:lnSpc>
-                <a:spcPts val="1700"/>
-              </a:lnSpc>
-              <a:buNone/>
-            </a:pPr>
-            <a:r>
-              <a:rPr lang="en-US" sz="1150" dirty="0">
-                <a:solidFill>
-                  <a:srgbClr val="6A748C"/>
-                </a:solidFill>
-                <a:latin typeface="Arial" pitchFamily="34" charset="0"/>
-                <a:ea typeface="Arial" pitchFamily="34" charset="-122"/>
-                <a:cs typeface="Arial" pitchFamily="34" charset="-120"/>
-              </a:rPr>
-              <a:t>مجموعه آزمون تا آخرین مرحله دیده نمی‌شود: نه وزن‌ها روی آن آموزش می‌بینند و نه آستانه یا ابرپارامتری روی آن انتخاب می‌شود.</a:t>
-            </a:r>
-            <a:endParaRPr lang="en-US" sz="1150" dirty="0"/>
           </a:p>
         </p:txBody>
       </p:sp>

--- a/thesis/Defense_Slides.pptx
+++ b/thesis/Defense_Slides.pptx
@@ -338,7 +338,6 @@
         <c:overlap val="0"/>
         <c:axId val="2094734554"/>
         <c:axId val="2094734552"/>
-        <c:axId val="2094734556"/>
       </c:barChart>
       <c:catAx>
         <c:axId val="2094734554"/>

--- a/thesis/Defense_Slides.pptx
+++ b/thesis/Defense_Slides.pptx
@@ -4147,7 +4147,7 @@
       </p:sp>
       <p:graphicFrame>
         <p:nvGraphicFramePr>
-          <p:cNvPr id="11" name="Table 0"/>
+          <p:cNvPr id="13" name="Table 0"/>
           <p:cNvGraphicFramePr>
             <a:graphicFrameLocks noGrp="1"/>
           </p:cNvGraphicFramePr>
@@ -8206,7 +8206,7 @@
       </p:sp>
       <p:sp>
         <p:nvSpPr>
-          <p:cNvPr id="13" name="Text 10"/>
+          <p:cNvPr id="5" name="Text 10"/>
           <p:cNvSpPr txBox="1"/>
           <p:nvPr/>
         </p:nvSpPr>
@@ -38836,7 +38836,7 @@
       </p:sp>
       <p:sp>
         <p:nvSpPr>
-          <p:cNvPr id="6" name="Shape 3"/>
+          <p:cNvPr id="4" name="Shape 3"/>
           <p:cNvSpPr/>
           <p:nvPr/>
         </p:nvSpPr>
@@ -40414,7 +40414,7 @@
       </p:sp>
       <p:sp>
         <p:nvSpPr>
-          <p:cNvPr id="7" name="Text 4"/>
+          <p:cNvPr id="4" name="Text 4"/>
           <p:cNvSpPr txBox="1"/>
           <p:nvPr/>
         </p:nvSpPr>

--- a/thesis/Defense_Slides.pptx
+++ b/thesis/Defense_Slides.pptx
@@ -129,331 +129,6 @@
     </a:lvl9pPr>
   </p:defaultTextStyle>
 </p:presentation>
-</file>
-
-<file path=ppt/charts/chart1.xml><?xml version="1.0" encoding="utf-8"?>
-<c:chartSpace xmlns:c="http://schemas.openxmlformats.org/drawingml/2006/chart" xmlns:a="http://schemas.openxmlformats.org/drawingml/2006/main" xmlns:r="http://schemas.openxmlformats.org/officeDocument/2006/relationships">
-  <c:date1904 val="0"/>
-  <c:roundedCorners val="1"/>
-  <c:chart>
-    <c:autoTitleDeleted val="1"/>
-    <c:plotArea>
-      <c:layout/>
-      <c:barChart>
-        <c:barDir val="col"/>
-        <c:grouping val="clustered"/>
-        <c:varyColors val="0"/>
-        <c:ser>
-          <c:idx val="0"/>
-          <c:order val="0"/>
-          <c:tx>
-            <c:strRef>
-              <c:f>Sheet1!$B$1</c:f>
-              <c:strCache>
-                <c:ptCount val="1"/>
-                <c:pt idx="0">
-                  <c:v>macro F1</c:v>
-                </c:pt>
-              </c:strCache>
-            </c:strRef>
-          </c:tx>
-          <c:spPr>
-            <a:solidFill>
-              <a:srgbClr val="16264F"/>
-            </a:solidFill>
-            <a:effectLst/>
-          </c:spPr>
-          <c:invertIfNegative val="0"/>
-          <c:dLbls>
-            <c:numFmt formatCode="0.0000" sourceLinked="0"/>
-            <c:txPr>
-              <a:bodyPr/>
-              <a:lstStyle/>
-              <a:p>
-                <a:pPr>
-                  <a:defRPr b="0" i="0" strike="noStrike" sz="1100" u="none">
-                    <a:solidFill>
-                      <a:srgbClr val="1B2236"/>
-                    </a:solidFill>
-                    <a:latin typeface="Arial"/>
-                  </a:defRPr>
-                </a:pPr>
-              </a:p>
-            </c:txPr>
-            <c:showLegendKey val="0"/>
-            <c:showVal val="1"/>
-            <c:showCatName val="0"/>
-            <c:showSerName val="0"/>
-            <c:showPercent val="0"/>
-            <c:showBubbleSize val="0"/>
-            <c:showLeaderLines val="0"/>
-          </c:dLbls>
-          <c:dPt>
-            <c:idx val="0"/>
-            <c:invertIfNegative val="0"/>
-            <c:bubble3D val="0"/>
-            <c:spPr>
-              <a:solidFill>
-                <a:srgbClr val="16264F"/>
-              </a:solidFill>
-              <a:effectLst/>
-            </c:spPr>
-          </c:dPt>
-          <c:dPt>
-            <c:idx val="1"/>
-            <c:invertIfNegative val="0"/>
-            <c:bubble3D val="0"/>
-            <c:spPr>
-              <a:solidFill>
-                <a:srgbClr val="16264F"/>
-              </a:solidFill>
-              <a:effectLst/>
-            </c:spPr>
-          </c:dPt>
-          <c:dPt>
-            <c:idx val="2"/>
-            <c:invertIfNegative val="0"/>
-            <c:bubble3D val="0"/>
-            <c:spPr>
-              <a:solidFill>
-                <a:srgbClr val="16264F"/>
-              </a:solidFill>
-              <a:effectLst/>
-            </c:spPr>
-          </c:dPt>
-          <c:dPt>
-            <c:idx val="3"/>
-            <c:invertIfNegative val="0"/>
-            <c:bubble3D val="0"/>
-            <c:spPr>
-              <a:solidFill>
-                <a:srgbClr val="E8A33D"/>
-              </a:solidFill>
-              <a:effectLst/>
-            </c:spPr>
-          </c:dPt>
-          <c:dPt>
-            <c:idx val="4"/>
-            <c:invertIfNegative val="0"/>
-            <c:bubble3D val="0"/>
-            <c:spPr>
-              <a:solidFill>
-                <a:srgbClr val="E8A33D"/>
-              </a:solidFill>
-              <a:effectLst/>
-            </c:spPr>
-          </c:dPt>
-          <c:dPt>
-            <c:idx val="5"/>
-            <c:invertIfNegative val="0"/>
-            <c:bubble3D val="0"/>
-            <c:spPr>
-              <a:solidFill>
-                <a:srgbClr val="E8A33D"/>
-              </a:solidFill>
-              <a:effectLst/>
-            </c:spPr>
-          </c:dPt>
-          <c:cat>
-            <c:multiLvlStrRef>
-              <c:f>Sheet1!$A$2:$A$7</c:f>
-              <c:multiLvlStrCache>
-                <c:ptCount val="6"/>
-                <c:lvl>
-                  <c:pt idx="0">
-                    <c:v>MLP / ViT-B</c:v>
-                  </c:pt>
-                  <c:pt idx="1">
-                    <c:v>+ Temporal</c:v>
-                  </c:pt>
-                  <c:pt idx="2">
-                    <c:v>+ lr 3e-4</c:v>
-                  </c:pt>
-                  <c:pt idx="3">
-                    <c:v>+ ViT-L</c:v>
-                  </c:pt>
-                  <c:pt idx="4">
-                    <c:v>+ Mixup</c:v>
-                  </c:pt>
-                  <c:pt idx="5">
-                    <c:v>+ Logit adj.</c:v>
-                  </c:pt>
-                </c:lvl>
-              </c:multiLvlStrCache>
-            </c:multiLvlStrRef>
-          </c:cat>
-          <c:val>
-            <c:numRef>
-              <c:f>Sheet1!$B$2:$B$7</c:f>
-              <c:numCache>
-                <c:formatCode>General</c:formatCode>
-                <c:ptCount val="6"/>
-                <c:pt idx="0">
-                  <c:v>0.2975</c:v>
-                </c:pt>
-                <c:pt idx="1">
-                  <c:v>0.3444</c:v>
-                </c:pt>
-                <c:pt idx="2">
-                  <c:v>0.3645</c:v>
-                </c:pt>
-                <c:pt idx="3">
-                  <c:v>0.4122</c:v>
-                </c:pt>
-                <c:pt idx="4">
-                  <c:v>0.4161</c:v>
-                </c:pt>
-                <c:pt idx="5">
-                  <c:v>0.4298</c:v>
-                </c:pt>
-              </c:numCache>
-            </c:numRef>
-          </c:val>
-        </c:ser>
-        <c:dLbls>
-          <c:numFmt formatCode="0.0000" sourceLinked="0"/>
-          <c:txPr>
-            <a:bodyPr/>
-            <a:lstStyle/>
-            <a:p>
-              <a:pPr>
-                <a:defRPr b="0" i="0" strike="noStrike" sz="1100" u="none">
-                  <a:solidFill>
-                    <a:srgbClr val="1B2236"/>
-                  </a:solidFill>
-                  <a:latin typeface="Arial"/>
-                </a:defRPr>
-              </a:pPr>
-            </a:p>
-          </c:txPr>
-          <c:showLegendKey val="0"/>
-          <c:showVal val="1"/>
-          <c:showCatName val="0"/>
-          <c:showSerName val="0"/>
-          <c:showPercent val="0"/>
-          <c:showBubbleSize val="0"/>
-          <c:showLeaderLines val="0"/>
-        </c:dLbls>
-        <c:gapWidth val="55"/>
-        <c:overlap val="0"/>
-        <c:axId val="2094734554"/>
-        <c:axId val="2094734552"/>
-      </c:barChart>
-      <c:catAx>
-        <c:axId val="2094734554"/>
-        <c:scaling>
-          <c:orientation val="minMax"/>
-        </c:scaling>
-        <c:delete val="0"/>
-        <c:axPos val="b"/>
-        <c:numFmt formatCode="General" sourceLinked="1"/>
-        <c:majorTickMark val="out"/>
-        <c:minorTickMark val="none"/>
-        <c:tickLblPos val="low"/>
-        <c:spPr>
-          <a:ln w="12700" cap="flat">
-            <a:solidFill>
-              <a:srgbClr val="888888"/>
-            </a:solidFill>
-            <a:prstDash val="solid"/>
-            <a:round/>
-          </a:ln>
-        </c:spPr>
-        <c:txPr>
-          <a:bodyPr/>
-          <a:lstStyle/>
-          <a:p>
-            <a:pPr>
-              <a:defRPr sz="1100" b="0" i="0" u="none" strike="noStrike">
-                <a:solidFill>
-                  <a:srgbClr val="1B2236"/>
-                </a:solidFill>
-                <a:latin typeface="Arial"/>
-              </a:defRPr>
-            </a:pPr>
-            <a:endParaRPr lang="en-US"/>
-          </a:p>
-        </c:txPr>
-        <c:crossAx val="2094734552"/>
-        <c:crosses val="autoZero"/>
-        <c:auto val="1"/>
-        <c:lblAlgn val="ctr"/>
-        <c:noMultiLvlLbl val="1"/>
-      </c:catAx>
-      <c:valAx>
-        <c:axId val="2094734552"/>
-        <c:scaling>
-          <c:orientation val="minMax"/>
-          <c:max val="0.46"/>
-          <c:min val="0.25"/>
-        </c:scaling>
-        <c:delete val="0"/>
-        <c:axPos val="l"/>
-        <c:majorGridlines>
-          <c:spPr>
-            <a:ln w="12700" cap="flat">
-              <a:solidFill>
-                <a:srgbClr val="E4E9F2"/>
-              </a:solidFill>
-              <a:prstDash val="solid"/>
-              <a:round/>
-            </a:ln>
-          </c:spPr>
-        </c:majorGridlines>
-        <c:numFmt formatCode="General" sourceLinked="0"/>
-        <c:majorTickMark val="out"/>
-        <c:minorTickMark val="none"/>
-        <c:tickLblPos val="nextTo"/>
-        <c:spPr>
-          <a:ln w="12700" cap="flat">
-            <a:solidFill>
-              <a:srgbClr val="888888"/>
-            </a:solidFill>
-            <a:prstDash val="solid"/>
-            <a:round/>
-          </a:ln>
-        </c:spPr>
-        <c:txPr>
-          <a:bodyPr/>
-          <a:lstStyle/>
-          <a:p>
-            <a:pPr>
-              <a:defRPr sz="1000" b="0" i="0" u="none" strike="noStrike">
-                <a:solidFill>
-                  <a:srgbClr val="6A748C"/>
-                </a:solidFill>
-                <a:latin typeface="Arial"/>
-              </a:defRPr>
-            </a:pPr>
-            <a:endParaRPr lang="en-US"/>
-          </a:p>
-        </c:txPr>
-        <c:crossAx val="2094734554"/>
-        <c:crosses val="autoZero"/>
-        <c:crossBetween val="between"/>
-      </c:valAx>
-      <c:spPr>
-        <a:noFill/>
-        <a:ln>
-          <a:noFill/>
-        </a:ln>
-        <a:effectLst/>
-      </c:spPr>
-    </c:plotArea>
-    <c:plotVisOnly val="1"/>
-    <c:dispBlanksAs val="span"/>
-  </c:chart>
-  <c:spPr>
-    <a:noFill/>
-    <a:ln>
-      <a:noFill/>
-    </a:ln>
-    <a:effectLst/>
-  </c:spPr>
-  <c:externalData r:id="rId1">
-    <c:autoUpdate val="0"/>
-  </c:externalData>
-</c:chartSpace>
 </file>
 
 <file path=ppt/notesMasters/notesMaster1.xml><?xml version="1.0" encoding="utf-8"?>
@@ -22133,25 +21808,908 @@
           </a:p>
         </p:txBody>
       </p:sp>
-      <p:graphicFrame>
-        <p:nvGraphicFramePr>
-          <p:cNvPr id="4" name="Chart 0" descr=""/>
-          <p:cNvGraphicFramePr/>
-          <p:nvPr/>
-        </p:nvGraphicFramePr>
-        <p:xfrm>
-          <a:off x="548640" y="1645920"/>
-          <a:ext cx="11064240" cy="3291840"/>
-        </p:xfrm>
-        <a:graphic xmlns:a="http://schemas.openxmlformats.org/drawingml/2006/main">
-          <a:graphicData uri="http://schemas.openxmlformats.org/drawingml/2006/chart">
-            <c:chart xmlns:c="http://schemas.openxmlformats.org/drawingml/2006/chart" r:id="rId1"/>
-          </a:graphicData>
-        </a:graphic>
-      </p:graphicFrame>
       <p:sp>
         <p:nvSpPr>
-          <p:cNvPr id="5" name="Text 2"/>
+          <p:cNvPr id="4" name="Shape 2"/>
+          <p:cNvSpPr/>
+          <p:nvPr/>
+        </p:nvSpPr>
+        <p:spPr>
+          <a:xfrm>
+            <a:off x="1325880" y="4116977"/>
+            <a:ext cx="10287000" cy="18288"/>
+          </a:xfrm>
+          <a:prstGeom prst="rect">
+            <a:avLst/>
+          </a:prstGeom>
+          <a:solidFill>
+            <a:srgbClr val="E4E9F2"/>
+          </a:solidFill>
+          <a:ln w="12700">
+            <a:solidFill>
+              <a:srgbClr val="E4E9F2"/>
+            </a:solidFill>
+            <a:prstDash val="solid"/>
+          </a:ln>
+        </p:spPr>
+      </p:sp>
+      <p:sp>
+        <p:nvSpPr>
+          <p:cNvPr id="5" name="Text 3"/>
+          <p:cNvSpPr txBox="1"/>
+          <p:nvPr/>
+        </p:nvSpPr>
+        <p:spPr>
+          <a:xfrm>
+            <a:off x="548640" y="3988961"/>
+            <a:ext cx="685800" cy="256032"/>
+          </a:xfrm>
+          <a:prstGeom prst="rect">
+            <a:avLst/>
+          </a:prstGeom>
+          <a:noFill/>
+          <a:ln/>
+        </p:spPr>
+        <p:txBody>
+          <a:bodyPr wrap="square" lIns="0" tIns="0" rIns="0" bIns="0" rtlCol="0" anchor="t"/>
+          <a:lstStyle/>
+          <a:p>
+            <a:pPr algn="r" indent="0" marL="0">
+              <a:buNone/>
+            </a:pPr>
+            <a:r>
+              <a:rPr lang="en-US" sz="1000" dirty="0">
+                <a:solidFill>
+                  <a:srgbClr val="6A748C"/>
+                </a:solidFill>
+                <a:latin typeface="Arial" pitchFamily="34" charset="0"/>
+                <a:ea typeface="Arial" pitchFamily="34" charset="-122"/>
+                <a:cs typeface="Arial" pitchFamily="34" charset="-120"/>
+              </a:rPr>
+              <a:t>0.30</a:t>
+            </a:r>
+            <a:endParaRPr lang="en-US" sz="1000" dirty="0"/>
+          </a:p>
+        </p:txBody>
+      </p:sp>
+      <p:sp>
+        <p:nvSpPr>
+          <p:cNvPr id="6" name="Shape 4"/>
+          <p:cNvSpPr/>
+          <p:nvPr/>
+        </p:nvSpPr>
+        <p:spPr>
+          <a:xfrm>
+            <a:off x="1325880" y="3387634"/>
+            <a:ext cx="10287000" cy="18288"/>
+          </a:xfrm>
+          <a:prstGeom prst="rect">
+            <a:avLst/>
+          </a:prstGeom>
+          <a:solidFill>
+            <a:srgbClr val="E4E9F2"/>
+          </a:solidFill>
+          <a:ln w="12700">
+            <a:solidFill>
+              <a:srgbClr val="E4E9F2"/>
+            </a:solidFill>
+            <a:prstDash val="solid"/>
+          </a:ln>
+        </p:spPr>
+      </p:sp>
+      <p:sp>
+        <p:nvSpPr>
+          <p:cNvPr id="7" name="Text 5"/>
+          <p:cNvSpPr txBox="1"/>
+          <p:nvPr/>
+        </p:nvSpPr>
+        <p:spPr>
+          <a:xfrm>
+            <a:off x="548640" y="3259618"/>
+            <a:ext cx="685800" cy="256032"/>
+          </a:xfrm>
+          <a:prstGeom prst="rect">
+            <a:avLst/>
+          </a:prstGeom>
+          <a:noFill/>
+          <a:ln/>
+        </p:spPr>
+        <p:txBody>
+          <a:bodyPr wrap="square" lIns="0" tIns="0" rIns="0" bIns="0" rtlCol="0" anchor="t"/>
+          <a:lstStyle/>
+          <a:p>
+            <a:pPr algn="r" indent="0" marL="0">
+              <a:buNone/>
+            </a:pPr>
+            <a:r>
+              <a:rPr lang="en-US" sz="1000" dirty="0">
+                <a:solidFill>
+                  <a:srgbClr val="6A748C"/>
+                </a:solidFill>
+                <a:latin typeface="Arial" pitchFamily="34" charset="0"/>
+                <a:ea typeface="Arial" pitchFamily="34" charset="-122"/>
+                <a:cs typeface="Arial" pitchFamily="34" charset="-120"/>
+              </a:rPr>
+              <a:t>0.35</a:t>
+            </a:r>
+            <a:endParaRPr lang="en-US" sz="1000" dirty="0"/>
+          </a:p>
+        </p:txBody>
+      </p:sp>
+      <p:sp>
+        <p:nvSpPr>
+          <p:cNvPr id="8" name="Shape 6"/>
+          <p:cNvSpPr/>
+          <p:nvPr/>
+        </p:nvSpPr>
+        <p:spPr>
+          <a:xfrm>
+            <a:off x="1325880" y="2658291"/>
+            <a:ext cx="10287000" cy="18288"/>
+          </a:xfrm>
+          <a:prstGeom prst="rect">
+            <a:avLst/>
+          </a:prstGeom>
+          <a:solidFill>
+            <a:srgbClr val="E4E9F2"/>
+          </a:solidFill>
+          <a:ln w="12700">
+            <a:solidFill>
+              <a:srgbClr val="E4E9F2"/>
+            </a:solidFill>
+            <a:prstDash val="solid"/>
+          </a:ln>
+        </p:spPr>
+      </p:sp>
+      <p:sp>
+        <p:nvSpPr>
+          <p:cNvPr id="9" name="Text 7"/>
+          <p:cNvSpPr txBox="1"/>
+          <p:nvPr/>
+        </p:nvSpPr>
+        <p:spPr>
+          <a:xfrm>
+            <a:off x="548640" y="2530275"/>
+            <a:ext cx="685800" cy="256032"/>
+          </a:xfrm>
+          <a:prstGeom prst="rect">
+            <a:avLst/>
+          </a:prstGeom>
+          <a:noFill/>
+          <a:ln/>
+        </p:spPr>
+        <p:txBody>
+          <a:bodyPr wrap="square" lIns="0" tIns="0" rIns="0" bIns="0" rtlCol="0" anchor="t"/>
+          <a:lstStyle/>
+          <a:p>
+            <a:pPr algn="r" indent="0" marL="0">
+              <a:buNone/>
+            </a:pPr>
+            <a:r>
+              <a:rPr lang="en-US" sz="1000" dirty="0">
+                <a:solidFill>
+                  <a:srgbClr val="6A748C"/>
+                </a:solidFill>
+                <a:latin typeface="Arial" pitchFamily="34" charset="0"/>
+                <a:ea typeface="Arial" pitchFamily="34" charset="-122"/>
+                <a:cs typeface="Arial" pitchFamily="34" charset="-120"/>
+              </a:rPr>
+              <a:t>0.40</a:t>
+            </a:r>
+            <a:endParaRPr lang="en-US" sz="1000" dirty="0"/>
+          </a:p>
+        </p:txBody>
+      </p:sp>
+      <p:sp>
+        <p:nvSpPr>
+          <p:cNvPr id="10" name="Shape 8"/>
+          <p:cNvSpPr/>
+          <p:nvPr/>
+        </p:nvSpPr>
+        <p:spPr>
+          <a:xfrm>
+            <a:off x="1325880" y="1928949"/>
+            <a:ext cx="10287000" cy="18288"/>
+          </a:xfrm>
+          <a:prstGeom prst="rect">
+            <a:avLst/>
+          </a:prstGeom>
+          <a:solidFill>
+            <a:srgbClr val="E4E9F2"/>
+          </a:solidFill>
+          <a:ln w="12700">
+            <a:solidFill>
+              <a:srgbClr val="E4E9F2"/>
+            </a:solidFill>
+            <a:prstDash val="solid"/>
+          </a:ln>
+        </p:spPr>
+      </p:sp>
+      <p:sp>
+        <p:nvSpPr>
+          <p:cNvPr id="11" name="Text 9"/>
+          <p:cNvSpPr txBox="1"/>
+          <p:nvPr/>
+        </p:nvSpPr>
+        <p:spPr>
+          <a:xfrm>
+            <a:off x="548640" y="1800933"/>
+            <a:ext cx="685800" cy="256032"/>
+          </a:xfrm>
+          <a:prstGeom prst="rect">
+            <a:avLst/>
+          </a:prstGeom>
+          <a:noFill/>
+          <a:ln/>
+        </p:spPr>
+        <p:txBody>
+          <a:bodyPr wrap="square" lIns="0" tIns="0" rIns="0" bIns="0" rtlCol="0" anchor="t"/>
+          <a:lstStyle/>
+          <a:p>
+            <a:pPr algn="r" indent="0" marL="0">
+              <a:buNone/>
+            </a:pPr>
+            <a:r>
+              <a:rPr lang="en-US" sz="1000" dirty="0">
+                <a:solidFill>
+                  <a:srgbClr val="6A748C"/>
+                </a:solidFill>
+                <a:latin typeface="Arial" pitchFamily="34" charset="0"/>
+                <a:ea typeface="Arial" pitchFamily="34" charset="-122"/>
+                <a:cs typeface="Arial" pitchFamily="34" charset="-120"/>
+              </a:rPr>
+              <a:t>0.45</a:t>
+            </a:r>
+            <a:endParaRPr lang="en-US" sz="1000" dirty="0"/>
+          </a:p>
+        </p:txBody>
+      </p:sp>
+      <p:sp>
+        <p:nvSpPr>
+          <p:cNvPr id="12" name="Shape 10"/>
+          <p:cNvSpPr/>
+          <p:nvPr/>
+        </p:nvSpPr>
+        <p:spPr>
+          <a:xfrm>
+            <a:off x="1325880" y="4846320"/>
+            <a:ext cx="10287000" cy="22860"/>
+          </a:xfrm>
+          <a:prstGeom prst="rect">
+            <a:avLst/>
+          </a:prstGeom>
+          <a:solidFill>
+            <a:srgbClr val="C7D0E0"/>
+          </a:solidFill>
+          <a:ln w="12700">
+            <a:solidFill>
+              <a:srgbClr val="C7D0E0"/>
+            </a:solidFill>
+            <a:prstDash val="solid"/>
+          </a:ln>
+        </p:spPr>
+      </p:sp>
+      <p:sp>
+        <p:nvSpPr>
+          <p:cNvPr id="13" name="Shape 11"/>
+          <p:cNvSpPr/>
+          <p:nvPr/>
+        </p:nvSpPr>
+        <p:spPr>
+          <a:xfrm>
+            <a:off x="1588770" y="4153444"/>
+            <a:ext cx="1188720" cy="692876"/>
+          </a:xfrm>
+          <a:prstGeom prst="rect">
+            <a:avLst/>
+          </a:prstGeom>
+          <a:solidFill>
+            <a:srgbClr val="16264F"/>
+          </a:solidFill>
+          <a:ln w="12700">
+            <a:solidFill>
+              <a:srgbClr val="333333"/>
+            </a:solidFill>
+            <a:prstDash val="solid"/>
+          </a:ln>
+        </p:spPr>
+      </p:sp>
+      <p:sp>
+        <p:nvSpPr>
+          <p:cNvPr id="14" name="Text 12"/>
+          <p:cNvSpPr txBox="1"/>
+          <p:nvPr/>
+        </p:nvSpPr>
+        <p:spPr>
+          <a:xfrm>
+            <a:off x="1360170" y="3842548"/>
+            <a:ext cx="1645920" cy="274320"/>
+          </a:xfrm>
+          <a:prstGeom prst="rect">
+            <a:avLst/>
+          </a:prstGeom>
+          <a:noFill/>
+          <a:ln/>
+        </p:spPr>
+        <p:txBody>
+          <a:bodyPr wrap="square" lIns="0" tIns="0" rIns="0" bIns="0" rtlCol="0" anchor="t"/>
+          <a:lstStyle/>
+          <a:p>
+            <a:pPr algn="ctr" indent="0" marL="0">
+              <a:buNone/>
+            </a:pPr>
+            <a:r>
+              <a:rPr lang="en-US" sz="1100" b="1" dirty="0">
+                <a:solidFill>
+                  <a:srgbClr val="1B2236"/>
+                </a:solidFill>
+                <a:latin typeface="Arial" pitchFamily="34" charset="0"/>
+                <a:ea typeface="Arial" pitchFamily="34" charset="-122"/>
+                <a:cs typeface="Arial" pitchFamily="34" charset="-120"/>
+              </a:rPr>
+              <a:t>0.2975</a:t>
+            </a:r>
+            <a:endParaRPr lang="en-US" sz="1100" dirty="0"/>
+          </a:p>
+        </p:txBody>
+      </p:sp>
+      <p:sp>
+        <p:nvSpPr>
+          <p:cNvPr id="15" name="Text 13"/>
+          <p:cNvSpPr txBox="1"/>
+          <p:nvPr/>
+        </p:nvSpPr>
+        <p:spPr>
+          <a:xfrm>
+            <a:off x="1268730" y="4937760"/>
+            <a:ext cx="1828800" cy="274320"/>
+          </a:xfrm>
+          <a:prstGeom prst="rect">
+            <a:avLst/>
+          </a:prstGeom>
+          <a:noFill/>
+          <a:ln/>
+        </p:spPr>
+        <p:txBody>
+          <a:bodyPr wrap="square" lIns="0" tIns="0" rIns="0" bIns="0" rtlCol="0" anchor="t"/>
+          <a:lstStyle/>
+          <a:p>
+            <a:pPr algn="ctr" indent="0" marL="0">
+              <a:buNone/>
+            </a:pPr>
+            <a:r>
+              <a:rPr lang="en-US" sz="1100" dirty="0">
+                <a:solidFill>
+                  <a:srgbClr val="1B2236"/>
+                </a:solidFill>
+                <a:latin typeface="Arial" pitchFamily="34" charset="0"/>
+                <a:ea typeface="Arial" pitchFamily="34" charset="-122"/>
+                <a:cs typeface="Arial" pitchFamily="34" charset="-120"/>
+              </a:rPr>
+              <a:t>MLP / ViT-B</a:t>
+            </a:r>
+            <a:endParaRPr lang="en-US" sz="1100" dirty="0"/>
+          </a:p>
+        </p:txBody>
+      </p:sp>
+      <p:sp>
+        <p:nvSpPr>
+          <p:cNvPr id="16" name="Shape 14"/>
+          <p:cNvSpPr/>
+          <p:nvPr/>
+        </p:nvSpPr>
+        <p:spPr>
+          <a:xfrm>
+            <a:off x="3303270" y="3469321"/>
+            <a:ext cx="1188720" cy="1376999"/>
+          </a:xfrm>
+          <a:prstGeom prst="rect">
+            <a:avLst/>
+          </a:prstGeom>
+          <a:solidFill>
+            <a:srgbClr val="16264F"/>
+          </a:solidFill>
+          <a:ln w="12700">
+            <a:solidFill>
+              <a:srgbClr val="333333"/>
+            </a:solidFill>
+            <a:prstDash val="solid"/>
+          </a:ln>
+        </p:spPr>
+      </p:sp>
+      <p:sp>
+        <p:nvSpPr>
+          <p:cNvPr id="17" name="Text 15"/>
+          <p:cNvSpPr txBox="1"/>
+          <p:nvPr/>
+        </p:nvSpPr>
+        <p:spPr>
+          <a:xfrm>
+            <a:off x="3074670" y="3158425"/>
+            <a:ext cx="1645920" cy="274320"/>
+          </a:xfrm>
+          <a:prstGeom prst="rect">
+            <a:avLst/>
+          </a:prstGeom>
+          <a:noFill/>
+          <a:ln/>
+        </p:spPr>
+        <p:txBody>
+          <a:bodyPr wrap="square" lIns="0" tIns="0" rIns="0" bIns="0" rtlCol="0" anchor="t"/>
+          <a:lstStyle/>
+          <a:p>
+            <a:pPr algn="ctr" indent="0" marL="0">
+              <a:buNone/>
+            </a:pPr>
+            <a:r>
+              <a:rPr lang="en-US" sz="1100" b="1" dirty="0">
+                <a:solidFill>
+                  <a:srgbClr val="1B2236"/>
+                </a:solidFill>
+                <a:latin typeface="Arial" pitchFamily="34" charset="0"/>
+                <a:ea typeface="Arial" pitchFamily="34" charset="-122"/>
+                <a:cs typeface="Arial" pitchFamily="34" charset="-120"/>
+              </a:rPr>
+              <a:t>0.3444</a:t>
+            </a:r>
+            <a:endParaRPr lang="en-US" sz="1100" dirty="0"/>
+          </a:p>
+        </p:txBody>
+      </p:sp>
+      <p:sp>
+        <p:nvSpPr>
+          <p:cNvPr id="18" name="Text 16"/>
+          <p:cNvSpPr txBox="1"/>
+          <p:nvPr/>
+        </p:nvSpPr>
+        <p:spPr>
+          <a:xfrm>
+            <a:off x="2983230" y="4937760"/>
+            <a:ext cx="1828800" cy="274320"/>
+          </a:xfrm>
+          <a:prstGeom prst="rect">
+            <a:avLst/>
+          </a:prstGeom>
+          <a:noFill/>
+          <a:ln/>
+        </p:spPr>
+        <p:txBody>
+          <a:bodyPr wrap="square" lIns="0" tIns="0" rIns="0" bIns="0" rtlCol="0" anchor="t"/>
+          <a:lstStyle/>
+          <a:p>
+            <a:pPr algn="ctr" indent="0" marL="0">
+              <a:buNone/>
+            </a:pPr>
+            <a:r>
+              <a:rPr lang="en-US" sz="1100" dirty="0">
+                <a:solidFill>
+                  <a:srgbClr val="1B2236"/>
+                </a:solidFill>
+                <a:latin typeface="Arial" pitchFamily="34" charset="0"/>
+                <a:ea typeface="Arial" pitchFamily="34" charset="-122"/>
+                <a:cs typeface="Arial" pitchFamily="34" charset="-120"/>
+              </a:rPr>
+              <a:t>+ Temporal</a:t>
+            </a:r>
+            <a:endParaRPr lang="en-US" sz="1100" dirty="0"/>
+          </a:p>
+        </p:txBody>
+      </p:sp>
+      <p:sp>
+        <p:nvSpPr>
+          <p:cNvPr id="19" name="Shape 17"/>
+          <p:cNvSpPr/>
+          <p:nvPr/>
+        </p:nvSpPr>
+        <p:spPr>
+          <a:xfrm>
+            <a:off x="5017770" y="3176125"/>
+            <a:ext cx="1188720" cy="1670195"/>
+          </a:xfrm>
+          <a:prstGeom prst="rect">
+            <a:avLst/>
+          </a:prstGeom>
+          <a:solidFill>
+            <a:srgbClr val="16264F"/>
+          </a:solidFill>
+          <a:ln w="12700">
+            <a:solidFill>
+              <a:srgbClr val="333333"/>
+            </a:solidFill>
+            <a:prstDash val="solid"/>
+          </a:ln>
+        </p:spPr>
+      </p:sp>
+      <p:sp>
+        <p:nvSpPr>
+          <p:cNvPr id="20" name="Text 18"/>
+          <p:cNvSpPr txBox="1"/>
+          <p:nvPr/>
+        </p:nvSpPr>
+        <p:spPr>
+          <a:xfrm>
+            <a:off x="4789170" y="2865229"/>
+            <a:ext cx="1645920" cy="274320"/>
+          </a:xfrm>
+          <a:prstGeom prst="rect">
+            <a:avLst/>
+          </a:prstGeom>
+          <a:noFill/>
+          <a:ln/>
+        </p:spPr>
+        <p:txBody>
+          <a:bodyPr wrap="square" lIns="0" tIns="0" rIns="0" bIns="0" rtlCol="0" anchor="t"/>
+          <a:lstStyle/>
+          <a:p>
+            <a:pPr algn="ctr" indent="0" marL="0">
+              <a:buNone/>
+            </a:pPr>
+            <a:r>
+              <a:rPr lang="en-US" sz="1100" b="1" dirty="0">
+                <a:solidFill>
+                  <a:srgbClr val="1B2236"/>
+                </a:solidFill>
+                <a:latin typeface="Arial" pitchFamily="34" charset="0"/>
+                <a:ea typeface="Arial" pitchFamily="34" charset="-122"/>
+                <a:cs typeface="Arial" pitchFamily="34" charset="-120"/>
+              </a:rPr>
+              <a:t>0.3645</a:t>
+            </a:r>
+            <a:endParaRPr lang="en-US" sz="1100" dirty="0"/>
+          </a:p>
+        </p:txBody>
+      </p:sp>
+      <p:sp>
+        <p:nvSpPr>
+          <p:cNvPr id="21" name="Text 19"/>
+          <p:cNvSpPr txBox="1"/>
+          <p:nvPr/>
+        </p:nvSpPr>
+        <p:spPr>
+          <a:xfrm>
+            <a:off x="4697730" y="4937760"/>
+            <a:ext cx="1828800" cy="274320"/>
+          </a:xfrm>
+          <a:prstGeom prst="rect">
+            <a:avLst/>
+          </a:prstGeom>
+          <a:noFill/>
+          <a:ln/>
+        </p:spPr>
+        <p:txBody>
+          <a:bodyPr wrap="square" lIns="0" tIns="0" rIns="0" bIns="0" rtlCol="0" anchor="t"/>
+          <a:lstStyle/>
+          <a:p>
+            <a:pPr algn="ctr" indent="0" marL="0">
+              <a:buNone/>
+            </a:pPr>
+            <a:r>
+              <a:rPr lang="en-US" sz="1100" dirty="0">
+                <a:solidFill>
+                  <a:srgbClr val="1B2236"/>
+                </a:solidFill>
+                <a:latin typeface="Arial" pitchFamily="34" charset="0"/>
+                <a:ea typeface="Arial" pitchFamily="34" charset="-122"/>
+                <a:cs typeface="Arial" pitchFamily="34" charset="-120"/>
+              </a:rPr>
+              <a:t>+ lr 3e-4</a:t>
+            </a:r>
+            <a:endParaRPr lang="en-US" sz="1100" dirty="0"/>
+          </a:p>
+        </p:txBody>
+      </p:sp>
+      <p:sp>
+        <p:nvSpPr>
+          <p:cNvPr id="22" name="Shape 20"/>
+          <p:cNvSpPr/>
+          <p:nvPr/>
+        </p:nvSpPr>
+        <p:spPr>
+          <a:xfrm>
+            <a:off x="6732270" y="2480332"/>
+            <a:ext cx="1188720" cy="2365988"/>
+          </a:xfrm>
+          <a:prstGeom prst="rect">
+            <a:avLst/>
+          </a:prstGeom>
+          <a:solidFill>
+            <a:srgbClr val="E8A33D"/>
+          </a:solidFill>
+          <a:ln w="12700">
+            <a:solidFill>
+              <a:srgbClr val="333333"/>
+            </a:solidFill>
+            <a:prstDash val="solid"/>
+          </a:ln>
+        </p:spPr>
+      </p:sp>
+      <p:sp>
+        <p:nvSpPr>
+          <p:cNvPr id="23" name="Text 21"/>
+          <p:cNvSpPr txBox="1"/>
+          <p:nvPr/>
+        </p:nvSpPr>
+        <p:spPr>
+          <a:xfrm>
+            <a:off x="6503670" y="2169436"/>
+            <a:ext cx="1645920" cy="274320"/>
+          </a:xfrm>
+          <a:prstGeom prst="rect">
+            <a:avLst/>
+          </a:prstGeom>
+          <a:noFill/>
+          <a:ln/>
+        </p:spPr>
+        <p:txBody>
+          <a:bodyPr wrap="square" lIns="0" tIns="0" rIns="0" bIns="0" rtlCol="0" anchor="t"/>
+          <a:lstStyle/>
+          <a:p>
+            <a:pPr algn="ctr" indent="0" marL="0">
+              <a:buNone/>
+            </a:pPr>
+            <a:r>
+              <a:rPr lang="en-US" sz="1100" b="1" dirty="0">
+                <a:solidFill>
+                  <a:srgbClr val="1B2236"/>
+                </a:solidFill>
+                <a:latin typeface="Arial" pitchFamily="34" charset="0"/>
+                <a:ea typeface="Arial" pitchFamily="34" charset="-122"/>
+                <a:cs typeface="Arial" pitchFamily="34" charset="-120"/>
+              </a:rPr>
+              <a:t>0.4122</a:t>
+            </a:r>
+            <a:endParaRPr lang="en-US" sz="1100" dirty="0"/>
+          </a:p>
+        </p:txBody>
+      </p:sp>
+      <p:sp>
+        <p:nvSpPr>
+          <p:cNvPr id="24" name="Text 22"/>
+          <p:cNvSpPr txBox="1"/>
+          <p:nvPr/>
+        </p:nvSpPr>
+        <p:spPr>
+          <a:xfrm>
+            <a:off x="6412230" y="4937760"/>
+            <a:ext cx="1828800" cy="274320"/>
+          </a:xfrm>
+          <a:prstGeom prst="rect">
+            <a:avLst/>
+          </a:prstGeom>
+          <a:noFill/>
+          <a:ln/>
+        </p:spPr>
+        <p:txBody>
+          <a:bodyPr wrap="square" lIns="0" tIns="0" rIns="0" bIns="0" rtlCol="0" anchor="t"/>
+          <a:lstStyle/>
+          <a:p>
+            <a:pPr algn="ctr" indent="0" marL="0">
+              <a:buNone/>
+            </a:pPr>
+            <a:r>
+              <a:rPr lang="en-US" sz="1100" dirty="0">
+                <a:solidFill>
+                  <a:srgbClr val="1B2236"/>
+                </a:solidFill>
+                <a:latin typeface="Arial" pitchFamily="34" charset="0"/>
+                <a:ea typeface="Arial" pitchFamily="34" charset="-122"/>
+                <a:cs typeface="Arial" pitchFamily="34" charset="-120"/>
+              </a:rPr>
+              <a:t>+ ViT-L</a:t>
+            </a:r>
+            <a:endParaRPr lang="en-US" sz="1100" dirty="0"/>
+          </a:p>
+        </p:txBody>
+      </p:sp>
+      <p:sp>
+        <p:nvSpPr>
+          <p:cNvPr id="25" name="Shape 23"/>
+          <p:cNvSpPr/>
+          <p:nvPr/>
+        </p:nvSpPr>
+        <p:spPr>
+          <a:xfrm>
+            <a:off x="8446770" y="2423443"/>
+            <a:ext cx="1188720" cy="2422877"/>
+          </a:xfrm>
+          <a:prstGeom prst="rect">
+            <a:avLst/>
+          </a:prstGeom>
+          <a:solidFill>
+            <a:srgbClr val="E8A33D"/>
+          </a:solidFill>
+          <a:ln w="12700">
+            <a:solidFill>
+              <a:srgbClr val="333333"/>
+            </a:solidFill>
+            <a:prstDash val="solid"/>
+          </a:ln>
+        </p:spPr>
+      </p:sp>
+      <p:sp>
+        <p:nvSpPr>
+          <p:cNvPr id="26" name="Text 24"/>
+          <p:cNvSpPr txBox="1"/>
+          <p:nvPr/>
+        </p:nvSpPr>
+        <p:spPr>
+          <a:xfrm>
+            <a:off x="8218170" y="2112547"/>
+            <a:ext cx="1645920" cy="274320"/>
+          </a:xfrm>
+          <a:prstGeom prst="rect">
+            <a:avLst/>
+          </a:prstGeom>
+          <a:noFill/>
+          <a:ln/>
+        </p:spPr>
+        <p:txBody>
+          <a:bodyPr wrap="square" lIns="0" tIns="0" rIns="0" bIns="0" rtlCol="0" anchor="t"/>
+          <a:lstStyle/>
+          <a:p>
+            <a:pPr algn="ctr" indent="0" marL="0">
+              <a:buNone/>
+            </a:pPr>
+            <a:r>
+              <a:rPr lang="en-US" sz="1100" b="1" dirty="0">
+                <a:solidFill>
+                  <a:srgbClr val="1B2236"/>
+                </a:solidFill>
+                <a:latin typeface="Arial" pitchFamily="34" charset="0"/>
+                <a:ea typeface="Arial" pitchFamily="34" charset="-122"/>
+                <a:cs typeface="Arial" pitchFamily="34" charset="-120"/>
+              </a:rPr>
+              <a:t>0.4161</a:t>
+            </a:r>
+            <a:endParaRPr lang="en-US" sz="1100" dirty="0"/>
+          </a:p>
+        </p:txBody>
+      </p:sp>
+      <p:sp>
+        <p:nvSpPr>
+          <p:cNvPr id="27" name="Text 25"/>
+          <p:cNvSpPr txBox="1"/>
+          <p:nvPr/>
+        </p:nvSpPr>
+        <p:spPr>
+          <a:xfrm>
+            <a:off x="8126730" y="4937760"/>
+            <a:ext cx="1828800" cy="274320"/>
+          </a:xfrm>
+          <a:prstGeom prst="rect">
+            <a:avLst/>
+          </a:prstGeom>
+          <a:noFill/>
+          <a:ln/>
+        </p:spPr>
+        <p:txBody>
+          <a:bodyPr wrap="square" lIns="0" tIns="0" rIns="0" bIns="0" rtlCol="0" anchor="t"/>
+          <a:lstStyle/>
+          <a:p>
+            <a:pPr algn="ctr" indent="0" marL="0">
+              <a:buNone/>
+            </a:pPr>
+            <a:r>
+              <a:rPr lang="en-US" sz="1100" dirty="0">
+                <a:solidFill>
+                  <a:srgbClr val="1B2236"/>
+                </a:solidFill>
+                <a:latin typeface="Arial" pitchFamily="34" charset="0"/>
+                <a:ea typeface="Arial" pitchFamily="34" charset="-122"/>
+                <a:cs typeface="Arial" pitchFamily="34" charset="-120"/>
+              </a:rPr>
+              <a:t>+ Mixup</a:t>
+            </a:r>
+            <a:endParaRPr lang="en-US" sz="1100" dirty="0"/>
+          </a:p>
+        </p:txBody>
+      </p:sp>
+      <p:sp>
+        <p:nvSpPr>
+          <p:cNvPr id="28" name="Shape 26"/>
+          <p:cNvSpPr/>
+          <p:nvPr/>
+        </p:nvSpPr>
+        <p:spPr>
+          <a:xfrm>
+            <a:off x="10161270" y="2223603"/>
+            <a:ext cx="1188720" cy="2622717"/>
+          </a:xfrm>
+          <a:prstGeom prst="rect">
+            <a:avLst/>
+          </a:prstGeom>
+          <a:solidFill>
+            <a:srgbClr val="E8A33D"/>
+          </a:solidFill>
+          <a:ln w="12700">
+            <a:solidFill>
+              <a:srgbClr val="333333"/>
+            </a:solidFill>
+            <a:prstDash val="solid"/>
+          </a:ln>
+        </p:spPr>
+      </p:sp>
+      <p:sp>
+        <p:nvSpPr>
+          <p:cNvPr id="29" name="Text 27"/>
+          <p:cNvSpPr txBox="1"/>
+          <p:nvPr/>
+        </p:nvSpPr>
+        <p:spPr>
+          <a:xfrm>
+            <a:off x="9932670" y="1912707"/>
+            <a:ext cx="1645920" cy="274320"/>
+          </a:xfrm>
+          <a:prstGeom prst="rect">
+            <a:avLst/>
+          </a:prstGeom>
+          <a:noFill/>
+          <a:ln/>
+        </p:spPr>
+        <p:txBody>
+          <a:bodyPr wrap="square" lIns="0" tIns="0" rIns="0" bIns="0" rtlCol="0" anchor="t"/>
+          <a:lstStyle/>
+          <a:p>
+            <a:pPr algn="ctr" indent="0" marL="0">
+              <a:buNone/>
+            </a:pPr>
+            <a:r>
+              <a:rPr lang="en-US" sz="1100" b="1" dirty="0">
+                <a:solidFill>
+                  <a:srgbClr val="1B2236"/>
+                </a:solidFill>
+                <a:latin typeface="Arial" pitchFamily="34" charset="0"/>
+                <a:ea typeface="Arial" pitchFamily="34" charset="-122"/>
+                <a:cs typeface="Arial" pitchFamily="34" charset="-120"/>
+              </a:rPr>
+              <a:t>0.4298</a:t>
+            </a:r>
+            <a:endParaRPr lang="en-US" sz="1100" dirty="0"/>
+          </a:p>
+        </p:txBody>
+      </p:sp>
+      <p:sp>
+        <p:nvSpPr>
+          <p:cNvPr id="30" name="Text 28"/>
+          <p:cNvSpPr txBox="1"/>
+          <p:nvPr/>
+        </p:nvSpPr>
+        <p:spPr>
+          <a:xfrm>
+            <a:off x="9841230" y="4937760"/>
+            <a:ext cx="1828800" cy="274320"/>
+          </a:xfrm>
+          <a:prstGeom prst="rect">
+            <a:avLst/>
+          </a:prstGeom>
+          <a:noFill/>
+          <a:ln/>
+        </p:spPr>
+        <p:txBody>
+          <a:bodyPr wrap="square" lIns="0" tIns="0" rIns="0" bIns="0" rtlCol="0" anchor="t"/>
+          <a:lstStyle/>
+          <a:p>
+            <a:pPr algn="ctr" indent="0" marL="0">
+              <a:buNone/>
+            </a:pPr>
+            <a:r>
+              <a:rPr lang="en-US" sz="1100" dirty="0">
+                <a:solidFill>
+                  <a:srgbClr val="1B2236"/>
+                </a:solidFill>
+                <a:latin typeface="Arial" pitchFamily="34" charset="0"/>
+                <a:ea typeface="Arial" pitchFamily="34" charset="-122"/>
+                <a:cs typeface="Arial" pitchFamily="34" charset="-120"/>
+              </a:rPr>
+              <a:t>+ Logit adj.</a:t>
+            </a:r>
+            <a:endParaRPr lang="en-US" sz="1100" dirty="0"/>
+          </a:p>
+        </p:txBody>
+      </p:sp>
+      <p:sp>
+        <p:nvSpPr>
+          <p:cNvPr id="31" name="Text 29"/>
           <p:cNvSpPr txBox="1"/>
           <p:nvPr/>
         </p:nvSpPr>
@@ -22190,7 +22748,7 @@
       </p:sp>
       <p:sp>
         <p:nvSpPr>
-          <p:cNvPr id="6" name="Text 3"/>
+          <p:cNvPr id="32" name="Text 30"/>
           <p:cNvSpPr txBox="1"/>
           <p:nvPr/>
         </p:nvSpPr>
@@ -22229,7 +22787,7 @@
       </p:sp>
       <p:sp>
         <p:nvSpPr>
-          <p:cNvPr id="7" name="Text 4"/>
+          <p:cNvPr id="33" name="Text 31"/>
           <p:cNvSpPr txBox="1"/>
           <p:nvPr/>
         </p:nvSpPr>
@@ -22268,7 +22826,7 @@
       </p:sp>
       <p:sp>
         <p:nvSpPr>
-          <p:cNvPr id="8" name="Text 5"/>
+          <p:cNvPr id="34" name="Text 32"/>
           <p:cNvSpPr txBox="1"/>
           <p:nvPr/>
         </p:nvSpPr>
@@ -22307,7 +22865,7 @@
       </p:sp>
       <p:sp>
         <p:nvSpPr>
-          <p:cNvPr id="9" name="Text 6"/>
+          <p:cNvPr id="35" name="Text 33"/>
           <p:cNvSpPr txBox="1"/>
           <p:nvPr/>
         </p:nvSpPr>
@@ -22346,7 +22904,7 @@
       </p:sp>
       <p:sp>
         <p:nvSpPr>
-          <p:cNvPr id="10" name="Text 7"/>
+          <p:cNvPr id="36" name="Text 34"/>
           <p:cNvSpPr txBox="1"/>
           <p:nvPr/>
         </p:nvSpPr>

--- a/thesis/Defense_Slides.pptx
+++ b/thesis/Defense_Slides.pptx
@@ -25513,7 +25513,7 @@
             <a:r>
               <a:rPr sz="1500" b="1" i="0">
                 <a:solidFill>
-                  <a:srgbClr val="3FA7A0"/>
+                  <a:srgbClr val="7FD3CC"/>
                 </a:solidFill>
                 <a:latin typeface="Arial"/>
                 <a:cs typeface="Arial"/>
@@ -25644,7 +25644,7 @@
             <a:r>
               <a:rPr sz="1500" b="1" i="0">
                 <a:solidFill>
-                  <a:srgbClr val="E8A33D"/>
+                  <a:srgbClr val="F5C27A"/>
                 </a:solidFill>
                 <a:latin typeface="Arial"/>
                 <a:cs typeface="Arial"/>

--- a/thesis/Defense_Slides.pptx
+++ b/thesis/Defense_Slides.pptx
@@ -5665,50 +5665,7 @@
         </p:nvSpPr>
         <p:spPr>
           <a:xfrm>
-            <a:off x="548640" y="347472"/>
-            <a:ext cx="11064240" cy="292608"/>
-          </a:xfrm>
-          <a:prstGeom prst="rect">
-            <a:avLst/>
-          </a:prstGeom>
-          <a:noFill/>
-        </p:spPr>
-        <p:txBody>
-          <a:bodyPr wrap="square" anchor="t" lIns="0" rIns="0" tIns="0" bIns="0">
-            <a:spAutoFit/>
-          </a:bodyPr>
-          <a:lstStyle/>
-          <a:p>
-            <a:pPr rtl="1" algn="r">
-              <a:spcBef>
-                <a:spcPts val="0"/>
-              </a:spcBef>
-              <a:spcAft>
-                <a:spcPts val="0"/>
-              </a:spcAft>
-            </a:pPr>
-            <a:r>
-              <a:rPr sz="1300" b="1" i="0">
-                <a:solidFill>
-                  <a:srgbClr val="E8A33D"/>
-                </a:solidFill>
-                <a:latin typeface="Arial"/>
-                <a:cs typeface="Arial"/>
-              </a:rPr>
-              <a:t>مسیر اول</a:t>
-            </a:r>
-          </a:p>
-        </p:txBody>
-      </p:sp>
-      <p:sp>
-        <p:nvSpPr>
-          <p:cNvPr id="3" name="TextBox 2"/>
-          <p:cNvSpPr txBox="1"/>
-          <p:nvPr/>
-        </p:nvSpPr>
-        <p:spPr>
-          <a:xfrm>
-            <a:off x="548640" y="658368"/>
+            <a:off x="548640" y="411480"/>
             <a:ext cx="11064240" cy="731520"/>
           </a:xfrm>
           <a:prstGeom prst="rect">
@@ -5739,6 +5696,49 @@
                 <a:cs typeface="Arial"/>
               </a:rPr>
               <a:t>تصمیم دومرحله‌ای</a:t>
+            </a:r>
+          </a:p>
+        </p:txBody>
+      </p:sp>
+      <p:sp>
+        <p:nvSpPr>
+          <p:cNvPr id="3" name="TextBox 2"/>
+          <p:cNvSpPr txBox="1"/>
+          <p:nvPr/>
+        </p:nvSpPr>
+        <p:spPr>
+          <a:xfrm>
+            <a:off x="548640" y="1133856"/>
+            <a:ext cx="11064240" cy="292608"/>
+          </a:xfrm>
+          <a:prstGeom prst="rect">
+            <a:avLst/>
+          </a:prstGeom>
+          <a:noFill/>
+        </p:spPr>
+        <p:txBody>
+          <a:bodyPr wrap="square" anchor="t" lIns="0" rIns="0" tIns="0" bIns="0">
+            <a:spAutoFit/>
+          </a:bodyPr>
+          <a:lstStyle/>
+          <a:p>
+            <a:pPr rtl="1" algn="r">
+              <a:spcBef>
+                <a:spcPts val="0"/>
+              </a:spcBef>
+              <a:spcAft>
+                <a:spcPts val="0"/>
+              </a:spcAft>
+            </a:pPr>
+            <a:r>
+              <a:rPr sz="1250" b="1" i="0">
+                <a:solidFill>
+                  <a:srgbClr val="E8A33D"/>
+                </a:solidFill>
+                <a:latin typeface="Arial"/>
+                <a:cs typeface="Arial"/>
+              </a:rPr>
+              <a:t>مسیر اول</a:t>
             </a:r>
           </a:p>
         </p:txBody>
@@ -6584,50 +6584,7 @@
         </p:nvSpPr>
         <p:spPr>
           <a:xfrm>
-            <a:off x="548640" y="347472"/>
-            <a:ext cx="11064240" cy="292608"/>
-          </a:xfrm>
-          <a:prstGeom prst="rect">
-            <a:avLst/>
-          </a:prstGeom>
-          <a:noFill/>
-        </p:spPr>
-        <p:txBody>
-          <a:bodyPr wrap="square" anchor="t" lIns="0" rIns="0" tIns="0" bIns="0">
-            <a:spAutoFit/>
-          </a:bodyPr>
-          <a:lstStyle/>
-          <a:p>
-            <a:pPr rtl="1" algn="r">
-              <a:spcBef>
-                <a:spcPts val="0"/>
-              </a:spcBef>
-              <a:spcAft>
-                <a:spcPts val="0"/>
-              </a:spcAft>
-            </a:pPr>
-            <a:r>
-              <a:rPr sz="1300" b="1" i="0">
-                <a:solidFill>
-                  <a:srgbClr val="E8A33D"/>
-                </a:solidFill>
-                <a:latin typeface="Arial"/>
-                <a:cs typeface="Arial"/>
-              </a:rPr>
-              <a:t>مسیر اول</a:t>
-            </a:r>
-          </a:p>
-        </p:txBody>
-      </p:sp>
-      <p:sp>
-        <p:nvSpPr>
-          <p:cNvPr id="3" name="TextBox 2"/>
-          <p:cNvSpPr txBox="1"/>
-          <p:nvPr/>
-        </p:nvSpPr>
-        <p:spPr>
-          <a:xfrm>
-            <a:off x="548640" y="658368"/>
+            <a:off x="548640" y="411480"/>
             <a:ext cx="11064240" cy="731520"/>
           </a:xfrm>
           <a:prstGeom prst="rect">
@@ -6658,6 +6615,49 @@
                 <a:cs typeface="Arial"/>
               </a:rPr>
               <a:t>کلاسی که مدل یاد گرفت هرگز نگوید</a:t>
+            </a:r>
+          </a:p>
+        </p:txBody>
+      </p:sp>
+      <p:sp>
+        <p:nvSpPr>
+          <p:cNvPr id="3" name="TextBox 2"/>
+          <p:cNvSpPr txBox="1"/>
+          <p:nvPr/>
+        </p:nvSpPr>
+        <p:spPr>
+          <a:xfrm>
+            <a:off x="548640" y="1133856"/>
+            <a:ext cx="11064240" cy="292608"/>
+          </a:xfrm>
+          <a:prstGeom prst="rect">
+            <a:avLst/>
+          </a:prstGeom>
+          <a:noFill/>
+        </p:spPr>
+        <p:txBody>
+          <a:bodyPr wrap="square" anchor="t" lIns="0" rIns="0" tIns="0" bIns="0">
+            <a:spAutoFit/>
+          </a:bodyPr>
+          <a:lstStyle/>
+          <a:p>
+            <a:pPr rtl="1" algn="r">
+              <a:spcBef>
+                <a:spcPts val="0"/>
+              </a:spcBef>
+              <a:spcAft>
+                <a:spcPts val="0"/>
+              </a:spcAft>
+            </a:pPr>
+            <a:r>
+              <a:rPr sz="1250" b="1" i="0">
+                <a:solidFill>
+                  <a:srgbClr val="E8A33D"/>
+                </a:solidFill>
+                <a:latin typeface="Arial"/>
+                <a:cs typeface="Arial"/>
+              </a:rPr>
+              <a:t>مسیر اول</a:t>
             </a:r>
           </a:p>
         </p:txBody>
@@ -7791,50 +7791,7 @@
         </p:nvSpPr>
         <p:spPr>
           <a:xfrm>
-            <a:off x="548640" y="347472"/>
-            <a:ext cx="11064240" cy="292608"/>
-          </a:xfrm>
-          <a:prstGeom prst="rect">
-            <a:avLst/>
-          </a:prstGeom>
-          <a:noFill/>
-        </p:spPr>
-        <p:txBody>
-          <a:bodyPr wrap="square" anchor="t" lIns="0" rIns="0" tIns="0" bIns="0">
-            <a:spAutoFit/>
-          </a:bodyPr>
-          <a:lstStyle/>
-          <a:p>
-            <a:pPr rtl="1" algn="r">
-              <a:spcBef>
-                <a:spcPts val="0"/>
-              </a:spcBef>
-              <a:spcAft>
-                <a:spcPts val="0"/>
-              </a:spcAft>
-            </a:pPr>
-            <a:r>
-              <a:rPr sz="1300" b="1" i="0">
-                <a:solidFill>
-                  <a:srgbClr val="E8A33D"/>
-                </a:solidFill>
-                <a:latin typeface="Arial"/>
-                <a:cs typeface="Arial"/>
-              </a:rPr>
-              <a:t>مسیر اول</a:t>
-            </a:r>
-          </a:p>
-        </p:txBody>
-      </p:sp>
-      <p:sp>
-        <p:nvSpPr>
-          <p:cNvPr id="3" name="TextBox 2"/>
-          <p:cNvSpPr txBox="1"/>
-          <p:nvPr/>
-        </p:nvSpPr>
-        <p:spPr>
-          <a:xfrm>
-            <a:off x="548640" y="658368"/>
+            <a:off x="548640" y="411480"/>
             <a:ext cx="11064240" cy="731520"/>
           </a:xfrm>
           <a:prstGeom prst="rect">
@@ -7865,6 +7822,49 @@
                 <a:cs typeface="Arial"/>
               </a:rPr>
               <a:t>محدودیت بنیادی: هندسه فضای متنی</a:t>
+            </a:r>
+          </a:p>
+        </p:txBody>
+      </p:sp>
+      <p:sp>
+        <p:nvSpPr>
+          <p:cNvPr id="3" name="TextBox 2"/>
+          <p:cNvSpPr txBox="1"/>
+          <p:nvPr/>
+        </p:nvSpPr>
+        <p:spPr>
+          <a:xfrm>
+            <a:off x="548640" y="1133856"/>
+            <a:ext cx="11064240" cy="292608"/>
+          </a:xfrm>
+          <a:prstGeom prst="rect">
+            <a:avLst/>
+          </a:prstGeom>
+          <a:noFill/>
+        </p:spPr>
+        <p:txBody>
+          <a:bodyPr wrap="square" anchor="t" lIns="0" rIns="0" tIns="0" bIns="0">
+            <a:spAutoFit/>
+          </a:bodyPr>
+          <a:lstStyle/>
+          <a:p>
+            <a:pPr rtl="1" algn="r">
+              <a:spcBef>
+                <a:spcPts val="0"/>
+              </a:spcBef>
+              <a:spcAft>
+                <a:spcPts val="0"/>
+              </a:spcAft>
+            </a:pPr>
+            <a:r>
+              <a:rPr sz="1250" b="1" i="0">
+                <a:solidFill>
+                  <a:srgbClr val="E8A33D"/>
+                </a:solidFill>
+                <a:latin typeface="Arial"/>
+                <a:cs typeface="Arial"/>
+              </a:rPr>
+              <a:t>مسیر اول</a:t>
             </a:r>
           </a:p>
         </p:txBody>
@@ -8814,50 +8814,7 @@
         </p:nvSpPr>
         <p:spPr>
           <a:xfrm>
-            <a:off x="548640" y="347472"/>
-            <a:ext cx="11064240" cy="292608"/>
-          </a:xfrm>
-          <a:prstGeom prst="rect">
-            <a:avLst/>
-          </a:prstGeom>
-          <a:noFill/>
-        </p:spPr>
-        <p:txBody>
-          <a:bodyPr wrap="square" anchor="t" lIns="0" rIns="0" tIns="0" bIns="0">
-            <a:spAutoFit/>
-          </a:bodyPr>
-          <a:lstStyle/>
-          <a:p>
-            <a:pPr rtl="1" algn="r">
-              <a:spcBef>
-                <a:spcPts val="0"/>
-              </a:spcBef>
-              <a:spcAft>
-                <a:spcPts val="0"/>
-              </a:spcAft>
-            </a:pPr>
-            <a:r>
-              <a:rPr sz="1300" b="1" i="0">
-                <a:solidFill>
-                  <a:srgbClr val="E8A33D"/>
-                </a:solidFill>
-                <a:latin typeface="Arial"/>
-                <a:cs typeface="Arial"/>
-              </a:rPr>
-              <a:t>مسیر اول</a:t>
-            </a:r>
-          </a:p>
-        </p:txBody>
-      </p:sp>
-      <p:sp>
-        <p:nvSpPr>
-          <p:cNvPr id="3" name="TextBox 2"/>
-          <p:cNvSpPr txBox="1"/>
-          <p:nvPr/>
-        </p:nvSpPr>
-        <p:spPr>
-          <a:xfrm>
-            <a:off x="548640" y="658368"/>
+            <a:off x="548640" y="411480"/>
             <a:ext cx="11064240" cy="731520"/>
           </a:xfrm>
           <a:prstGeom prst="rect">
@@ -8888,6 +8845,49 @@
                 <a:cs typeface="Arial"/>
               </a:rPr>
               <a:t>نتایج مسیر اول</a:t>
+            </a:r>
+          </a:p>
+        </p:txBody>
+      </p:sp>
+      <p:sp>
+        <p:nvSpPr>
+          <p:cNvPr id="3" name="TextBox 2"/>
+          <p:cNvSpPr txBox="1"/>
+          <p:nvPr/>
+        </p:nvSpPr>
+        <p:spPr>
+          <a:xfrm>
+            <a:off x="548640" y="1133856"/>
+            <a:ext cx="11064240" cy="292608"/>
+          </a:xfrm>
+          <a:prstGeom prst="rect">
+            <a:avLst/>
+          </a:prstGeom>
+          <a:noFill/>
+        </p:spPr>
+        <p:txBody>
+          <a:bodyPr wrap="square" anchor="t" lIns="0" rIns="0" tIns="0" bIns="0">
+            <a:spAutoFit/>
+          </a:bodyPr>
+          <a:lstStyle/>
+          <a:p>
+            <a:pPr rtl="1" algn="r">
+              <a:spcBef>
+                <a:spcPts val="0"/>
+              </a:spcBef>
+              <a:spcAft>
+                <a:spcPts val="0"/>
+              </a:spcAft>
+            </a:pPr>
+            <a:r>
+              <a:rPr sz="1250" b="1" i="0">
+                <a:solidFill>
+                  <a:srgbClr val="E8A33D"/>
+                </a:solidFill>
+                <a:latin typeface="Arial"/>
+                <a:cs typeface="Arial"/>
+              </a:rPr>
+              <a:t>مسیر اول</a:t>
             </a:r>
           </a:p>
         </p:txBody>
@@ -10547,50 +10547,7 @@
         </p:nvSpPr>
         <p:spPr>
           <a:xfrm>
-            <a:off x="548640" y="347472"/>
-            <a:ext cx="11064240" cy="292608"/>
-          </a:xfrm>
-          <a:prstGeom prst="rect">
-            <a:avLst/>
-          </a:prstGeom>
-          <a:noFill/>
-        </p:spPr>
-        <p:txBody>
-          <a:bodyPr wrap="square" anchor="t" lIns="0" rIns="0" tIns="0" bIns="0">
-            <a:spAutoFit/>
-          </a:bodyPr>
-          <a:lstStyle/>
-          <a:p>
-            <a:pPr rtl="1" algn="r">
-              <a:spcBef>
-                <a:spcPts val="0"/>
-              </a:spcBef>
-              <a:spcAft>
-                <a:spcPts val="0"/>
-              </a:spcAft>
-            </a:pPr>
-            <a:r>
-              <a:rPr sz="1300" b="1" i="0">
-                <a:solidFill>
-                  <a:srgbClr val="E8A33D"/>
-                </a:solidFill>
-                <a:latin typeface="Arial"/>
-                <a:cs typeface="Arial"/>
-              </a:rPr>
-              <a:t>مسیر دوم</a:t>
-            </a:r>
-          </a:p>
-        </p:txBody>
-      </p:sp>
-      <p:sp>
-        <p:nvSpPr>
-          <p:cNvPr id="3" name="TextBox 2"/>
-          <p:cNvSpPr txBox="1"/>
-          <p:nvPr/>
-        </p:nvSpPr>
-        <p:spPr>
-          <a:xfrm>
-            <a:off x="548640" y="658368"/>
+            <a:off x="548640" y="411480"/>
             <a:ext cx="11064240" cy="731520"/>
           </a:xfrm>
           <a:prstGeom prst="rect">
@@ -10621,6 +10578,49 @@
                 <a:cs typeface="Arial"/>
               </a:rPr>
               <a:t>VideoMAE چطور یاد گرفت</a:t>
+            </a:r>
+          </a:p>
+        </p:txBody>
+      </p:sp>
+      <p:sp>
+        <p:nvSpPr>
+          <p:cNvPr id="3" name="TextBox 2"/>
+          <p:cNvSpPr txBox="1"/>
+          <p:nvPr/>
+        </p:nvSpPr>
+        <p:spPr>
+          <a:xfrm>
+            <a:off x="548640" y="1133856"/>
+            <a:ext cx="11064240" cy="292608"/>
+          </a:xfrm>
+          <a:prstGeom prst="rect">
+            <a:avLst/>
+          </a:prstGeom>
+          <a:noFill/>
+        </p:spPr>
+        <p:txBody>
+          <a:bodyPr wrap="square" anchor="t" lIns="0" rIns="0" tIns="0" bIns="0">
+            <a:spAutoFit/>
+          </a:bodyPr>
+          <a:lstStyle/>
+          <a:p>
+            <a:pPr rtl="1" algn="r">
+              <a:spcBef>
+                <a:spcPts val="0"/>
+              </a:spcBef>
+              <a:spcAft>
+                <a:spcPts val="0"/>
+              </a:spcAft>
+            </a:pPr>
+            <a:r>
+              <a:rPr sz="1250" b="1" i="0">
+                <a:solidFill>
+                  <a:srgbClr val="E8A33D"/>
+                </a:solidFill>
+                <a:latin typeface="Arial"/>
+                <a:cs typeface="Arial"/>
+              </a:rPr>
+              <a:t>مسیر دوم</a:t>
             </a:r>
           </a:p>
         </p:txBody>
@@ -11648,50 +11648,7 @@
         </p:nvSpPr>
         <p:spPr>
           <a:xfrm>
-            <a:off x="548640" y="347472"/>
-            <a:ext cx="11064240" cy="292608"/>
-          </a:xfrm>
-          <a:prstGeom prst="rect">
-            <a:avLst/>
-          </a:prstGeom>
-          <a:noFill/>
-        </p:spPr>
-        <p:txBody>
-          <a:bodyPr wrap="square" anchor="t" lIns="0" rIns="0" tIns="0" bIns="0">
-            <a:spAutoFit/>
-          </a:bodyPr>
-          <a:lstStyle/>
-          <a:p>
-            <a:pPr rtl="1" algn="r">
-              <a:spcBef>
-                <a:spcPts val="0"/>
-              </a:spcBef>
-              <a:spcAft>
-                <a:spcPts val="0"/>
-              </a:spcAft>
-            </a:pPr>
-            <a:r>
-              <a:rPr sz="1300" b="1" i="0">
-                <a:solidFill>
-                  <a:srgbClr val="E8A33D"/>
-                </a:solidFill>
-                <a:latin typeface="Arial"/>
-                <a:cs typeface="Arial"/>
-              </a:rPr>
-              <a:t>مسیر دوم</a:t>
-            </a:r>
-          </a:p>
-        </p:txBody>
-      </p:sp>
-      <p:sp>
-        <p:nvSpPr>
-          <p:cNvPr id="3" name="TextBox 2"/>
-          <p:cNvSpPr txBox="1"/>
-          <p:nvPr/>
-        </p:nvSpPr>
-        <p:spPr>
-          <a:xfrm>
-            <a:off x="548640" y="658368"/>
+            <a:off x="548640" y="411480"/>
             <a:ext cx="11064240" cy="731520"/>
           </a:xfrm>
           <a:prstGeom prst="rect">
@@ -11722,6 +11679,49 @@
                 <a:cs typeface="Arial"/>
               </a:rPr>
               <a:t>مهم‌ترین تصمیم پروژه: یخ زدن رمزگذار</a:t>
+            </a:r>
+          </a:p>
+        </p:txBody>
+      </p:sp>
+      <p:sp>
+        <p:nvSpPr>
+          <p:cNvPr id="3" name="TextBox 2"/>
+          <p:cNvSpPr txBox="1"/>
+          <p:nvPr/>
+        </p:nvSpPr>
+        <p:spPr>
+          <a:xfrm>
+            <a:off x="548640" y="1133856"/>
+            <a:ext cx="11064240" cy="292608"/>
+          </a:xfrm>
+          <a:prstGeom prst="rect">
+            <a:avLst/>
+          </a:prstGeom>
+          <a:noFill/>
+        </p:spPr>
+        <p:txBody>
+          <a:bodyPr wrap="square" anchor="t" lIns="0" rIns="0" tIns="0" bIns="0">
+            <a:spAutoFit/>
+          </a:bodyPr>
+          <a:lstStyle/>
+          <a:p>
+            <a:pPr rtl="1" algn="r">
+              <a:spcBef>
+                <a:spcPts val="0"/>
+              </a:spcBef>
+              <a:spcAft>
+                <a:spcPts val="0"/>
+              </a:spcAft>
+            </a:pPr>
+            <a:r>
+              <a:rPr sz="1250" b="1" i="0">
+                <a:solidFill>
+                  <a:srgbClr val="E8A33D"/>
+                </a:solidFill>
+                <a:latin typeface="Arial"/>
+                <a:cs typeface="Arial"/>
+              </a:rPr>
+              <a:t>مسیر دوم</a:t>
             </a:r>
           </a:p>
         </p:txBody>
@@ -12743,50 +12743,7 @@
         </p:nvSpPr>
         <p:spPr>
           <a:xfrm>
-            <a:off x="548640" y="347472"/>
-            <a:ext cx="11064240" cy="292608"/>
-          </a:xfrm>
-          <a:prstGeom prst="rect">
-            <a:avLst/>
-          </a:prstGeom>
-          <a:noFill/>
-        </p:spPr>
-        <p:txBody>
-          <a:bodyPr wrap="square" anchor="t" lIns="0" rIns="0" tIns="0" bIns="0">
-            <a:spAutoFit/>
-          </a:bodyPr>
-          <a:lstStyle/>
-          <a:p>
-            <a:pPr rtl="1" algn="r">
-              <a:spcBef>
-                <a:spcPts val="0"/>
-              </a:spcBef>
-              <a:spcAft>
-                <a:spcPts val="0"/>
-              </a:spcAft>
-            </a:pPr>
-            <a:r>
-              <a:rPr sz="1300" b="1" i="0">
-                <a:solidFill>
-                  <a:srgbClr val="E8A33D"/>
-                </a:solidFill>
-                <a:latin typeface="Arial"/>
-                <a:cs typeface="Arial"/>
-              </a:rPr>
-              <a:t>مسیر دوم</a:t>
-            </a:r>
-          </a:p>
-        </p:txBody>
-      </p:sp>
-      <p:sp>
-        <p:nvSpPr>
-          <p:cNvPr id="3" name="TextBox 2"/>
-          <p:cNvSpPr txBox="1"/>
-          <p:nvPr/>
-        </p:nvSpPr>
-        <p:spPr>
-          <a:xfrm>
-            <a:off x="548640" y="658368"/>
+            <a:off x="548640" y="411480"/>
             <a:ext cx="11064240" cy="731520"/>
           </a:xfrm>
           <a:prstGeom prst="rect">
@@ -12817,6 +12774,49 @@
                 <a:cs typeface="Arial"/>
               </a:rPr>
               <a:t>خط لوله نهایی</a:t>
+            </a:r>
+          </a:p>
+        </p:txBody>
+      </p:sp>
+      <p:sp>
+        <p:nvSpPr>
+          <p:cNvPr id="3" name="TextBox 2"/>
+          <p:cNvSpPr txBox="1"/>
+          <p:nvPr/>
+        </p:nvSpPr>
+        <p:spPr>
+          <a:xfrm>
+            <a:off x="548640" y="1133856"/>
+            <a:ext cx="11064240" cy="292608"/>
+          </a:xfrm>
+          <a:prstGeom prst="rect">
+            <a:avLst/>
+          </a:prstGeom>
+          <a:noFill/>
+        </p:spPr>
+        <p:txBody>
+          <a:bodyPr wrap="square" anchor="t" lIns="0" rIns="0" tIns="0" bIns="0">
+            <a:spAutoFit/>
+          </a:bodyPr>
+          <a:lstStyle/>
+          <a:p>
+            <a:pPr rtl="1" algn="r">
+              <a:spcBef>
+                <a:spcPts val="0"/>
+              </a:spcBef>
+              <a:spcAft>
+                <a:spcPts val="0"/>
+              </a:spcAft>
+            </a:pPr>
+            <a:r>
+              <a:rPr sz="1250" b="1" i="0">
+                <a:solidFill>
+                  <a:srgbClr val="E8A33D"/>
+                </a:solidFill>
+                <a:latin typeface="Arial"/>
+                <a:cs typeface="Arial"/>
+              </a:rPr>
+              <a:t>مسیر دوم</a:t>
             </a:r>
           </a:p>
         </p:txBody>
@@ -14415,50 +14415,7 @@
         </p:nvSpPr>
         <p:spPr>
           <a:xfrm>
-            <a:off x="548640" y="347472"/>
-            <a:ext cx="11064240" cy="292608"/>
-          </a:xfrm>
-          <a:prstGeom prst="rect">
-            <a:avLst/>
-          </a:prstGeom>
-          <a:noFill/>
-        </p:spPr>
-        <p:txBody>
-          <a:bodyPr wrap="square" anchor="t" lIns="0" rIns="0" tIns="0" bIns="0">
-            <a:spAutoFit/>
-          </a:bodyPr>
-          <a:lstStyle/>
-          <a:p>
-            <a:pPr rtl="1" algn="r">
-              <a:spcBef>
-                <a:spcPts val="0"/>
-              </a:spcBef>
-              <a:spcAft>
-                <a:spcPts val="0"/>
-              </a:spcAft>
-            </a:pPr>
-            <a:r>
-              <a:rPr sz="1300" b="1" i="0">
-                <a:solidFill>
-                  <a:srgbClr val="E8A33D"/>
-                </a:solidFill>
-                <a:latin typeface="Arial"/>
-                <a:cs typeface="Arial"/>
-              </a:rPr>
-              <a:t>مسیر دوم</a:t>
-            </a:r>
-          </a:p>
-        </p:txBody>
-      </p:sp>
-      <p:sp>
-        <p:nvSpPr>
-          <p:cNvPr id="3" name="TextBox 2"/>
-          <p:cNvSpPr txBox="1"/>
-          <p:nvPr/>
-        </p:nvSpPr>
-        <p:spPr>
-          <a:xfrm>
-            <a:off x="548640" y="658368"/>
+            <a:off x="548640" y="411480"/>
             <a:ext cx="11064240" cy="731520"/>
           </a:xfrm>
           <a:prstGeom prst="rect">
@@ -14489,6 +14446,49 @@
                 <a:cs typeface="Arial"/>
               </a:rPr>
               <a:t>سر ترنسفورمر روی محور زمان</a:t>
+            </a:r>
+          </a:p>
+        </p:txBody>
+      </p:sp>
+      <p:sp>
+        <p:nvSpPr>
+          <p:cNvPr id="3" name="TextBox 2"/>
+          <p:cNvSpPr txBox="1"/>
+          <p:nvPr/>
+        </p:nvSpPr>
+        <p:spPr>
+          <a:xfrm>
+            <a:off x="548640" y="1133856"/>
+            <a:ext cx="11064240" cy="292608"/>
+          </a:xfrm>
+          <a:prstGeom prst="rect">
+            <a:avLst/>
+          </a:prstGeom>
+          <a:noFill/>
+        </p:spPr>
+        <p:txBody>
+          <a:bodyPr wrap="square" anchor="t" lIns="0" rIns="0" tIns="0" bIns="0">
+            <a:spAutoFit/>
+          </a:bodyPr>
+          <a:lstStyle/>
+          <a:p>
+            <a:pPr rtl="1" algn="r">
+              <a:spcBef>
+                <a:spcPts val="0"/>
+              </a:spcBef>
+              <a:spcAft>
+                <a:spcPts val="0"/>
+              </a:spcAft>
+            </a:pPr>
+            <a:r>
+              <a:rPr sz="1250" b="1" i="0">
+                <a:solidFill>
+                  <a:srgbClr val="E8A33D"/>
+                </a:solidFill>
+                <a:latin typeface="Arial"/>
+                <a:cs typeface="Arial"/>
+              </a:rPr>
+              <a:t>مسیر دوم</a:t>
             </a:r>
           </a:p>
         </p:txBody>
@@ -15553,50 +15553,7 @@
         </p:nvSpPr>
         <p:spPr>
           <a:xfrm>
-            <a:off x="548640" y="347472"/>
-            <a:ext cx="11064240" cy="292608"/>
-          </a:xfrm>
-          <a:prstGeom prst="rect">
-            <a:avLst/>
-          </a:prstGeom>
-          <a:noFill/>
-        </p:spPr>
-        <p:txBody>
-          <a:bodyPr wrap="square" anchor="t" lIns="0" rIns="0" tIns="0" bIns="0">
-            <a:spAutoFit/>
-          </a:bodyPr>
-          <a:lstStyle/>
-          <a:p>
-            <a:pPr rtl="1" algn="r">
-              <a:spcBef>
-                <a:spcPts val="0"/>
-              </a:spcBef>
-              <a:spcAft>
-                <a:spcPts val="0"/>
-              </a:spcAft>
-            </a:pPr>
-            <a:r>
-              <a:rPr sz="1300" b="1" i="0">
-                <a:solidFill>
-                  <a:srgbClr val="E8A33D"/>
-                </a:solidFill>
-                <a:latin typeface="Arial"/>
-                <a:cs typeface="Arial"/>
-              </a:rPr>
-              <a:t>مسیر دوم</a:t>
-            </a:r>
-          </a:p>
-        </p:txBody>
-      </p:sp>
-      <p:sp>
-        <p:nvSpPr>
-          <p:cNvPr id="3" name="TextBox 2"/>
-          <p:cNvSpPr txBox="1"/>
-          <p:nvPr/>
-        </p:nvSpPr>
-        <p:spPr>
-          <a:xfrm>
-            <a:off x="548640" y="658368"/>
+            <a:off x="548640" y="411480"/>
             <a:ext cx="11064240" cy="731520"/>
           </a:xfrm>
           <a:prstGeom prst="rect">
@@ -15627,6 +15584,49 @@
                 <a:cs typeface="Arial"/>
               </a:rPr>
               <a:t>ارتقای ظرفیت رمزگذار</a:t>
+            </a:r>
+          </a:p>
+        </p:txBody>
+      </p:sp>
+      <p:sp>
+        <p:nvSpPr>
+          <p:cNvPr id="3" name="TextBox 2"/>
+          <p:cNvSpPr txBox="1"/>
+          <p:nvPr/>
+        </p:nvSpPr>
+        <p:spPr>
+          <a:xfrm>
+            <a:off x="548640" y="1133856"/>
+            <a:ext cx="11064240" cy="292608"/>
+          </a:xfrm>
+          <a:prstGeom prst="rect">
+            <a:avLst/>
+          </a:prstGeom>
+          <a:noFill/>
+        </p:spPr>
+        <p:txBody>
+          <a:bodyPr wrap="square" anchor="t" lIns="0" rIns="0" tIns="0" bIns="0">
+            <a:spAutoFit/>
+          </a:bodyPr>
+          <a:lstStyle/>
+          <a:p>
+            <a:pPr rtl="1" algn="r">
+              <a:spcBef>
+                <a:spcPts val="0"/>
+              </a:spcBef>
+              <a:spcAft>
+                <a:spcPts val="0"/>
+              </a:spcAft>
+            </a:pPr>
+            <a:r>
+              <a:rPr sz="1250" b="1" i="0">
+                <a:solidFill>
+                  <a:srgbClr val="E8A33D"/>
+                </a:solidFill>
+                <a:latin typeface="Arial"/>
+                <a:cs typeface="Arial"/>
+              </a:rPr>
+              <a:t>مسیر دوم</a:t>
             </a:r>
           </a:p>
         </p:txBody>
@@ -16923,50 +16923,7 @@
         </p:nvSpPr>
         <p:spPr>
           <a:xfrm>
-            <a:off x="548640" y="347472"/>
-            <a:ext cx="11064240" cy="292608"/>
-          </a:xfrm>
-          <a:prstGeom prst="rect">
-            <a:avLst/>
-          </a:prstGeom>
-          <a:noFill/>
-        </p:spPr>
-        <p:txBody>
-          <a:bodyPr wrap="square" anchor="t" lIns="0" rIns="0" tIns="0" bIns="0">
-            <a:spAutoFit/>
-          </a:bodyPr>
-          <a:lstStyle/>
-          <a:p>
-            <a:pPr rtl="1" algn="r">
-              <a:spcBef>
-                <a:spcPts val="0"/>
-              </a:spcBef>
-              <a:spcAft>
-                <a:spcPts val="0"/>
-              </a:spcAft>
-            </a:pPr>
-            <a:r>
-              <a:rPr sz="1300" b="1" i="0">
-                <a:solidFill>
-                  <a:srgbClr val="E8A33D"/>
-                </a:solidFill>
-                <a:latin typeface="Arial"/>
-                <a:cs typeface="Arial"/>
-              </a:rPr>
-              <a:t>فصل اول</a:t>
-            </a:r>
-          </a:p>
-        </p:txBody>
-      </p:sp>
-      <p:sp>
-        <p:nvSpPr>
-          <p:cNvPr id="3" name="TextBox 2"/>
-          <p:cNvSpPr txBox="1"/>
-          <p:nvPr/>
-        </p:nvSpPr>
-        <p:spPr>
-          <a:xfrm>
-            <a:off x="548640" y="658368"/>
+            <a:off x="548640" y="411480"/>
             <a:ext cx="11064240" cy="731520"/>
           </a:xfrm>
           <a:prstGeom prst="rect">
@@ -16997,6 +16954,49 @@
                 <a:cs typeface="Arial"/>
               </a:rPr>
               <a:t>صورت مسئله</a:t>
+            </a:r>
+          </a:p>
+        </p:txBody>
+      </p:sp>
+      <p:sp>
+        <p:nvSpPr>
+          <p:cNvPr id="3" name="TextBox 2"/>
+          <p:cNvSpPr txBox="1"/>
+          <p:nvPr/>
+        </p:nvSpPr>
+        <p:spPr>
+          <a:xfrm>
+            <a:off x="548640" y="1133856"/>
+            <a:ext cx="11064240" cy="292608"/>
+          </a:xfrm>
+          <a:prstGeom prst="rect">
+            <a:avLst/>
+          </a:prstGeom>
+          <a:noFill/>
+        </p:spPr>
+        <p:txBody>
+          <a:bodyPr wrap="square" anchor="t" lIns="0" rIns="0" tIns="0" bIns="0">
+            <a:spAutoFit/>
+          </a:bodyPr>
+          <a:lstStyle/>
+          <a:p>
+            <a:pPr rtl="1" algn="r">
+              <a:spcBef>
+                <a:spcPts val="0"/>
+              </a:spcBef>
+              <a:spcAft>
+                <a:spcPts val="0"/>
+              </a:spcAft>
+            </a:pPr>
+            <a:r>
+              <a:rPr sz="1250" b="1" i="0">
+                <a:solidFill>
+                  <a:srgbClr val="E8A33D"/>
+                </a:solidFill>
+                <a:latin typeface="Arial"/>
+                <a:cs typeface="Arial"/>
+              </a:rPr>
+              <a:t>فصل اول</a:t>
             </a:r>
           </a:p>
         </p:txBody>
@@ -17482,50 +17482,7 @@
         </p:nvSpPr>
         <p:spPr>
           <a:xfrm>
-            <a:off x="548640" y="347472"/>
-            <a:ext cx="11064240" cy="292608"/>
-          </a:xfrm>
-          <a:prstGeom prst="rect">
-            <a:avLst/>
-          </a:prstGeom>
-          <a:noFill/>
-        </p:spPr>
-        <p:txBody>
-          <a:bodyPr wrap="square" anchor="t" lIns="0" rIns="0" tIns="0" bIns="0">
-            <a:spAutoFit/>
-          </a:bodyPr>
-          <a:lstStyle/>
-          <a:p>
-            <a:pPr rtl="1" algn="r">
-              <a:spcBef>
-                <a:spcPts val="0"/>
-              </a:spcBef>
-              <a:spcAft>
-                <a:spcPts val="0"/>
-              </a:spcAft>
-            </a:pPr>
-            <a:r>
-              <a:rPr sz="1300" b="1" i="0">
-                <a:solidFill>
-                  <a:srgbClr val="E8A33D"/>
-                </a:solidFill>
-                <a:latin typeface="Arial"/>
-                <a:cs typeface="Arial"/>
-              </a:rPr>
-              <a:t>مسیر دوم</a:t>
-            </a:r>
-          </a:p>
-        </p:txBody>
-      </p:sp>
-      <p:sp>
-        <p:nvSpPr>
-          <p:cNvPr id="3" name="TextBox 2"/>
-          <p:cNvSpPr txBox="1"/>
-          <p:nvPr/>
-        </p:nvSpPr>
-        <p:spPr>
-          <a:xfrm>
-            <a:off x="548640" y="658368"/>
+            <a:off x="548640" y="411480"/>
             <a:ext cx="11064240" cy="731520"/>
           </a:xfrm>
           <a:prstGeom prst="rect">
@@ -17556,6 +17513,49 @@
                 <a:cs typeface="Arial"/>
               </a:rPr>
               <a:t>آمیزش و تنظیم لاجیت</a:t>
+            </a:r>
+          </a:p>
+        </p:txBody>
+      </p:sp>
+      <p:sp>
+        <p:nvSpPr>
+          <p:cNvPr id="3" name="TextBox 2"/>
+          <p:cNvSpPr txBox="1"/>
+          <p:nvPr/>
+        </p:nvSpPr>
+        <p:spPr>
+          <a:xfrm>
+            <a:off x="548640" y="1133856"/>
+            <a:ext cx="11064240" cy="292608"/>
+          </a:xfrm>
+          <a:prstGeom prst="rect">
+            <a:avLst/>
+          </a:prstGeom>
+          <a:noFill/>
+        </p:spPr>
+        <p:txBody>
+          <a:bodyPr wrap="square" anchor="t" lIns="0" rIns="0" tIns="0" bIns="0">
+            <a:spAutoFit/>
+          </a:bodyPr>
+          <a:lstStyle/>
+          <a:p>
+            <a:pPr rtl="1" algn="r">
+              <a:spcBef>
+                <a:spcPts val="0"/>
+              </a:spcBef>
+              <a:spcAft>
+                <a:spcPts val="0"/>
+              </a:spcAft>
+            </a:pPr>
+            <a:r>
+              <a:rPr sz="1250" b="1" i="0">
+                <a:solidFill>
+                  <a:srgbClr val="E8A33D"/>
+                </a:solidFill>
+                <a:latin typeface="Arial"/>
+                <a:cs typeface="Arial"/>
+              </a:rPr>
+              <a:t>مسیر دوم</a:t>
             </a:r>
           </a:p>
         </p:txBody>
@@ -18807,50 +18807,7 @@
         </p:nvSpPr>
         <p:spPr>
           <a:xfrm>
-            <a:off x="548640" y="347472"/>
-            <a:ext cx="11064240" cy="292608"/>
-          </a:xfrm>
-          <a:prstGeom prst="rect">
-            <a:avLst/>
-          </a:prstGeom>
-          <a:noFill/>
-        </p:spPr>
-        <p:txBody>
-          <a:bodyPr wrap="square" anchor="t" lIns="0" rIns="0" tIns="0" bIns="0">
-            <a:spAutoFit/>
-          </a:bodyPr>
-          <a:lstStyle/>
-          <a:p>
-            <a:pPr rtl="1" algn="r">
-              <a:spcBef>
-                <a:spcPts val="0"/>
-              </a:spcBef>
-              <a:spcAft>
-                <a:spcPts val="0"/>
-              </a:spcAft>
-            </a:pPr>
-            <a:r>
-              <a:rPr sz="1300" b="1" i="0">
-                <a:solidFill>
-                  <a:srgbClr val="E8A33D"/>
-                </a:solidFill>
-                <a:latin typeface="Arial"/>
-                <a:cs typeface="Arial"/>
-              </a:rPr>
-              <a:t>مسیر دوم</a:t>
-            </a:r>
-          </a:p>
-        </p:txBody>
-      </p:sp>
-      <p:sp>
-        <p:nvSpPr>
-          <p:cNvPr id="3" name="TextBox 2"/>
-          <p:cNvSpPr txBox="1"/>
-          <p:nvPr/>
-        </p:nvSpPr>
-        <p:spPr>
-          <a:xfrm>
-            <a:off x="548640" y="658368"/>
+            <a:off x="548640" y="411480"/>
             <a:ext cx="11064240" cy="731520"/>
           </a:xfrm>
           <a:prstGeom prst="rect">
@@ -18881,6 +18838,49 @@
                 <a:cs typeface="Arial"/>
               </a:rPr>
               <a:t>مسیر بهبود، گام به گام</a:t>
+            </a:r>
+          </a:p>
+        </p:txBody>
+      </p:sp>
+      <p:sp>
+        <p:nvSpPr>
+          <p:cNvPr id="3" name="TextBox 2"/>
+          <p:cNvSpPr txBox="1"/>
+          <p:nvPr/>
+        </p:nvSpPr>
+        <p:spPr>
+          <a:xfrm>
+            <a:off x="548640" y="1133856"/>
+            <a:ext cx="11064240" cy="292608"/>
+          </a:xfrm>
+          <a:prstGeom prst="rect">
+            <a:avLst/>
+          </a:prstGeom>
+          <a:noFill/>
+        </p:spPr>
+        <p:txBody>
+          <a:bodyPr wrap="square" anchor="t" lIns="0" rIns="0" tIns="0" bIns="0">
+            <a:spAutoFit/>
+          </a:bodyPr>
+          <a:lstStyle/>
+          <a:p>
+            <a:pPr rtl="1" algn="r">
+              <a:spcBef>
+                <a:spcPts val="0"/>
+              </a:spcBef>
+              <a:spcAft>
+                <a:spcPts val="0"/>
+              </a:spcAft>
+            </a:pPr>
+            <a:r>
+              <a:rPr sz="1250" b="1" i="0">
+                <a:solidFill>
+                  <a:srgbClr val="E8A33D"/>
+                </a:solidFill>
+                <a:latin typeface="Arial"/>
+                <a:cs typeface="Arial"/>
+              </a:rPr>
+              <a:t>مسیر دوم</a:t>
             </a:r>
           </a:p>
         </p:txBody>
@@ -20327,50 +20327,7 @@
         </p:nvSpPr>
         <p:spPr>
           <a:xfrm>
-            <a:off x="548640" y="347472"/>
-            <a:ext cx="11064240" cy="292608"/>
-          </a:xfrm>
-          <a:prstGeom prst="rect">
-            <a:avLst/>
-          </a:prstGeom>
-          <a:noFill/>
-        </p:spPr>
-        <p:txBody>
-          <a:bodyPr wrap="square" anchor="t" lIns="0" rIns="0" tIns="0" bIns="0">
-            <a:spAutoFit/>
-          </a:bodyPr>
-          <a:lstStyle/>
-          <a:p>
-            <a:pPr rtl="1" algn="r">
-              <a:spcBef>
-                <a:spcPts val="0"/>
-              </a:spcBef>
-              <a:spcAft>
-                <a:spcPts val="0"/>
-              </a:spcAft>
-            </a:pPr>
-            <a:r>
-              <a:rPr sz="1300" b="1" i="0">
-                <a:solidFill>
-                  <a:srgbClr val="E8A33D"/>
-                </a:solidFill>
-                <a:latin typeface="Arial"/>
-                <a:cs typeface="Arial"/>
-              </a:rPr>
-              <a:t>صداقت روش‌شناختی</a:t>
-            </a:r>
-          </a:p>
-        </p:txBody>
-      </p:sp>
-      <p:sp>
-        <p:nvSpPr>
-          <p:cNvPr id="3" name="TextBox 2"/>
-          <p:cNvSpPr txBox="1"/>
-          <p:nvPr/>
-        </p:nvSpPr>
-        <p:spPr>
-          <a:xfrm>
-            <a:off x="548640" y="658368"/>
+            <a:off x="548640" y="411480"/>
             <a:ext cx="11064240" cy="731520"/>
           </a:xfrm>
           <a:prstGeom prst="rect">
@@ -20401,6 +20358,49 @@
                 <a:cs typeface="Arial"/>
               </a:rPr>
               <a:t>آزمایش‌هایی که نتیجه ندادند</a:t>
+            </a:r>
+          </a:p>
+        </p:txBody>
+      </p:sp>
+      <p:sp>
+        <p:nvSpPr>
+          <p:cNvPr id="3" name="TextBox 2"/>
+          <p:cNvSpPr txBox="1"/>
+          <p:nvPr/>
+        </p:nvSpPr>
+        <p:spPr>
+          <a:xfrm>
+            <a:off x="548640" y="1133856"/>
+            <a:ext cx="11064240" cy="292608"/>
+          </a:xfrm>
+          <a:prstGeom prst="rect">
+            <a:avLst/>
+          </a:prstGeom>
+          <a:noFill/>
+        </p:spPr>
+        <p:txBody>
+          <a:bodyPr wrap="square" anchor="t" lIns="0" rIns="0" tIns="0" bIns="0">
+            <a:spAutoFit/>
+          </a:bodyPr>
+          <a:lstStyle/>
+          <a:p>
+            <a:pPr rtl="1" algn="r">
+              <a:spcBef>
+                <a:spcPts val="0"/>
+              </a:spcBef>
+              <a:spcAft>
+                <a:spcPts val="0"/>
+              </a:spcAft>
+            </a:pPr>
+            <a:r>
+              <a:rPr sz="1250" b="1" i="0">
+                <a:solidFill>
+                  <a:srgbClr val="E8A33D"/>
+                </a:solidFill>
+                <a:latin typeface="Arial"/>
+                <a:cs typeface="Arial"/>
+              </a:rPr>
+              <a:t>صداقت روش‌شناختی</a:t>
             </a:r>
           </a:p>
         </p:txBody>
@@ -21631,50 +21631,7 @@
         </p:nvSpPr>
         <p:spPr>
           <a:xfrm>
-            <a:off x="548640" y="347472"/>
-            <a:ext cx="11064240" cy="292608"/>
-          </a:xfrm>
-          <a:prstGeom prst="rect">
-            <a:avLst/>
-          </a:prstGeom>
-          <a:noFill/>
-        </p:spPr>
-        <p:txBody>
-          <a:bodyPr wrap="square" anchor="t" lIns="0" rIns="0" tIns="0" bIns="0">
-            <a:spAutoFit/>
-          </a:bodyPr>
-          <a:lstStyle/>
-          <a:p>
-            <a:pPr rtl="1" algn="r">
-              <a:spcBef>
-                <a:spcPts val="0"/>
-              </a:spcBef>
-              <a:spcAft>
-                <a:spcPts val="0"/>
-              </a:spcAft>
-            </a:pPr>
-            <a:r>
-              <a:rPr sz="1300" b="1" i="0">
-                <a:solidFill>
-                  <a:srgbClr val="E8A33D"/>
-                </a:solidFill>
-                <a:latin typeface="Arial"/>
-                <a:cs typeface="Arial"/>
-              </a:rPr>
-              <a:t>اعتبارسنجی آماری</a:t>
-            </a:r>
-          </a:p>
-        </p:txBody>
-      </p:sp>
-      <p:sp>
-        <p:nvSpPr>
-          <p:cNvPr id="3" name="TextBox 2"/>
-          <p:cNvSpPr txBox="1"/>
-          <p:nvPr/>
-        </p:nvSpPr>
-        <p:spPr>
-          <a:xfrm>
-            <a:off x="548640" y="658368"/>
+            <a:off x="548640" y="411480"/>
             <a:ext cx="11064240" cy="731520"/>
           </a:xfrm>
           <a:prstGeom prst="rect">
@@ -21705,6 +21662,49 @@
                 <a:cs typeface="Arial"/>
               </a:rPr>
               <a:t>چقدر از این اعداد نوفه است؟</a:t>
+            </a:r>
+          </a:p>
+        </p:txBody>
+      </p:sp>
+      <p:sp>
+        <p:nvSpPr>
+          <p:cNvPr id="3" name="TextBox 2"/>
+          <p:cNvSpPr txBox="1"/>
+          <p:nvPr/>
+        </p:nvSpPr>
+        <p:spPr>
+          <a:xfrm>
+            <a:off x="548640" y="1133856"/>
+            <a:ext cx="11064240" cy="292608"/>
+          </a:xfrm>
+          <a:prstGeom prst="rect">
+            <a:avLst/>
+          </a:prstGeom>
+          <a:noFill/>
+        </p:spPr>
+        <p:txBody>
+          <a:bodyPr wrap="square" anchor="t" lIns="0" rIns="0" tIns="0" bIns="0">
+            <a:spAutoFit/>
+          </a:bodyPr>
+          <a:lstStyle/>
+          <a:p>
+            <a:pPr rtl="1" algn="r">
+              <a:spcBef>
+                <a:spcPts val="0"/>
+              </a:spcBef>
+              <a:spcAft>
+                <a:spcPts val="0"/>
+              </a:spcAft>
+            </a:pPr>
+            <a:r>
+              <a:rPr sz="1250" b="1" i="0">
+                <a:solidFill>
+                  <a:srgbClr val="E8A33D"/>
+                </a:solidFill>
+                <a:latin typeface="Arial"/>
+                <a:cs typeface="Arial"/>
+              </a:rPr>
+              <a:t>اعتبارسنجی آماری</a:t>
             </a:r>
           </a:p>
         </p:txBody>
@@ -23035,50 +23035,7 @@
         </p:nvSpPr>
         <p:spPr>
           <a:xfrm>
-            <a:off x="548640" y="347472"/>
-            <a:ext cx="11064240" cy="292608"/>
-          </a:xfrm>
-          <a:prstGeom prst="rect">
-            <a:avLst/>
-          </a:prstGeom>
-          <a:noFill/>
-        </p:spPr>
-        <p:txBody>
-          <a:bodyPr wrap="square" anchor="t" lIns="0" rIns="0" tIns="0" bIns="0">
-            <a:spAutoFit/>
-          </a:bodyPr>
-          <a:lstStyle/>
-          <a:p>
-            <a:pPr rtl="1" algn="r">
-              <a:spcBef>
-                <a:spcPts val="0"/>
-              </a:spcBef>
-              <a:spcAft>
-                <a:spcPts val="0"/>
-              </a:spcAft>
-            </a:pPr>
-            <a:r>
-              <a:rPr sz="1300" b="1" i="0">
-                <a:solidFill>
-                  <a:srgbClr val="E8A33D"/>
-                </a:solidFill>
-                <a:latin typeface="Arial"/>
-                <a:cs typeface="Arial"/>
-              </a:rPr>
-              <a:t>جمع‌بندی نتایج</a:t>
-            </a:r>
-          </a:p>
-        </p:txBody>
-      </p:sp>
-      <p:sp>
-        <p:nvSpPr>
-          <p:cNvPr id="3" name="TextBox 2"/>
-          <p:cNvSpPr txBox="1"/>
-          <p:nvPr/>
-        </p:nvSpPr>
-        <p:spPr>
-          <a:xfrm>
-            <a:off x="548640" y="658368"/>
+            <a:off x="548640" y="411480"/>
             <a:ext cx="11064240" cy="731520"/>
           </a:xfrm>
           <a:prstGeom prst="rect">
@@ -23109,6 +23066,49 @@
                 <a:cs typeface="Arial"/>
               </a:rPr>
               <a:t>جدول کامل نتایج</a:t>
+            </a:r>
+          </a:p>
+        </p:txBody>
+      </p:sp>
+      <p:sp>
+        <p:nvSpPr>
+          <p:cNvPr id="3" name="TextBox 2"/>
+          <p:cNvSpPr txBox="1"/>
+          <p:nvPr/>
+        </p:nvSpPr>
+        <p:spPr>
+          <a:xfrm>
+            <a:off x="548640" y="1133856"/>
+            <a:ext cx="11064240" cy="292608"/>
+          </a:xfrm>
+          <a:prstGeom prst="rect">
+            <a:avLst/>
+          </a:prstGeom>
+          <a:noFill/>
+        </p:spPr>
+        <p:txBody>
+          <a:bodyPr wrap="square" anchor="t" lIns="0" rIns="0" tIns="0" bIns="0">
+            <a:spAutoFit/>
+          </a:bodyPr>
+          <a:lstStyle/>
+          <a:p>
+            <a:pPr rtl="1" algn="r">
+              <a:spcBef>
+                <a:spcPts val="0"/>
+              </a:spcBef>
+              <a:spcAft>
+                <a:spcPts val="0"/>
+              </a:spcAft>
+            </a:pPr>
+            <a:r>
+              <a:rPr sz="1250" b="1" i="0">
+                <a:solidFill>
+                  <a:srgbClr val="E8A33D"/>
+                </a:solidFill>
+                <a:latin typeface="Arial"/>
+                <a:cs typeface="Arial"/>
+              </a:rPr>
+              <a:t>جمع‌بندی نتایج</a:t>
             </a:r>
           </a:p>
         </p:txBody>
@@ -25953,50 +25953,7 @@
         </p:nvSpPr>
         <p:spPr>
           <a:xfrm>
-            <a:off x="548640" y="347472"/>
-            <a:ext cx="11064240" cy="292608"/>
-          </a:xfrm>
-          <a:prstGeom prst="rect">
-            <a:avLst/>
-          </a:prstGeom>
-          <a:noFill/>
-        </p:spPr>
-        <p:txBody>
-          <a:bodyPr wrap="square" anchor="t" lIns="0" rIns="0" tIns="0" bIns="0">
-            <a:spAutoFit/>
-          </a:bodyPr>
-          <a:lstStyle/>
-          <a:p>
-            <a:pPr rtl="1" algn="r">
-              <a:spcBef>
-                <a:spcPts val="0"/>
-              </a:spcBef>
-              <a:spcAft>
-                <a:spcPts val="0"/>
-              </a:spcAft>
-            </a:pPr>
-            <a:r>
-              <a:rPr sz="1300" b="1" i="0">
-                <a:solidFill>
-                  <a:srgbClr val="E8A33D"/>
-                </a:solidFill>
-                <a:latin typeface="Arial"/>
-                <a:cs typeface="Arial"/>
-              </a:rPr>
-              <a:t>داده</a:t>
-            </a:r>
-          </a:p>
-        </p:txBody>
-      </p:sp>
-      <p:sp>
-        <p:nvSpPr>
-          <p:cNvPr id="3" name="TextBox 2"/>
-          <p:cNvSpPr txBox="1"/>
-          <p:nvPr/>
-        </p:nvSpPr>
-        <p:spPr>
-          <a:xfrm>
-            <a:off x="548640" y="658368"/>
+            <a:off x="548640" y="411480"/>
             <a:ext cx="11064240" cy="731520"/>
           </a:xfrm>
           <a:prstGeom prst="rect">
@@ -26027,6 +25984,49 @@
                 <a:cs typeface="Arial"/>
               </a:rPr>
               <a:t>مجموعه داده UCF-Crime</a:t>
+            </a:r>
+          </a:p>
+        </p:txBody>
+      </p:sp>
+      <p:sp>
+        <p:nvSpPr>
+          <p:cNvPr id="3" name="TextBox 2"/>
+          <p:cNvSpPr txBox="1"/>
+          <p:nvPr/>
+        </p:nvSpPr>
+        <p:spPr>
+          <a:xfrm>
+            <a:off x="548640" y="1133856"/>
+            <a:ext cx="11064240" cy="292608"/>
+          </a:xfrm>
+          <a:prstGeom prst="rect">
+            <a:avLst/>
+          </a:prstGeom>
+          <a:noFill/>
+        </p:spPr>
+        <p:txBody>
+          <a:bodyPr wrap="square" anchor="t" lIns="0" rIns="0" tIns="0" bIns="0">
+            <a:spAutoFit/>
+          </a:bodyPr>
+          <a:lstStyle/>
+          <a:p>
+            <a:pPr rtl="1" algn="r">
+              <a:spcBef>
+                <a:spcPts val="0"/>
+              </a:spcBef>
+              <a:spcAft>
+                <a:spcPts val="0"/>
+              </a:spcAft>
+            </a:pPr>
+            <a:r>
+              <a:rPr sz="1250" b="1" i="0">
+                <a:solidFill>
+                  <a:srgbClr val="E8A33D"/>
+                </a:solidFill>
+                <a:latin typeface="Arial"/>
+                <a:cs typeface="Arial"/>
+              </a:rPr>
+              <a:t>داده</a:t>
             </a:r>
           </a:p>
         </p:txBody>
@@ -26813,50 +26813,7 @@
         </p:nvSpPr>
         <p:spPr>
           <a:xfrm>
-            <a:off x="548640" y="347472"/>
-            <a:ext cx="11064240" cy="292608"/>
-          </a:xfrm>
-          <a:prstGeom prst="rect">
-            <a:avLst/>
-          </a:prstGeom>
-          <a:noFill/>
-        </p:spPr>
-        <p:txBody>
-          <a:bodyPr wrap="square" anchor="t" lIns="0" rIns="0" tIns="0" bIns="0">
-            <a:spAutoFit/>
-          </a:bodyPr>
-          <a:lstStyle/>
-          <a:p>
-            <a:pPr rtl="1" algn="r">
-              <a:spcBef>
-                <a:spcPts val="0"/>
-              </a:spcBef>
-              <a:spcAft>
-                <a:spcPts val="0"/>
-              </a:spcAft>
-            </a:pPr>
-            <a:r>
-              <a:rPr sz="1300" b="1" i="0">
-                <a:solidFill>
-                  <a:srgbClr val="E8A33D"/>
-                </a:solidFill>
-                <a:latin typeface="Arial"/>
-                <a:cs typeface="Arial"/>
-              </a:rPr>
-              <a:t>تقسیم داده</a:t>
-            </a:r>
-          </a:p>
-        </p:txBody>
-      </p:sp>
-      <p:sp>
-        <p:nvSpPr>
-          <p:cNvPr id="3" name="TextBox 2"/>
-          <p:cNvSpPr txBox="1"/>
-          <p:nvPr/>
-        </p:nvSpPr>
-        <p:spPr>
-          <a:xfrm>
-            <a:off x="548640" y="658368"/>
+            <a:off x="548640" y="411480"/>
             <a:ext cx="11064240" cy="731520"/>
           </a:xfrm>
           <a:prstGeom prst="rect">
@@ -26887,6 +26844,49 @@
                 <a:cs typeface="Arial"/>
               </a:rPr>
               <a:t>تعداد ویدیو در هر کلاس — مجموعه آموزش</a:t>
+            </a:r>
+          </a:p>
+        </p:txBody>
+      </p:sp>
+      <p:sp>
+        <p:nvSpPr>
+          <p:cNvPr id="3" name="TextBox 2"/>
+          <p:cNvSpPr txBox="1"/>
+          <p:nvPr/>
+        </p:nvSpPr>
+        <p:spPr>
+          <a:xfrm>
+            <a:off x="548640" y="1133856"/>
+            <a:ext cx="11064240" cy="292608"/>
+          </a:xfrm>
+          <a:prstGeom prst="rect">
+            <a:avLst/>
+          </a:prstGeom>
+          <a:noFill/>
+        </p:spPr>
+        <p:txBody>
+          <a:bodyPr wrap="square" anchor="t" lIns="0" rIns="0" tIns="0" bIns="0">
+            <a:spAutoFit/>
+          </a:bodyPr>
+          <a:lstStyle/>
+          <a:p>
+            <a:pPr rtl="1" algn="r">
+              <a:spcBef>
+                <a:spcPts val="0"/>
+              </a:spcBef>
+              <a:spcAft>
+                <a:spcPts val="0"/>
+              </a:spcAft>
+            </a:pPr>
+            <a:r>
+              <a:rPr sz="1250" b="1" i="0">
+                <a:solidFill>
+                  <a:srgbClr val="E8A33D"/>
+                </a:solidFill>
+                <a:latin typeface="Arial"/>
+                <a:cs typeface="Arial"/>
+              </a:rPr>
+              <a:t>تقسیم داده</a:t>
             </a:r>
           </a:p>
         </p:txBody>
@@ -28134,50 +28134,7 @@
         </p:nvSpPr>
         <p:spPr>
           <a:xfrm>
-            <a:off x="548640" y="347472"/>
-            <a:ext cx="11064240" cy="292608"/>
-          </a:xfrm>
-          <a:prstGeom prst="rect">
-            <a:avLst/>
-          </a:prstGeom>
-          <a:noFill/>
-        </p:spPr>
-        <p:txBody>
-          <a:bodyPr wrap="square" anchor="t" lIns="0" rIns="0" tIns="0" bIns="0">
-            <a:spAutoFit/>
-          </a:bodyPr>
-          <a:lstStyle/>
-          <a:p>
-            <a:pPr rtl="1" algn="r">
-              <a:spcBef>
-                <a:spcPts val="0"/>
-              </a:spcBef>
-              <a:spcAft>
-                <a:spcPts val="0"/>
-              </a:spcAft>
-            </a:pPr>
-            <a:r>
-              <a:rPr sz="1300" b="1" i="0">
-                <a:solidFill>
-                  <a:srgbClr val="E8A33D"/>
-                </a:solidFill>
-                <a:latin typeface="Arial"/>
-                <a:cs typeface="Arial"/>
-              </a:rPr>
-              <a:t>تقسیم داده</a:t>
-            </a:r>
-          </a:p>
-        </p:txBody>
-      </p:sp>
-      <p:sp>
-        <p:nvSpPr>
-          <p:cNvPr id="3" name="TextBox 2"/>
-          <p:cNvSpPr txBox="1"/>
-          <p:nvPr/>
-        </p:nvSpPr>
-        <p:spPr>
-          <a:xfrm>
-            <a:off x="548640" y="658368"/>
+            <a:off x="548640" y="411480"/>
             <a:ext cx="11064240" cy="731520"/>
           </a:xfrm>
           <a:prstGeom prst="rect">
@@ -28208,6 +28165,49 @@
                 <a:cs typeface="Arial"/>
               </a:rPr>
               <a:t>تعداد ویدیو در هر کلاس — مجموعه آزمون</a:t>
+            </a:r>
+          </a:p>
+        </p:txBody>
+      </p:sp>
+      <p:sp>
+        <p:nvSpPr>
+          <p:cNvPr id="3" name="TextBox 2"/>
+          <p:cNvSpPr txBox="1"/>
+          <p:nvPr/>
+        </p:nvSpPr>
+        <p:spPr>
+          <a:xfrm>
+            <a:off x="548640" y="1133856"/>
+            <a:ext cx="11064240" cy="292608"/>
+          </a:xfrm>
+          <a:prstGeom prst="rect">
+            <a:avLst/>
+          </a:prstGeom>
+          <a:noFill/>
+        </p:spPr>
+        <p:txBody>
+          <a:bodyPr wrap="square" anchor="t" lIns="0" rIns="0" tIns="0" bIns="0">
+            <a:spAutoFit/>
+          </a:bodyPr>
+          <a:lstStyle/>
+          <a:p>
+            <a:pPr rtl="1" algn="r">
+              <a:spcBef>
+                <a:spcPts val="0"/>
+              </a:spcBef>
+              <a:spcAft>
+                <a:spcPts val="0"/>
+              </a:spcAft>
+            </a:pPr>
+            <a:r>
+              <a:rPr sz="1250" b="1" i="0">
+                <a:solidFill>
+                  <a:srgbClr val="E8A33D"/>
+                </a:solidFill>
+                <a:latin typeface="Arial"/>
+                <a:cs typeface="Arial"/>
+              </a:rPr>
+              <a:t>تقسیم داده</a:t>
             </a:r>
           </a:p>
         </p:txBody>
@@ -30358,50 +30358,7 @@
         </p:nvSpPr>
         <p:spPr>
           <a:xfrm>
-            <a:off x="548640" y="347472"/>
-            <a:ext cx="11064240" cy="292608"/>
-          </a:xfrm>
-          <a:prstGeom prst="rect">
-            <a:avLst/>
-          </a:prstGeom>
-          <a:noFill/>
-        </p:spPr>
-        <p:txBody>
-          <a:bodyPr wrap="square" anchor="t" lIns="0" rIns="0" tIns="0" bIns="0">
-            <a:spAutoFit/>
-          </a:bodyPr>
-          <a:lstStyle/>
-          <a:p>
-            <a:pPr rtl="1" algn="r">
-              <a:spcBef>
-                <a:spcPts val="0"/>
-              </a:spcBef>
-              <a:spcAft>
-                <a:spcPts val="0"/>
-              </a:spcAft>
-            </a:pPr>
-            <a:r>
-              <a:rPr sz="1300" b="1" i="0">
-                <a:solidFill>
-                  <a:srgbClr val="E8A33D"/>
-                </a:solidFill>
-                <a:latin typeface="Arial"/>
-                <a:cs typeface="Arial"/>
-              </a:rPr>
-              <a:t>چارچوب</a:t>
-            </a:r>
-          </a:p>
-        </p:txBody>
-      </p:sp>
-      <p:sp>
-        <p:nvSpPr>
-          <p:cNvPr id="3" name="TextBox 2"/>
-          <p:cNvSpPr txBox="1"/>
-          <p:nvPr/>
-        </p:nvSpPr>
-        <p:spPr>
-          <a:xfrm>
-            <a:off x="548640" y="658368"/>
+            <a:off x="548640" y="411480"/>
             <a:ext cx="11064240" cy="731520"/>
           </a:xfrm>
           <a:prstGeom prst="rect">
@@ -30432,6 +30389,49 @@
                 <a:cs typeface="Arial"/>
               </a:rPr>
               <a:t>نظارت ضعیف و یادگیری چندنمونه‌ای</a:t>
+            </a:r>
+          </a:p>
+        </p:txBody>
+      </p:sp>
+      <p:sp>
+        <p:nvSpPr>
+          <p:cNvPr id="3" name="TextBox 2"/>
+          <p:cNvSpPr txBox="1"/>
+          <p:nvPr/>
+        </p:nvSpPr>
+        <p:spPr>
+          <a:xfrm>
+            <a:off x="548640" y="1133856"/>
+            <a:ext cx="11064240" cy="292608"/>
+          </a:xfrm>
+          <a:prstGeom prst="rect">
+            <a:avLst/>
+          </a:prstGeom>
+          <a:noFill/>
+        </p:spPr>
+        <p:txBody>
+          <a:bodyPr wrap="square" anchor="t" lIns="0" rIns="0" tIns="0" bIns="0">
+            <a:spAutoFit/>
+          </a:bodyPr>
+          <a:lstStyle/>
+          <a:p>
+            <a:pPr rtl="1" algn="r">
+              <a:spcBef>
+                <a:spcPts val="0"/>
+              </a:spcBef>
+              <a:spcAft>
+                <a:spcPts val="0"/>
+              </a:spcAft>
+            </a:pPr>
+            <a:r>
+              <a:rPr sz="1250" b="1" i="0">
+                <a:solidFill>
+                  <a:srgbClr val="E8A33D"/>
+                </a:solidFill>
+                <a:latin typeface="Arial"/>
+                <a:cs typeface="Arial"/>
+              </a:rPr>
+              <a:t>چارچوب</a:t>
             </a:r>
           </a:p>
         </p:txBody>
@@ -31897,50 +31897,7 @@
         </p:nvSpPr>
         <p:spPr>
           <a:xfrm>
-            <a:off x="548640" y="347472"/>
-            <a:ext cx="11064240" cy="292608"/>
-          </a:xfrm>
-          <a:prstGeom prst="rect">
-            <a:avLst/>
-          </a:prstGeom>
-          <a:noFill/>
-        </p:spPr>
-        <p:txBody>
-          <a:bodyPr wrap="square" anchor="t" lIns="0" rIns="0" tIns="0" bIns="0">
-            <a:spAutoFit/>
-          </a:bodyPr>
-          <a:lstStyle/>
-          <a:p>
-            <a:pPr rtl="1" algn="r">
-              <a:spcBef>
-                <a:spcPts val="0"/>
-              </a:spcBef>
-              <a:spcAft>
-                <a:spcPts val="0"/>
-              </a:spcAft>
-            </a:pPr>
-            <a:r>
-              <a:rPr sz="1300" b="1" i="0">
-                <a:solidFill>
-                  <a:srgbClr val="E8A33D"/>
-                </a:solidFill>
-                <a:latin typeface="Arial"/>
-                <a:cs typeface="Arial"/>
-              </a:rPr>
-              <a:t>مسیر اول</a:t>
-            </a:r>
-          </a:p>
-        </p:txBody>
-      </p:sp>
-      <p:sp>
-        <p:nvSpPr>
-          <p:cNvPr id="3" name="TextBox 2"/>
-          <p:cNvSpPr txBox="1"/>
-          <p:nvPr/>
-        </p:nvSpPr>
-        <p:spPr>
-          <a:xfrm>
-            <a:off x="548640" y="658368"/>
+            <a:off x="548640" y="411480"/>
             <a:ext cx="11064240" cy="731520"/>
           </a:xfrm>
           <a:prstGeom prst="rect">
@@ -31971,6 +31928,49 @@
                 <a:cs typeface="Arial"/>
               </a:rPr>
               <a:t>X-CLIP چطور کار می‌کند</a:t>
+            </a:r>
+          </a:p>
+        </p:txBody>
+      </p:sp>
+      <p:sp>
+        <p:nvSpPr>
+          <p:cNvPr id="3" name="TextBox 2"/>
+          <p:cNvSpPr txBox="1"/>
+          <p:nvPr/>
+        </p:nvSpPr>
+        <p:spPr>
+          <a:xfrm>
+            <a:off x="548640" y="1133856"/>
+            <a:ext cx="11064240" cy="292608"/>
+          </a:xfrm>
+          <a:prstGeom prst="rect">
+            <a:avLst/>
+          </a:prstGeom>
+          <a:noFill/>
+        </p:spPr>
+        <p:txBody>
+          <a:bodyPr wrap="square" anchor="t" lIns="0" rIns="0" tIns="0" bIns="0">
+            <a:spAutoFit/>
+          </a:bodyPr>
+          <a:lstStyle/>
+          <a:p>
+            <a:pPr rtl="1" algn="r">
+              <a:spcBef>
+                <a:spcPts val="0"/>
+              </a:spcBef>
+              <a:spcAft>
+                <a:spcPts val="0"/>
+              </a:spcAft>
+            </a:pPr>
+            <a:r>
+              <a:rPr sz="1250" b="1" i="0">
+                <a:solidFill>
+                  <a:srgbClr val="E8A33D"/>
+                </a:solidFill>
+                <a:latin typeface="Arial"/>
+                <a:cs typeface="Arial"/>
+              </a:rPr>
+              <a:t>مسیر اول</a:t>
             </a:r>
           </a:p>
         </p:txBody>
@@ -32816,50 +32816,7 @@
         </p:nvSpPr>
         <p:spPr>
           <a:xfrm>
-            <a:off x="548640" y="347472"/>
-            <a:ext cx="11064240" cy="292608"/>
-          </a:xfrm>
-          <a:prstGeom prst="rect">
-            <a:avLst/>
-          </a:prstGeom>
-          <a:noFill/>
-        </p:spPr>
-        <p:txBody>
-          <a:bodyPr wrap="square" anchor="t" lIns="0" rIns="0" tIns="0" bIns="0">
-            <a:spAutoFit/>
-          </a:bodyPr>
-          <a:lstStyle/>
-          <a:p>
-            <a:pPr rtl="1" algn="r">
-              <a:spcBef>
-                <a:spcPts val="0"/>
-              </a:spcBef>
-              <a:spcAft>
-                <a:spcPts val="0"/>
-              </a:spcAft>
-            </a:pPr>
-            <a:r>
-              <a:rPr sz="1300" b="1" i="0">
-                <a:solidFill>
-                  <a:srgbClr val="E8A33D"/>
-                </a:solidFill>
-                <a:latin typeface="Arial"/>
-                <a:cs typeface="Arial"/>
-              </a:rPr>
-              <a:t>مسیر اول</a:t>
-            </a:r>
-          </a:p>
-        </p:txBody>
-      </p:sp>
-      <p:sp>
-        <p:nvSpPr>
-          <p:cNvPr id="3" name="TextBox 2"/>
-          <p:cNvSpPr txBox="1"/>
-          <p:nvPr/>
-        </p:nvSpPr>
-        <p:spPr>
-          <a:xfrm>
-            <a:off x="548640" y="658368"/>
+            <a:off x="548640" y="411480"/>
             <a:ext cx="11064240" cy="731520"/>
           </a:xfrm>
           <a:prstGeom prst="rect">
@@ -32890,6 +32847,49 @@
                 <a:cs typeface="Arial"/>
               </a:rPr>
               <a:t>سه اشکال بنیادی که پیدا و اصلاح شد</a:t>
+            </a:r>
+          </a:p>
+        </p:txBody>
+      </p:sp>
+      <p:sp>
+        <p:nvSpPr>
+          <p:cNvPr id="3" name="TextBox 2"/>
+          <p:cNvSpPr txBox="1"/>
+          <p:nvPr/>
+        </p:nvSpPr>
+        <p:spPr>
+          <a:xfrm>
+            <a:off x="548640" y="1133856"/>
+            <a:ext cx="11064240" cy="292608"/>
+          </a:xfrm>
+          <a:prstGeom prst="rect">
+            <a:avLst/>
+          </a:prstGeom>
+          <a:noFill/>
+        </p:spPr>
+        <p:txBody>
+          <a:bodyPr wrap="square" anchor="t" lIns="0" rIns="0" tIns="0" bIns="0">
+            <a:spAutoFit/>
+          </a:bodyPr>
+          <a:lstStyle/>
+          <a:p>
+            <a:pPr rtl="1" algn="r">
+              <a:spcBef>
+                <a:spcPts val="0"/>
+              </a:spcBef>
+              <a:spcAft>
+                <a:spcPts val="0"/>
+              </a:spcAft>
+            </a:pPr>
+            <a:r>
+              <a:rPr sz="1250" b="1" i="0">
+                <a:solidFill>
+                  <a:srgbClr val="E8A33D"/>
+                </a:solidFill>
+                <a:latin typeface="Arial"/>
+                <a:cs typeface="Arial"/>
+              </a:rPr>
+              <a:t>مسیر اول</a:t>
             </a:r>
           </a:p>
         </p:txBody>

--- a/thesis/Defense_Slides.pptx
+++ b/thesis/Defense_Slides.pptx
@@ -5454,7 +5454,7 @@
                 <a:latin typeface="Vazir"/>
                 <a:cs typeface="Vazir"/>
               </a:rPr>
-              <a:t>یادگیری چندنمونه‌ای ضعیف‌نظارت با ستون فقرات ترنسفورمر ویدیویی</a:t>
+              <a:t>یادگیری چندنمونه‌ای ضعیف‌نظارت با ستون فقرات مبدل ویدیویی</a:t>
             </a:r>
           </a:p>
         </p:txBody>
@@ -13696,7 +13696,7 @@
                 <a:latin typeface="Vazir"/>
                 <a:cs typeface="Vazir"/>
               </a:rPr>
-              <a:t>سر ترنسفورمر</a:t>
+              <a:t>سر مبدل</a:t>
             </a:r>
           </a:p>
         </p:txBody>
@@ -14445,7 +14445,7 @@
                 <a:latin typeface="Vazir"/>
                 <a:cs typeface="Vazir"/>
               </a:rPr>
-              <a:t>سر ترنسفورمر روی محور زمان</a:t>
+              <a:t>سر مبدل روی محور زمان</a:t>
             </a:r>
           </a:p>
         </p:txBody>
@@ -15427,7 +15427,7 @@
                           <a:latin typeface="Vazir"/>
                           <a:cs typeface="Vazir"/>
                         </a:rPr>
-                        <a:t>سر ترنسفورمر زمانی</a:t>
+                        <a:t>سر مبدل زمانی</a:t>
                       </a:r>
                     </a:p>
                   </a:txBody>
@@ -24101,7 +24101,7 @@
                           <a:latin typeface="Vazir"/>
                           <a:cs typeface="Vazir"/>
                         </a:rPr>
-                        <a:t>مسیر دوم — سر ترنسفورمر زمانی</a:t>
+                        <a:t>مسیر دوم — سر مبدل زمانی</a:t>
                       </a:r>
                     </a:p>
                   </a:txBody>
@@ -25564,7 +25564,7 @@
                 <a:latin typeface="Vazir"/>
                 <a:cs typeface="Vazir"/>
               </a:rPr>
-              <a:t>اصلاح سه اشکال بنیادی، بازطراحی معماری با رمزگذار منجمد، سر ترنسفورمر زمانی، و پروتکل ارزیابی با کف نوفه</a:t>
+              <a:t>اصلاح سه اشکال بنیادی، بازطراحی معماری با رمزگذار منجمد، سر مبدل زمانی، و پروتکل ارزیابی با کف نوفه</a:t>
             </a:r>
           </a:p>
         </p:txBody>
